--- a/Amaliyot №6. Birlamchi oʻzgartirgichlar optik va temperatura datchiklari.pptx
+++ b/Amaliyot №6. Birlamchi oʻzgartirgichlar optik va temperatura datchiklari.pptx
@@ -4,6 +4,9 @@
   <p:sldMasterIdLst>
     <p:sldMasterId id="2147483648" r:id="rId1"/>
   </p:sldMasterIdLst>
+  <p:notesMasterIdLst>
+    <p:notesMasterId r:id="rId18"/>
+  </p:notesMasterIdLst>
   <p:sldIdLst>
     <p:sldId id="256" r:id="rId2"/>
     <p:sldId id="257" r:id="rId3"/>
@@ -22,18 +25,14 @@
     <p:sldId id="270" r:id="rId16"/>
     <p:sldId id="271" r:id="rId17"/>
   </p:sldIdLst>
-  <p:notesMasterIdLst>
-    <p:notesMasterId r:id="rId18"/>
-  </p:notesMasterIdLst>
   <p:sldSz cx="12192000" cy="6858000"/>
   <p:notesSz cx="6858000" cy="12192000"/>
   <p:embeddedFontLst>
     <p:embeddedFont>
       <p:font typeface="Noto Sans" panose="020B0502040504020204" pitchFamily="34" charset="0"/>
-      <p:regular r:id="rId23"/>
-      <p:bold r:id="rId24"/>
-      <p:italic r:id="rId25"/>
-      <p:boldItalic r:id="rId26"/>
+      <p:regular r:id="rId19"/>
+      <p:bold r:id="rId20"/>
+      <p:italic r:id="rId21"/>
     </p:embeddedFont>
   </p:embeddedFontLst>
   <p:defaultTextStyle>
@@ -128,6 +127,11 @@
       </a:defRPr>
     </a:lvl9pPr>
   </p:defaultTextStyle>
+  <p:extLst>
+    <p:ext uri="{EFAFB233-063F-42B5-8137-9DF3F51BA10A}">
+      <p15:sldGuideLst xmlns:p15="http://schemas.microsoft.com/office/powerpoint/2012/main"/>
+    </p:ext>
+  </p:extLst>
 </p:presentation>
 </file>
 
@@ -153,234 +157,10 @@
           <a:chExt cx="0" cy="0"/>
         </a:xfrm>
       </p:grpSpPr>
-      <p:sp>
-        <p:nvSpPr>
-          <p:cNvPr id="2" name="Header Placeholder 1"/>
-          <p:cNvSpPr>
-            <a:spLocks noGrp="1"/>
-          </p:cNvSpPr>
-          <p:nvPr>
-            <p:ph type="hdr" sz="quarter"/>
-          </p:nvPr>
-        </p:nvSpPr>
-        <p:spPr>
-          <a:xfrm>
-            <a:off x="0" y="0"/>
-            <a:ext cx="2971800" cy="458788"/>
-          </a:xfrm>
-          <a:prstGeom prst="rect">
-            <a:avLst/>
-          </a:prstGeom>
-        </p:spPr>
-        <p:txBody>
-          <a:bodyPr vert="horz" lIns="91440" tIns="45720" rIns="91440" bIns="45720" rtlCol="0"/>
-          <a:lstStyle>
-            <a:lvl1pPr algn="l">
-              <a:defRPr sz="1200"/>
-            </a:lvl1pPr>
-          </a:lstStyle>
-          <a:p>
-            <a:endParaRPr lang="en-US"/>
-          </a:p>
-        </p:txBody>
-      </p:sp>
-      <p:sp>
-        <p:nvSpPr>
-          <p:cNvPr id="3" name="Date Placeholder 2"/>
-          <p:cNvSpPr>
-            <a:spLocks noGrp="1"/>
-          </p:cNvSpPr>
-          <p:nvPr>
-            <p:ph type="dt" idx="1"/>
-          </p:nvPr>
-        </p:nvSpPr>
-        <p:spPr>
-          <a:xfrm>
-            <a:off x="3884613" y="0"/>
-            <a:ext cx="2971800" cy="458788"/>
-          </a:xfrm>
-          <a:prstGeom prst="rect">
-            <a:avLst/>
-          </a:prstGeom>
-        </p:spPr>
-        <p:txBody>
-          <a:bodyPr vert="horz" lIns="91440" tIns="45720" rIns="91440" bIns="45720" rtlCol="0"/>
-          <a:lstStyle>
-            <a:lvl1pPr algn="r">
-              <a:defRPr sz="1200"/>
-            </a:lvl1pPr>
-          </a:lstStyle>
-          <a:p>
-            <a:fld id="{5282F153-3F37-0F45-9E97-73ACFA13230C}" type="datetimeFigureOut">
-              <a:rPr lang="en-US"/>
-              <a:t>7/23/19</a:t>
-            </a:fld>
-            <a:endParaRPr lang="en-US"/>
-          </a:p>
-        </p:txBody>
-      </p:sp>
-      <p:sp>
-        <p:nvSpPr>
-          <p:cNvPr id="4" name="Slide Image Placeholder 3"/>
-          <p:cNvSpPr>
-            <a:spLocks noGrp="1" noRot="1" noChangeAspect="1"/>
-          </p:cNvSpPr>
-          <p:nvPr>
-            <p:ph type="sldImg" idx="2"/>
-          </p:nvPr>
-        </p:nvSpPr>
-        <p:spPr>
-          <a:xfrm>
-            <a:off x="685800" y="1143000"/>
-            <a:ext cx="5486400" cy="3086100"/>
-          </a:xfrm>
-          <a:prstGeom prst="rect">
-            <a:avLst/>
-          </a:prstGeom>
-          <a:noFill/>
-          <a:ln w="12700">
-            <a:solidFill>
-              <a:prstClr val="black"/>
-            </a:solidFill>
-          </a:ln>
-        </p:spPr>
-        <p:txBody>
-          <a:bodyPr vert="horz" lIns="91440" tIns="45720" rIns="91440" bIns="45720" rtlCol="0" anchor="ctr"/>
-          <a:lstStyle/>
-          <a:p>
-            <a:endParaRPr lang="en-US"/>
-          </a:p>
-        </p:txBody>
-      </p:sp>
-      <p:sp>
-        <p:nvSpPr>
-          <p:cNvPr id="5" name="Notes Placeholder 4"/>
-          <p:cNvSpPr>
-            <a:spLocks noGrp="1"/>
-          </p:cNvSpPr>
-          <p:nvPr>
-            <p:ph type="body" sz="quarter" idx="3"/>
-          </p:nvPr>
-        </p:nvSpPr>
-        <p:spPr>
-          <a:xfrm>
-            <a:off x="685800" y="4400550"/>
-            <a:ext cx="5486400" cy="3600450"/>
-          </a:xfrm>
-          <a:prstGeom prst="rect">
-            <a:avLst/>
-          </a:prstGeom>
-        </p:spPr>
-        <p:txBody>
-          <a:bodyPr vert="horz" lIns="91440" tIns="45720" rIns="91440" bIns="45720" rtlCol="0"/>
-          <a:lstStyle/>
-          <a:p>
-            <a:pPr lvl="0"/>
-            <a:r>
-              <a:rPr lang="en-US"/>
-              <a:t>Click to edit Master text styles</a:t>
-            </a:r>
-          </a:p>
-          <a:p>
-            <a:pPr lvl="1"/>
-            <a:r>
-              <a:rPr lang="en-US"/>
-              <a:t>Second level</a:t>
-            </a:r>
-          </a:p>
-          <a:p>
-            <a:pPr lvl="2"/>
-            <a:r>
-              <a:rPr lang="en-US"/>
-              <a:t>Third level</a:t>
-            </a:r>
-          </a:p>
-          <a:p>
-            <a:pPr lvl="3"/>
-            <a:r>
-              <a:rPr lang="en-US"/>
-              <a:t>Fourth level</a:t>
-            </a:r>
-          </a:p>
-          <a:p>
-            <a:pPr lvl="4"/>
-            <a:r>
-              <a:rPr lang="en-US"/>
-              <a:t>Fifth level</a:t>
-            </a:r>
-          </a:p>
-        </p:txBody>
-      </p:sp>
-      <p:sp>
-        <p:nvSpPr>
-          <p:cNvPr id="6" name="Footer Placeholder 5"/>
-          <p:cNvSpPr>
-            <a:spLocks noGrp="1"/>
-          </p:cNvSpPr>
-          <p:nvPr>
-            <p:ph type="ftr" sz="quarter" idx="4"/>
-          </p:nvPr>
-        </p:nvSpPr>
-        <p:spPr>
-          <a:xfrm>
-            <a:off x="0" y="8685213"/>
-            <a:ext cx="2971800" cy="458787"/>
-          </a:xfrm>
-          <a:prstGeom prst="rect">
-            <a:avLst/>
-          </a:prstGeom>
-        </p:spPr>
-        <p:txBody>
-          <a:bodyPr vert="horz" lIns="91440" tIns="45720" rIns="91440" bIns="45720" rtlCol="0" anchor="b"/>
-          <a:lstStyle>
-            <a:lvl1pPr algn="l">
-              <a:defRPr sz="1200"/>
-            </a:lvl1pPr>
-          </a:lstStyle>
-          <a:p>
-            <a:endParaRPr lang="en-US"/>
-          </a:p>
-        </p:txBody>
-      </p:sp>
-      <p:sp>
-        <p:nvSpPr>
-          <p:cNvPr id="7" name="Slide Number Placeholder 6"/>
-          <p:cNvSpPr>
-            <a:spLocks noGrp="1"/>
-          </p:cNvSpPr>
-          <p:nvPr>
-            <p:ph type="sldNum" sz="quarter" idx="5"/>
-          </p:nvPr>
-        </p:nvSpPr>
-        <p:spPr>
-          <a:xfrm>
-            <a:off x="3884613" y="8685213"/>
-            <a:ext cx="2971800" cy="458787"/>
-          </a:xfrm>
-          <a:prstGeom prst="rect">
-            <a:avLst/>
-          </a:prstGeom>
-        </p:spPr>
-        <p:txBody>
-          <a:bodyPr vert="horz" lIns="91440" tIns="45720" rIns="91440" bIns="45720" rtlCol="0" anchor="b"/>
-          <a:lstStyle>
-            <a:lvl1pPr algn="r">
-              <a:defRPr sz="1200"/>
-            </a:lvl1pPr>
-          </a:lstStyle>
-          <a:p>
-            <a:fld id="{CE5E9CC1-C706-0F49-92D6-E571CC5EEA8F}" type="slidenum">
-              <a:rPr lang="en-US"/>
-              <a:t>‹#›</a:t>
-            </a:fld>
-            <a:endParaRPr lang="en-US"/>
-          </a:p>
-        </p:txBody>
-      </p:sp>
     </p:spTree>
     <p:extLst>
       <p:ext uri="{BB962C8B-B14F-4D97-AF65-F5344CB8AC3E}">
-        <p14:creationId xmlns:p14="http://schemas.microsoft.com/office/powerpoint/2010/main" val="1024086991"/>
+        <p14:creationId xmlns:p14="http://schemas.microsoft.com/office/powerpoint/2010/main" val="3327281311"/>
       </p:ext>
     </p:extLst>
   </p:cSld>
@@ -528,7 +308,6 @@
               <a:rPr lang="en-US" dirty="0"/>
               <a:t>Bugun birlamchi va ikkilamchi oʻzgartirgichlar farqini, optik va temperatura datchiklarining ishlash tamoyillarini oʻrganamiz hamda Pt100 koʻprigi, termopara va fotodiodli TIA zanjirini hisoblaymiz.</a:t>
             </a:r>
-            <a:endParaRPr lang="en-US" dirty="0"/>
           </a:p>
         </p:txBody>
       </p:sp>
@@ -616,7 +395,6 @@
               <a:rPr lang="en-US" dirty="0"/>
               <a:t>Jadval namuna sifatida toʻldirilgan. Talabalar stenddagi LM35 va NTC termistor uchun ham xuddi shunday qator qoʻshishi mumkin. Reaksiya tezligi datchik konstruksiyasiga (masalan, Pt100 gilzasi, termopara diametri) kuchli bogʻliqligini ham aytib oʻting.</a:t>
             </a:r>
-            <a:endParaRPr lang="en-US" dirty="0"/>
           </a:p>
         </p:txBody>
       </p:sp>
@@ -704,7 +482,6 @@
               <a:rPr lang="en-US" dirty="0"/>
               <a:t>Muhokama uchun: nima uchun pechda Pt100 emas, termopara? Pt100 yuqori aniq, lekin 800 °C chegarasiga yaqin va mexanik jihatdan zaifroq. Tutqichda nima uchun ultratovush emas, optik datchik? Ultratovushning oʻlik zonasi 2 mm masofadan katta va u sekinroq.</a:t>
             </a:r>
-            <a:endParaRPr lang="en-US" dirty="0"/>
           </a:p>
         </p:txBody>
       </p:sp>
@@ -792,7 +569,6 @@
               <a:rPr lang="en-US" dirty="0"/>
               <a:t>Hisob: R(T)/(R1+R(T)) = 130,8/230,8 ≈ 0,56672; R3/(R2+R3) = 0,5; V(br) = 5 · 0,06672 = 0,3336 V. Muhokama: tokni kamaytirish uchun V(ex) ni pasaytirish yoki R1 ni kattalashtirish mumkin, lekin bunda koʻprik sezgirligi ham kamayadi. Amalda Pt100 koʻpincha tok manbai bilan va 3 yoki 4 simli sxemada ulanadi.</a:t>
             </a:r>
-            <a:endParaRPr lang="en-US" dirty="0"/>
           </a:p>
         </p:txBody>
       </p:sp>
@@ -880,7 +656,6 @@
               <a:rPr lang="en-US" dirty="0"/>
               <a:t>Termopara faqat issiq va sovuq uchlar harorati farqini oʻlchaydi. Sovuq uchlar harorati alohida datchik (masalan, termistor yoki IC datchik) bilan oʻlchanadi va unga mos kuchlanish qoʻshiladi — natijada 0 °C ga nisbatan kuchlanish olinadi. Kompensatsiya qilinmasa, xona harorati oʻzgarishi bevosita xatolikka aylanadi. Haqiqiy K-termopara biroz nochiziqli, shuning uchun aniq hisoblarda standart jadvallar ishlatiladi.</a:t>
             </a:r>
-            <a:endParaRPr lang="en-US" dirty="0"/>
           </a:p>
         </p:txBody>
       </p:sp>
@@ -968,7 +743,6 @@
               <a:rPr lang="en-US" dirty="0"/>
               <a:t>Qoʻshimcha savol: nurlanish quvvati 300 µW gacha oshsa, chiqish 3,63 V boʻladi va 3,3 V ADC toʻyinadi. Bunday holatda Rf ni kamaytirish kerak: 3,3 V / (0,55 · 300 µW) = 20 kΩ dan kichik, masalan 18 kΩ.</a:t>
             </a:r>
-            <a:endParaRPr lang="en-US" dirty="0"/>
           </a:p>
         </p:txBody>
       </p:sp>
@@ -1056,7 +830,6 @@
               <a:rPr lang="en-US" dirty="0"/>
               <a:t>3-bosqichda Pt100 tajriba qiymatlarini R(T) = R0(1 + αT) bilan solishtirib, chiziqlilik xatosini hisoblash mumkin. Koʻprik tajribasida Pt100 tokini 1 mA atrofida ushlash uchun manba kuchlanishini kamaytiring yoki koʻprik rezistorlarini kattalashtiring, aks holda oʻz-oʻzini qizdirish natijani buzadi.</a:t>
             </a:r>
-            <a:endParaRPr lang="en-US" dirty="0"/>
           </a:p>
         </p:txBody>
       </p:sp>
@@ -1144,7 +917,6 @@
               <a:rPr lang="en-US" dirty="0"/>
               <a:t>Savollar hisobot himoyasida ogʻzaki beriladi. 11-savol uchun asosiy fikr: termopara signali millivoltlar tartibida va uzun simlarda umumiy (sinfaz) xalaqit katta boʻladi; instrumental kuchaytirgich farq signalini kuchaytirib, umumiy xalaqitni soʻndiradi.</a:t>
             </a:r>
-            <a:endParaRPr lang="en-US" dirty="0"/>
           </a:p>
         </p:txBody>
       </p:sp>
@@ -1232,7 +1004,6 @@
               <a:rPr lang="en-US" dirty="0"/>
               <a:t>Optik datchiklar: fotorezistor, fotodiod, fototranzistor, optopara, enkoder. Temperatura datchiklari: termopara, Pt100, NTC va PTC termistorlar, yarimoʻtkazgichli IC datchiklar. Fizik hodisalar: ichki va tashqi fotoeffekt, p-n oʻtishdagi fotoeffekt, Seebeck effekti.</a:t>
             </a:r>
-            <a:endParaRPr lang="en-US" dirty="0"/>
           </a:p>
         </p:txBody>
       </p:sp>
@@ -1320,7 +1091,6 @@
               <a:rPr lang="en-US" dirty="0"/>
               <a:t>Mashgʻulotdan oldin termostat va yorugʻlik manbaini tekshiring. Proteus yoki Simscape Electrical muhitida Vitston koʻprigi va TIA zanjirini oldindan modellashtirish mumkin.</a:t>
             </a:r>
-            <a:endParaRPr lang="en-US" dirty="0"/>
           </a:p>
         </p:txBody>
       </p:sp>
@@ -1408,7 +1178,6 @@
               <a:rPr lang="en-US" dirty="0"/>
               <a:t>Muhim izoh: bu nomlash rus tilidagi adabiyot anʼanasiga mos. Ingliz tilidagi ayrim manbalarda (masalan, J. Fraden) aksincha: tashqi manbasiz ishlovchi datchiklar passive, manba talab qiluvchilar esa active deb ataladi. Talabalar manbalarni oʻqiganda chalkashmasligi uchun buni albatta aytib oʻting.</a:t>
             </a:r>
-            <a:endParaRPr lang="en-US" dirty="0"/>
           </a:p>
         </p:txBody>
       </p:sp>
@@ -1496,7 +1265,6 @@
               <a:rPr lang="en-US" dirty="0"/>
               <a:t>Misol: Pt100 haroratni qarshilik oʻzgarishiga aylantiradi (birlamchi), Vitston koʻprigi bu oʻzgarishni kuchlanishga aylantiradi (ikkilamchi), instrumental kuchaytirgich va past chastotali filtr signalni ADC diapazoniga moslaydi. Fotodiod yorugʻlikni tokka aylantiradi, TIA esa tokni kuchlanishga aylantiradi.</a:t>
             </a:r>
-            <a:endParaRPr lang="en-US" dirty="0"/>
           </a:p>
         </p:txBody>
       </p:sp>
@@ -1584,7 +1352,6 @@
               <a:rPr lang="en-US" dirty="0"/>
               <a:t>Tezkorlik va chiziqlilik boʻyicha fotodiod eng yaxshi, lekin uning toki kichik (nA…µA), shuning uchun TIA kerak. Fotorezistor arzon va sezgir, lekin sekin va haroratga bogʻliq. Optopara mexatronikada boshqaruv zanjirini quvvat zanjiridan ajratishda keng qoʻllanadi.</a:t>
             </a:r>
-            <a:endParaRPr lang="en-US" dirty="0"/>
           </a:p>
         </p:txBody>
       </p:sp>
@@ -1672,7 +1439,6 @@
               <a:rPr lang="en-US" dirty="0"/>
               <a:t>R(photo) — fotodiodning spektral sezgirligi, A/W. Inverslovchi ulanishda chiqish kuchlanishining ishorasi tok yoʻnalishiga bogʻliq; fotodiodni teskari ulab yoki sxemani shunga moslab musbat chiqish olinadi, hisobda esa modul olinadi. Rf qancha katta boʻlsa, sezgirlik shuncha yuqori, lekin oʻtkazish polosasi torayadi.</a:t>
             </a:r>
-            <a:endParaRPr lang="en-US" dirty="0"/>
           </a:p>
         </p:txBody>
       </p:sp>
@@ -1760,7 +1526,6 @@
               <a:rPr lang="en-US" dirty="0"/>
               <a:t>Termopara — generatorli datchik, qolganlari parametrik (IC datchik esa ichki sxemasi bilan tayyor kuchlanish beradi). Pt100 0,385 Ω/°C sezgirlikka ega, bu R0 = 100 Ω va α = 0,00385 1/°C dan kelib chiqadi. DS18B20 kabi raqamli IC datchiklar natijani bevosita raqamli interfeys orqali beradi.</a:t>
             </a:r>
-            <a:endParaRPr lang="en-US" dirty="0"/>
           </a:p>
         </p:txBody>
       </p:sp>
@@ -1848,7 +1613,6 @@
               <a:rPr lang="en-US" dirty="0"/>
               <a:t>Koʻprik qarshilik oʻzgarishini kuchlanishga aylantiradi va muvozanat holatida (R(T) = R1 = R2 = R3) chiqish nolga teng boʻladi. Shuning uchun kichik oʻzgarishlar katta doimiy kuchlanish fonida emas, noldan boshlab oʻlchanadi. Instrumental kuchaytirgich ikki kirish orasidagi farqni kuchaytiradi va umumiy kuchlanishni soʻndiradi.</a:t>
             </a:r>
-            <a:endParaRPr lang="en-US" dirty="0"/>
           </a:p>
         </p:txBody>
       </p:sp>
@@ -1926,6 +1690,7 @@
         <a:solidFill>
           <a:srgbClr val="F5F3EE"/>
         </a:solidFill>
+        <a:effectLst/>
       </p:bgPr>
     </p:bg>
     <p:spTree>
@@ -1945,7 +1710,9 @@
       <p:sp>
         <p:nvSpPr>
           <p:cNvPr id="2" name="Title Placeholder 1"/>
-          <p:cNvSpPr/>
+          <p:cNvSpPr>
+            <a:spLocks noGrp="1"/>
+          </p:cNvSpPr>
           <p:nvPr>
             <p:ph type="title"/>
           </p:nvPr>
@@ -1964,7 +1731,7 @@
         <p:txBody>
           <a:bodyPr wrap="square" lIns="0" tIns="0" rIns="0" bIns="0" rtlCol="0" anchor="t"/>
           <a:lstStyle>
-            <a:lvl1pPr algn="l" indent="0" marL="0">
+            <a:lvl1pPr marL="0" indent="0" algn="l">
               <a:lnSpc>
                 <a:spcPct val="115000"/>
               </a:lnSpc>
@@ -1980,7 +1747,7 @@
             </a:lvl1pPr>
           </a:lstStyle>
           <a:p>
-            <a:pPr algn="l" indent="0" marL="0">
+            <a:pPr marL="0" indent="0" algn="l">
               <a:lnSpc>
                 <a:spcPct val="115000"/>
               </a:lnSpc>
@@ -1993,9 +1760,11 @@
       <p:sp>
         <p:nvSpPr>
           <p:cNvPr id="3" name="Text Placeholder 2"/>
-          <p:cNvSpPr/>
+          <p:cNvSpPr>
+            <a:spLocks noGrp="1"/>
+          </p:cNvSpPr>
           <p:nvPr>
-            <p:ph idx="101" type="body"/>
+            <p:ph type="body" idx="101"/>
           </p:nvPr>
         </p:nvSpPr>
         <p:spPr>
@@ -2012,7 +1781,7 @@
         <p:txBody>
           <a:bodyPr wrap="square" lIns="0" tIns="0" rIns="0" bIns="0" rtlCol="0" anchor="t"/>
           <a:lstStyle>
-            <a:lvl1pPr algn="l" indent="0" marL="0">
+            <a:lvl1pPr marL="0" indent="0" algn="l">
               <a:lnSpc>
                 <a:spcPct val="140000"/>
               </a:lnSpc>
@@ -2028,7 +1797,7 @@
             </a:lvl1pPr>
           </a:lstStyle>
           <a:p>
-            <a:pPr algn="l" indent="0" marL="0">
+            <a:pPr marL="0" indent="0" algn="l">
               <a:lnSpc>
                 <a:spcPct val="140000"/>
               </a:lnSpc>
@@ -2054,6 +1823,7 @@
         <a:solidFill>
           <a:srgbClr val="F5F3EE"/>
         </a:solidFill>
+        <a:effectLst/>
       </p:bgPr>
     </p:bg>
     <p:spTree>
@@ -2073,7 +1843,9 @@
       <p:sp>
         <p:nvSpPr>
           <p:cNvPr id="2" name="Title Placeholder 1"/>
-          <p:cNvSpPr/>
+          <p:cNvSpPr>
+            <a:spLocks noGrp="1"/>
+          </p:cNvSpPr>
           <p:nvPr>
             <p:ph type="title"/>
           </p:nvPr>
@@ -2092,7 +1864,7 @@
         <p:txBody>
           <a:bodyPr wrap="square" lIns="0" tIns="0" rIns="0" bIns="0" rtlCol="0" anchor="t"/>
           <a:lstStyle>
-            <a:lvl1pPr algn="l" indent="0" marL="0">
+            <a:lvl1pPr marL="0" indent="0" algn="l">
               <a:lnSpc>
                 <a:spcPct val="115000"/>
               </a:lnSpc>
@@ -2108,7 +1880,7 @@
             </a:lvl1pPr>
           </a:lstStyle>
           <a:p>
-            <a:pPr algn="l" indent="0" marL="0">
+            <a:pPr marL="0" indent="0" algn="l">
               <a:lnSpc>
                 <a:spcPct val="115000"/>
               </a:lnSpc>
@@ -2121,9 +1893,11 @@
       <p:sp>
         <p:nvSpPr>
           <p:cNvPr id="3" name="Text Placeholder 2"/>
-          <p:cNvSpPr/>
+          <p:cNvSpPr>
+            <a:spLocks noGrp="1"/>
+          </p:cNvSpPr>
           <p:nvPr>
-            <p:ph idx="101" type="body"/>
+            <p:ph type="body" idx="101"/>
           </p:nvPr>
         </p:nvSpPr>
         <p:spPr>
@@ -2140,7 +1914,7 @@
         <p:txBody>
           <a:bodyPr wrap="square" lIns="0" tIns="0" rIns="0" bIns="0" rtlCol="0" anchor="t"/>
           <a:lstStyle>
-            <a:lvl1pPr algn="l" indent="0" marL="0">
+            <a:lvl1pPr marL="0" indent="0" algn="l">
               <a:lnSpc>
                 <a:spcPct val="140000"/>
               </a:lnSpc>
@@ -2156,7 +1930,7 @@
             </a:lvl1pPr>
           </a:lstStyle>
           <a:p>
-            <a:pPr algn="l" indent="0" marL="0">
+            <a:pPr marL="0" indent="0" algn="l">
               <a:lnSpc>
                 <a:spcPct val="140000"/>
               </a:lnSpc>
@@ -2435,6 +2209,7 @@
         <a:solidFill>
           <a:srgbClr val="16233B"/>
         </a:solidFill>
+        <a:effectLst/>
       </p:bgPr>
     </p:bg>
     <p:spTree>
@@ -2470,6 +2245,13 @@
           </a:solidFill>
           <a:ln/>
         </p:spPr>
+        <p:txBody>
+          <a:bodyPr/>
+          <a:lstStyle/>
+          <a:p>
+            <a:endParaRPr lang="uz-Latn-UZ"/>
+          </a:p>
+        </p:txBody>
       </p:sp>
       <p:sp>
         <p:nvSpPr>
@@ -2494,14 +2276,14 @@
           </a:bodyPr>
           <a:lstStyle/>
           <a:p>
-            <a:pPr algn="l" indent="0" marL="0">
+            <a:pPr marL="0" indent="0" algn="l">
               <a:lnSpc>
                 <a:spcPts val="1960"/>
               </a:lnSpc>
               <a:buNone/>
             </a:pPr>
             <a:r>
-              <a:rPr lang="en-US" sz="1400" b="1" spc="200" kern="0" dirty="0">
+              <a:rPr lang="en-US" sz="1400" b="1" kern="0" spc="200" dirty="0">
                 <a:solidFill>
                   <a:srgbClr val="F0A46E"/>
                 </a:solidFill>
@@ -2518,7 +2300,9 @@
       <p:sp>
         <p:nvSpPr>
           <p:cNvPr id="4" name="Text 2"/>
-          <p:cNvSpPr/>
+          <p:cNvSpPr>
+            <a:spLocks noGrp="1"/>
+          </p:cNvSpPr>
           <p:nvPr>
             <p:ph type="title"/>
           </p:nvPr>
@@ -2540,7 +2324,7 @@
           </a:bodyPr>
           <a:lstStyle/>
           <a:p>
-            <a:pPr algn="l" indent="0" marL="0">
+            <a:pPr marL="0" indent="0" algn="l">
               <a:lnSpc>
                 <a:spcPts val="4840"/>
               </a:lnSpc>
@@ -2580,6 +2364,13 @@
           </a:solidFill>
           <a:ln/>
         </p:spPr>
+        <p:txBody>
+          <a:bodyPr/>
+          <a:lstStyle/>
+          <a:p>
+            <a:endParaRPr lang="uz-Latn-UZ"/>
+          </a:p>
+        </p:txBody>
       </p:sp>
       <p:sp>
         <p:nvSpPr>
@@ -2604,7 +2395,7 @@
           </a:bodyPr>
           <a:lstStyle/>
           <a:p>
-            <a:pPr algn="l" indent="0" marL="0">
+            <a:pPr marL="0" indent="0" algn="l">
               <a:lnSpc>
                 <a:spcPts val="2240"/>
               </a:lnSpc>
@@ -2648,7 +2439,7 @@
           </a:bodyPr>
           <a:lstStyle/>
           <a:p>
-            <a:pPr algn="l" indent="0" marL="0">
+            <a:pPr marL="0" indent="0" algn="l">
               <a:lnSpc>
                 <a:spcPts val="1680"/>
               </a:lnSpc>
@@ -2663,7 +2454,7 @@
                 <a:ea typeface="Noto Sans" pitchFamily="34" charset="-122"/>
                 <a:cs typeface="Noto Sans" pitchFamily="34" charset="-120"/>
               </a:rPr>
-              <a:t>[Oʻqituvchi F.I.Sh.] · 2026</a:t>
+              <a:t>Kamolov M. · 2026</a:t>
             </a:r>
             <a:endParaRPr lang="en-US" sz="1200" dirty="0"/>
           </a:p>
@@ -2685,6 +2476,7 @@
         <a:solidFill>
           <a:srgbClr val="F5F3EE"/>
         </a:solidFill>
+        <a:effectLst/>
       </p:bgPr>
     </p:bg>
     <p:spTree>
@@ -2724,14 +2516,14 @@
           </a:bodyPr>
           <a:lstStyle/>
           <a:p>
-            <a:pPr algn="l" indent="0" marL="0">
+            <a:pPr marL="0" indent="0" algn="l">
               <a:lnSpc>
                 <a:spcPts val="1680"/>
               </a:lnSpc>
               <a:buNone/>
             </a:pPr>
             <a:r>
-              <a:rPr lang="en-US" sz="1200" b="1" spc="100" kern="0" dirty="0">
+              <a:rPr lang="en-US" sz="1200" b="1" kern="0" spc="100" dirty="0">
                 <a:solidFill>
                   <a:srgbClr val="B5521A"/>
                 </a:solidFill>
@@ -2748,7 +2540,9 @@
       <p:sp>
         <p:nvSpPr>
           <p:cNvPr id="3" name="Text 1"/>
-          <p:cNvSpPr/>
+          <p:cNvSpPr>
+            <a:spLocks noGrp="1"/>
+          </p:cNvSpPr>
           <p:nvPr>
             <p:ph type="title"/>
           </p:nvPr>
@@ -2770,7 +2564,7 @@
           </a:bodyPr>
           <a:lstStyle/>
           <a:p>
-            <a:pPr algn="l" indent="0" marL="0">
+            <a:pPr marL="0" indent="0" algn="l">
               <a:lnSpc>
                 <a:spcPts val="3520"/>
               </a:lnSpc>
@@ -2807,17 +2601,41 @@
         </p:nvGraphicFramePr>
         <p:xfrm>
           <a:off x="822960" y="1813560"/>
-          <a:ext cx="10556240" cy="2595880"/>
+          <a:ext cx="10556240" cy="2638808"/>
         </p:xfrm>
         <a:graphic>
           <a:graphicData uri="http://schemas.openxmlformats.org/drawingml/2006/table">
             <a:tbl>
               <a:tblPr/>
               <a:tblGrid>
-                <a:gridCol w="2639060"/>
-                <a:gridCol w="2639060"/>
-                <a:gridCol w="2639060"/>
-                <a:gridCol w="2639060"/>
+                <a:gridCol w="2639060">
+                  <a:extLst>
+                    <a:ext uri="{9D8B030D-6E8A-4147-A177-3AD203B41FA5}">
+                      <a16:colId xmlns:a16="http://schemas.microsoft.com/office/drawing/2014/main" val="20000"/>
+                    </a:ext>
+                  </a:extLst>
+                </a:gridCol>
+                <a:gridCol w="2639060">
+                  <a:extLst>
+                    <a:ext uri="{9D8B030D-6E8A-4147-A177-3AD203B41FA5}">
+                      <a16:colId xmlns:a16="http://schemas.microsoft.com/office/drawing/2014/main" val="20001"/>
+                    </a:ext>
+                  </a:extLst>
+                </a:gridCol>
+                <a:gridCol w="2639060">
+                  <a:extLst>
+                    <a:ext uri="{9D8B030D-6E8A-4147-A177-3AD203B41FA5}">
+                      <a16:colId xmlns:a16="http://schemas.microsoft.com/office/drawing/2014/main" val="20002"/>
+                    </a:ext>
+                  </a:extLst>
+                </a:gridCol>
+                <a:gridCol w="2639060">
+                  <a:extLst>
+                    <a:ext uri="{9D8B030D-6E8A-4147-A177-3AD203B41FA5}">
+                      <a16:colId xmlns:a16="http://schemas.microsoft.com/office/drawing/2014/main" val="20003"/>
+                    </a:ext>
+                  </a:extLst>
+                </a:gridCol>
               </a:tblGrid>
               <a:tr h="360680">
                 <a:tc>
@@ -2825,7 +2643,7 @@
                     <a:bodyPr/>
                     <a:lstStyle/>
                     <a:p>
-                      <a:pPr indent="0" marL="0">
+                      <a:pPr marL="0" indent="0">
                         <a:lnSpc>
                           <a:spcPts val="1680"/>
                         </a:lnSpc>
@@ -2849,7 +2667,7 @@
                       </a:endParaRPr>
                     </a:p>
                   </a:txBody>
-                  <a:tcPr marL="127000" marR="127000" marT="76200" marB="76200" anchor="t">
+                  <a:tcPr marL="127000" marR="127000" marT="76200" marB="76200">
                     <a:lnL w="12700" cap="flat" cmpd="sng" algn="ctr">
                       <a:solidFill>
                         <a:srgbClr val="C4C2BE"/>
@@ -2896,7 +2714,7 @@
                     <a:bodyPr/>
                     <a:lstStyle/>
                     <a:p>
-                      <a:pPr indent="0" marL="0">
+                      <a:pPr marL="0" indent="0">
                         <a:lnSpc>
                           <a:spcPts val="1680"/>
                         </a:lnSpc>
@@ -2920,7 +2738,7 @@
                       </a:endParaRPr>
                     </a:p>
                   </a:txBody>
-                  <a:tcPr marL="127000" marR="127000" marT="76200" marB="76200" anchor="t">
+                  <a:tcPr marL="127000" marR="127000" marT="76200" marB="76200">
                     <a:lnL w="12700" cap="flat" cmpd="sng" algn="ctr">
                       <a:solidFill>
                         <a:srgbClr val="162032"/>
@@ -2967,7 +2785,7 @@
                     <a:bodyPr/>
                     <a:lstStyle/>
                     <a:p>
-                      <a:pPr indent="0" marL="0">
+                      <a:pPr marL="0" indent="0">
                         <a:lnSpc>
                           <a:spcPts val="1680"/>
                         </a:lnSpc>
@@ -2991,7 +2809,7 @@
                       </a:endParaRPr>
                     </a:p>
                   </a:txBody>
-                  <a:tcPr marL="127000" marR="127000" marT="76200" marB="76200" anchor="t">
+                  <a:tcPr marL="127000" marR="127000" marT="76200" marB="76200">
                     <a:lnL w="12700" cap="flat" cmpd="sng" algn="ctr">
                       <a:solidFill>
                         <a:srgbClr val="162032"/>
@@ -3038,7 +2856,7 @@
                     <a:bodyPr/>
                     <a:lstStyle/>
                     <a:p>
-                      <a:pPr indent="0" marL="0">
+                      <a:pPr marL="0" indent="0">
                         <a:lnSpc>
                           <a:spcPts val="1680"/>
                         </a:lnSpc>
@@ -3062,7 +2880,7 @@
                       </a:endParaRPr>
                     </a:p>
                   </a:txBody>
-                  <a:tcPr marL="127000" marR="127000" marT="76200" marB="76200" anchor="t">
+                  <a:tcPr marL="127000" marR="127000" marT="76200" marB="76200">
                     <a:lnL w="12700" cap="flat" cmpd="sng" algn="ctr">
                       <a:solidFill>
                         <a:srgbClr val="162032"/>
@@ -3104,6 +2922,11 @@
                     </a:solidFill>
                   </a:tcPr>
                 </a:tc>
+                <a:extLst>
+                  <a:ext uri="{0D108BD9-81ED-4DB2-BD59-A6C34878D82A}">
+                    <a16:rowId xmlns:a16="http://schemas.microsoft.com/office/drawing/2014/main" val="10000"/>
+                  </a:ext>
+                </a:extLst>
               </a:tr>
               <a:tr h="558800">
                 <a:tc>
@@ -3111,7 +2934,7 @@
                     <a:bodyPr/>
                     <a:lstStyle/>
                     <a:p>
-                      <a:pPr indent="0" marL="0">
+                      <a:pPr marL="0" indent="0">
                         <a:lnSpc>
                           <a:spcPts val="1680"/>
                         </a:lnSpc>
@@ -3135,7 +2958,7 @@
                       </a:endParaRPr>
                     </a:p>
                   </a:txBody>
-                  <a:tcPr marL="127000" marR="127000" marT="76200" marB="76200" anchor="t">
+                  <a:tcPr marL="127000" marR="127000" marT="76200" marB="76200">
                     <a:lnL w="12700" cap="flat" cmpd="sng" algn="ctr">
                       <a:solidFill>
                         <a:srgbClr val="C4C2BE"/>
@@ -3179,7 +3002,7 @@
                     <a:bodyPr/>
                     <a:lstStyle/>
                     <a:p>
-                      <a:pPr indent="0" marL="0">
+                      <a:pPr marL="0" indent="0">
                         <a:lnSpc>
                           <a:spcPts val="1680"/>
                         </a:lnSpc>
@@ -3203,7 +3026,7 @@
                       </a:endParaRPr>
                     </a:p>
                   </a:txBody>
-                  <a:tcPr marL="127000" marR="127000" marT="76200" marB="76200" anchor="t">
+                  <a:tcPr marL="127000" marR="127000" marT="76200" marB="76200">
                     <a:lnL w="12700" cap="flat" cmpd="sng" algn="ctr">
                       <a:solidFill>
                         <a:srgbClr val="C4C2BE"/>
@@ -3247,7 +3070,7 @@
                     <a:bodyPr/>
                     <a:lstStyle/>
                     <a:p>
-                      <a:pPr indent="0" marL="0">
+                      <a:pPr marL="0" indent="0">
                         <a:lnSpc>
                           <a:spcPts val="1680"/>
                         </a:lnSpc>
@@ -3271,7 +3094,7 @@
                       </a:endParaRPr>
                     </a:p>
                   </a:txBody>
-                  <a:tcPr marL="127000" marR="127000" marT="76200" marB="76200" anchor="t">
+                  <a:tcPr marL="127000" marR="127000" marT="76200" marB="76200">
                     <a:lnL w="12700" cap="flat" cmpd="sng" algn="ctr">
                       <a:solidFill>
                         <a:srgbClr val="C4C2BE"/>
@@ -3315,7 +3138,7 @@
                     <a:bodyPr/>
                     <a:lstStyle/>
                     <a:p>
-                      <a:pPr indent="0" marL="0">
+                      <a:pPr marL="0" indent="0">
                         <a:lnSpc>
                           <a:spcPts val="1680"/>
                         </a:lnSpc>
@@ -3339,7 +3162,7 @@
                       </a:endParaRPr>
                     </a:p>
                   </a:txBody>
-                  <a:tcPr marL="127000" marR="127000" marT="76200" marB="76200" anchor="t">
+                  <a:tcPr marL="127000" marR="127000" marT="76200" marB="76200">
                     <a:lnL w="12700" cap="flat" cmpd="sng" algn="ctr">
                       <a:solidFill>
                         <a:srgbClr val="C4C2BE"/>
@@ -3378,6 +3201,11 @@
                     </a:lnB>
                   </a:tcPr>
                 </a:tc>
+                <a:extLst>
+                  <a:ext uri="{0D108BD9-81ED-4DB2-BD59-A6C34878D82A}">
+                    <a16:rowId xmlns:a16="http://schemas.microsoft.com/office/drawing/2014/main" val="10001"/>
+                  </a:ext>
+                </a:extLst>
               </a:tr>
               <a:tr h="558800">
                 <a:tc>
@@ -3385,7 +3213,7 @@
                     <a:bodyPr/>
                     <a:lstStyle/>
                     <a:p>
-                      <a:pPr indent="0" marL="0">
+                      <a:pPr marL="0" indent="0">
                         <a:lnSpc>
                           <a:spcPts val="1680"/>
                         </a:lnSpc>
@@ -3409,7 +3237,7 @@
                       </a:endParaRPr>
                     </a:p>
                   </a:txBody>
-                  <a:tcPr marL="127000" marR="127000" marT="76200" marB="76200" anchor="t">
+                  <a:tcPr marL="127000" marR="127000" marT="76200" marB="76200">
                     <a:lnL w="12700" cap="flat" cmpd="sng" algn="ctr">
                       <a:solidFill>
                         <a:srgbClr val="C4C2BE"/>
@@ -3453,7 +3281,7 @@
                     <a:bodyPr/>
                     <a:lstStyle/>
                     <a:p>
-                      <a:pPr indent="0" marL="0">
+                      <a:pPr marL="0" indent="0">
                         <a:lnSpc>
                           <a:spcPts val="1680"/>
                         </a:lnSpc>
@@ -3477,7 +3305,7 @@
                       </a:endParaRPr>
                     </a:p>
                   </a:txBody>
-                  <a:tcPr marL="127000" marR="127000" marT="76200" marB="76200" anchor="t">
+                  <a:tcPr marL="127000" marR="127000" marT="76200" marB="76200">
                     <a:lnL w="12700" cap="flat" cmpd="sng" algn="ctr">
                       <a:solidFill>
                         <a:srgbClr val="C4C2BE"/>
@@ -3521,7 +3349,7 @@
                     <a:bodyPr/>
                     <a:lstStyle/>
                     <a:p>
-                      <a:pPr indent="0" marL="0">
+                      <a:pPr marL="0" indent="0">
                         <a:lnSpc>
                           <a:spcPts val="1680"/>
                         </a:lnSpc>
@@ -3545,7 +3373,7 @@
                       </a:endParaRPr>
                     </a:p>
                   </a:txBody>
-                  <a:tcPr marL="127000" marR="127000" marT="76200" marB="76200" anchor="t">
+                  <a:tcPr marL="127000" marR="127000" marT="76200" marB="76200">
                     <a:lnL w="12700" cap="flat" cmpd="sng" algn="ctr">
                       <a:solidFill>
                         <a:srgbClr val="C4C2BE"/>
@@ -3589,7 +3417,7 @@
                     <a:bodyPr/>
                     <a:lstStyle/>
                     <a:p>
-                      <a:pPr indent="0" marL="0">
+                      <a:pPr marL="0" indent="0">
                         <a:lnSpc>
                           <a:spcPts val="1680"/>
                         </a:lnSpc>
@@ -3613,7 +3441,7 @@
                       </a:endParaRPr>
                     </a:p>
                   </a:txBody>
-                  <a:tcPr marL="127000" marR="127000" marT="76200" marB="76200" anchor="t">
+                  <a:tcPr marL="127000" marR="127000" marT="76200" marB="76200">
                     <a:lnL w="12700" cap="flat" cmpd="sng" algn="ctr">
                       <a:solidFill>
                         <a:srgbClr val="C4C2BE"/>
@@ -3652,6 +3480,11 @@
                     </a:lnB>
                   </a:tcPr>
                 </a:tc>
+                <a:extLst>
+                  <a:ext uri="{0D108BD9-81ED-4DB2-BD59-A6C34878D82A}">
+                    <a16:rowId xmlns:a16="http://schemas.microsoft.com/office/drawing/2014/main" val="10002"/>
+                  </a:ext>
+                </a:extLst>
               </a:tr>
               <a:tr h="558800">
                 <a:tc>
@@ -3659,7 +3492,7 @@
                     <a:bodyPr/>
                     <a:lstStyle/>
                     <a:p>
-                      <a:pPr indent="0" marL="0">
+                      <a:pPr marL="0" indent="0">
                         <a:lnSpc>
                           <a:spcPts val="1680"/>
                         </a:lnSpc>
@@ -3683,7 +3516,7 @@
                       </a:endParaRPr>
                     </a:p>
                   </a:txBody>
-                  <a:tcPr marL="127000" marR="127000" marT="76200" marB="76200" anchor="t">
+                  <a:tcPr marL="127000" marR="127000" marT="76200" marB="76200">
                     <a:lnL w="12700" cap="flat" cmpd="sng" algn="ctr">
                       <a:solidFill>
                         <a:srgbClr val="C4C2BE"/>
@@ -3727,7 +3560,7 @@
                     <a:bodyPr/>
                     <a:lstStyle/>
                     <a:p>
-                      <a:pPr indent="0" marL="0">
+                      <a:pPr marL="0" indent="0">
                         <a:lnSpc>
                           <a:spcPts val="1680"/>
                         </a:lnSpc>
@@ -3751,7 +3584,7 @@
                       </a:endParaRPr>
                     </a:p>
                   </a:txBody>
-                  <a:tcPr marL="127000" marR="127000" marT="76200" marB="76200" anchor="t">
+                  <a:tcPr marL="127000" marR="127000" marT="76200" marB="76200">
                     <a:lnL w="12700" cap="flat" cmpd="sng" algn="ctr">
                       <a:solidFill>
                         <a:srgbClr val="C4C2BE"/>
@@ -3795,7 +3628,7 @@
                     <a:bodyPr/>
                     <a:lstStyle/>
                     <a:p>
-                      <a:pPr indent="0" marL="0">
+                      <a:pPr marL="0" indent="0">
                         <a:lnSpc>
                           <a:spcPts val="1680"/>
                         </a:lnSpc>
@@ -3819,7 +3652,7 @@
                       </a:endParaRPr>
                     </a:p>
                   </a:txBody>
-                  <a:tcPr marL="127000" marR="127000" marT="76200" marB="76200" anchor="t">
+                  <a:tcPr marL="127000" marR="127000" marT="76200" marB="76200">
                     <a:lnL w="12700" cap="flat" cmpd="sng" algn="ctr">
                       <a:solidFill>
                         <a:srgbClr val="C4C2BE"/>
@@ -3863,7 +3696,7 @@
                     <a:bodyPr/>
                     <a:lstStyle/>
                     <a:p>
-                      <a:pPr indent="0" marL="0">
+                      <a:pPr marL="0" indent="0">
                         <a:lnSpc>
                           <a:spcPts val="1680"/>
                         </a:lnSpc>
@@ -3887,7 +3720,7 @@
                       </a:endParaRPr>
                     </a:p>
                   </a:txBody>
-                  <a:tcPr marL="127000" marR="127000" marT="76200" marB="76200" anchor="t">
+                  <a:tcPr marL="127000" marR="127000" marT="76200" marB="76200">
                     <a:lnL w="12700" cap="flat" cmpd="sng" algn="ctr">
                       <a:solidFill>
                         <a:srgbClr val="C4C2BE"/>
@@ -3926,6 +3759,11 @@
                     </a:lnB>
                   </a:tcPr>
                 </a:tc>
+                <a:extLst>
+                  <a:ext uri="{0D108BD9-81ED-4DB2-BD59-A6C34878D82A}">
+                    <a16:rowId xmlns:a16="http://schemas.microsoft.com/office/drawing/2014/main" val="10003"/>
+                  </a:ext>
+                </a:extLst>
               </a:tr>
               <a:tr h="558800">
                 <a:tc>
@@ -3933,7 +3771,7 @@
                     <a:bodyPr/>
                     <a:lstStyle/>
                     <a:p>
-                      <a:pPr indent="0" marL="0">
+                      <a:pPr marL="0" indent="0">
                         <a:lnSpc>
                           <a:spcPts val="1680"/>
                         </a:lnSpc>
@@ -3957,7 +3795,7 @@
                       </a:endParaRPr>
                     </a:p>
                   </a:txBody>
-                  <a:tcPr marL="127000" marR="127000" marT="76200" marB="76200" anchor="t">
+                  <a:tcPr marL="127000" marR="127000" marT="76200" marB="76200">
                     <a:lnL w="12700" cap="flat" cmpd="sng" algn="ctr">
                       <a:solidFill>
                         <a:srgbClr val="C4C2BE"/>
@@ -4001,7 +3839,7 @@
                     <a:bodyPr/>
                     <a:lstStyle/>
                     <a:p>
-                      <a:pPr indent="0" marL="0">
+                      <a:pPr marL="0" indent="0">
                         <a:lnSpc>
                           <a:spcPts val="1680"/>
                         </a:lnSpc>
@@ -4025,7 +3863,7 @@
                       </a:endParaRPr>
                     </a:p>
                   </a:txBody>
-                  <a:tcPr marL="127000" marR="127000" marT="76200" marB="76200" anchor="t">
+                  <a:tcPr marL="127000" marR="127000" marT="76200" marB="76200">
                     <a:lnL w="12700" cap="flat" cmpd="sng" algn="ctr">
                       <a:solidFill>
                         <a:srgbClr val="C4C2BE"/>
@@ -4069,7 +3907,7 @@
                     <a:bodyPr/>
                     <a:lstStyle/>
                     <a:p>
-                      <a:pPr indent="0" marL="0">
+                      <a:pPr marL="0" indent="0">
                         <a:lnSpc>
                           <a:spcPts val="1680"/>
                         </a:lnSpc>
@@ -4093,7 +3931,7 @@
                       </a:endParaRPr>
                     </a:p>
                   </a:txBody>
-                  <a:tcPr marL="127000" marR="127000" marT="76200" marB="76200" anchor="t">
+                  <a:tcPr marL="127000" marR="127000" marT="76200" marB="76200">
                     <a:lnL w="12700" cap="flat" cmpd="sng" algn="ctr">
                       <a:solidFill>
                         <a:srgbClr val="C4C2BE"/>
@@ -4137,7 +3975,7 @@
                     <a:bodyPr/>
                     <a:lstStyle/>
                     <a:p>
-                      <a:pPr indent="0" marL="0">
+                      <a:pPr marL="0" indent="0">
                         <a:lnSpc>
                           <a:spcPts val="1680"/>
                         </a:lnSpc>
@@ -4161,7 +3999,7 @@
                       </a:endParaRPr>
                     </a:p>
                   </a:txBody>
-                  <a:tcPr marL="127000" marR="127000" marT="76200" marB="76200" anchor="t">
+                  <a:tcPr marL="127000" marR="127000" marT="76200" marB="76200">
                     <a:lnL w="12700" cap="flat" cmpd="sng" algn="ctr">
                       <a:solidFill>
                         <a:srgbClr val="C4C2BE"/>
@@ -4200,6 +4038,11 @@
                     </a:lnB>
                   </a:tcPr>
                 </a:tc>
+                <a:extLst>
+                  <a:ext uri="{0D108BD9-81ED-4DB2-BD59-A6C34878D82A}">
+                    <a16:rowId xmlns:a16="http://schemas.microsoft.com/office/drawing/2014/main" val="10004"/>
+                  </a:ext>
+                </a:extLst>
               </a:tr>
             </a:tbl>
           </a:graphicData>
@@ -4228,7 +4071,7 @@
           </a:bodyPr>
           <a:lstStyle/>
           <a:p>
-            <a:pPr algn="l" indent="0" marL="0">
+            <a:pPr marL="0" indent="0" algn="l">
               <a:lnSpc>
                 <a:spcPts val="1960"/>
               </a:lnSpc>
@@ -4272,7 +4115,7 @@
           </a:bodyPr>
           <a:lstStyle/>
           <a:p>
-            <a:pPr algn="l" indent="0" marL="0">
+            <a:pPr marL="0" indent="0" algn="l">
               <a:lnSpc>
                 <a:spcPts val="1680"/>
               </a:lnSpc>
@@ -4309,6 +4152,7 @@
         <a:solidFill>
           <a:srgbClr val="F5F3EE"/>
         </a:solidFill>
+        <a:effectLst/>
       </p:bgPr>
     </p:bg>
     <p:spTree>
@@ -4348,14 +4192,14 @@
           </a:bodyPr>
           <a:lstStyle/>
           <a:p>
-            <a:pPr algn="l" indent="0" marL="0">
+            <a:pPr marL="0" indent="0" algn="l">
               <a:lnSpc>
                 <a:spcPts val="1680"/>
               </a:lnSpc>
               <a:buNone/>
             </a:pPr>
             <a:r>
-              <a:rPr lang="en-US" sz="1200" b="1" spc="100" kern="0" dirty="0">
+              <a:rPr lang="en-US" sz="1200" b="1" kern="0" spc="100" dirty="0">
                 <a:solidFill>
                   <a:srgbClr val="B5521A"/>
                 </a:solidFill>
@@ -4372,7 +4216,9 @@
       <p:sp>
         <p:nvSpPr>
           <p:cNvPr id="3" name="Text 1"/>
-          <p:cNvSpPr/>
+          <p:cNvSpPr>
+            <a:spLocks noGrp="1"/>
+          </p:cNvSpPr>
           <p:nvPr>
             <p:ph type="title"/>
           </p:nvPr>
@@ -4394,7 +4240,7 @@
           </a:bodyPr>
           <a:lstStyle/>
           <a:p>
-            <a:pPr algn="l" indent="0" marL="0">
+            <a:pPr marL="0" indent="0" algn="l">
               <a:lnSpc>
                 <a:spcPts val="3520"/>
               </a:lnSpc>
@@ -4441,6 +4287,13 @@
             <a:prstDash val="solid"/>
           </a:ln>
         </p:spPr>
+        <p:txBody>
+          <a:bodyPr/>
+          <a:lstStyle/>
+          <a:p>
+            <a:endParaRPr lang="uz-Latn-UZ"/>
+          </a:p>
+        </p:txBody>
       </p:sp>
       <p:sp>
         <p:nvSpPr>
@@ -4465,7 +4318,7 @@
           </a:bodyPr>
           <a:lstStyle/>
           <a:p>
-            <a:pPr algn="l" indent="0" marL="0">
+            <a:pPr marL="0" indent="0" algn="l">
               <a:lnSpc>
                 <a:spcPts val="1680"/>
               </a:lnSpc>
@@ -4509,7 +4362,7 @@
           </a:bodyPr>
           <a:lstStyle/>
           <a:p>
-            <a:pPr algn="l" indent="0" marL="0">
+            <a:pPr marL="0" indent="0" algn="l">
               <a:lnSpc>
                 <a:spcPts val="1920"/>
               </a:lnSpc>
@@ -4551,6 +4404,13 @@
           </a:solidFill>
           <a:ln/>
         </p:spPr>
+        <p:txBody>
+          <a:bodyPr/>
+          <a:lstStyle/>
+          <a:p>
+            <a:endParaRPr lang="uz-Latn-UZ"/>
+          </a:p>
+        </p:txBody>
       </p:sp>
       <p:sp>
         <p:nvSpPr>
@@ -4575,7 +4435,7 @@
           </a:bodyPr>
           <a:lstStyle/>
           <a:p>
-            <a:pPr algn="l" indent="0" marL="0">
+            <a:pPr marL="0" indent="0" algn="l">
               <a:lnSpc>
                 <a:spcPts val="1820"/>
               </a:lnSpc>
@@ -4619,7 +4479,7 @@
           </a:bodyPr>
           <a:lstStyle/>
           <a:p>
-            <a:pPr algn="l" indent="0" marL="0">
+            <a:pPr marL="0" indent="0" algn="l">
               <a:lnSpc>
                 <a:spcPts val="1680"/>
               </a:lnSpc>
@@ -4663,7 +4523,7 @@
           </a:bodyPr>
           <a:lstStyle/>
           <a:p>
-            <a:pPr algn="l" indent="0" marL="0">
+            <a:pPr marL="0" indent="0" algn="l">
               <a:lnSpc>
                 <a:spcPts val="1820"/>
               </a:lnSpc>
@@ -4721,6 +4581,13 @@
             <a:prstDash val="solid"/>
           </a:ln>
         </p:spPr>
+        <p:txBody>
+          <a:bodyPr/>
+          <a:lstStyle/>
+          <a:p>
+            <a:endParaRPr lang="uz-Latn-UZ"/>
+          </a:p>
+        </p:txBody>
       </p:sp>
       <p:sp>
         <p:nvSpPr>
@@ -4745,7 +4612,7 @@
           </a:bodyPr>
           <a:lstStyle/>
           <a:p>
-            <a:pPr algn="l" indent="0" marL="0">
+            <a:pPr marL="0" indent="0" algn="l">
               <a:lnSpc>
                 <a:spcPts val="1680"/>
               </a:lnSpc>
@@ -4789,7 +4656,7 @@
           </a:bodyPr>
           <a:lstStyle/>
           <a:p>
-            <a:pPr algn="l" indent="0" marL="0">
+            <a:pPr marL="0" indent="0" algn="l">
               <a:lnSpc>
                 <a:spcPts val="1920"/>
               </a:lnSpc>
@@ -4831,6 +4698,13 @@
           </a:solidFill>
           <a:ln/>
         </p:spPr>
+        <p:txBody>
+          <a:bodyPr/>
+          <a:lstStyle/>
+          <a:p>
+            <a:endParaRPr lang="uz-Latn-UZ"/>
+          </a:p>
+        </p:txBody>
       </p:sp>
       <p:sp>
         <p:nvSpPr>
@@ -4855,7 +4729,7 @@
           </a:bodyPr>
           <a:lstStyle/>
           <a:p>
-            <a:pPr algn="l" indent="0" marL="0">
+            <a:pPr marL="0" indent="0" algn="l">
               <a:lnSpc>
                 <a:spcPts val="1820"/>
               </a:lnSpc>
@@ -4899,7 +4773,7 @@
           </a:bodyPr>
           <a:lstStyle/>
           <a:p>
-            <a:pPr algn="l" indent="0" marL="0">
+            <a:pPr marL="0" indent="0" algn="l">
               <a:lnSpc>
                 <a:spcPts val="1680"/>
               </a:lnSpc>
@@ -4943,7 +4817,7 @@
           </a:bodyPr>
           <a:lstStyle/>
           <a:p>
-            <a:pPr algn="l" indent="0" marL="0">
+            <a:pPr marL="0" indent="0" algn="l">
               <a:lnSpc>
                 <a:spcPts val="1820"/>
               </a:lnSpc>
@@ -4998,7 +4872,7 @@
           </a:bodyPr>
           <a:lstStyle/>
           <a:p>
-            <a:pPr algn="l" indent="0" marL="0">
+            <a:pPr marL="0" indent="0" algn="l">
               <a:lnSpc>
                 <a:spcPts val="1680"/>
               </a:lnSpc>
@@ -5035,6 +4909,7 @@
         <a:solidFill>
           <a:srgbClr val="F5F3EE"/>
         </a:solidFill>
+        <a:effectLst/>
       </p:bgPr>
     </p:bg>
     <p:spTree>
@@ -5074,14 +4949,14 @@
           </a:bodyPr>
           <a:lstStyle/>
           <a:p>
-            <a:pPr algn="l" indent="0" marL="0">
+            <a:pPr marL="0" indent="0" algn="l">
               <a:lnSpc>
                 <a:spcPts val="1680"/>
               </a:lnSpc>
               <a:buNone/>
             </a:pPr>
             <a:r>
-              <a:rPr lang="en-US" sz="1200" b="1" spc="100" kern="0" dirty="0">
+              <a:rPr lang="en-US" sz="1200" b="1" kern="0" spc="100" dirty="0">
                 <a:solidFill>
                   <a:srgbClr val="B5521A"/>
                 </a:solidFill>
@@ -5098,7 +4973,9 @@
       <p:sp>
         <p:nvSpPr>
           <p:cNvPr id="3" name="Text 1"/>
-          <p:cNvSpPr/>
+          <p:cNvSpPr>
+            <a:spLocks noGrp="1"/>
+          </p:cNvSpPr>
           <p:nvPr>
             <p:ph type="title"/>
           </p:nvPr>
@@ -5120,7 +4997,7 @@
           </a:bodyPr>
           <a:lstStyle/>
           <a:p>
-            <a:pPr algn="l" indent="0" marL="0">
+            <a:pPr marL="0" indent="0" algn="l">
               <a:lnSpc>
                 <a:spcPts val="3520"/>
               </a:lnSpc>
@@ -5164,7 +5041,7 @@
           </a:bodyPr>
           <a:lstStyle/>
           <a:p>
-            <a:pPr algn="l" indent="0" marL="0">
+            <a:pPr marL="0" indent="0" algn="l">
               <a:lnSpc>
                 <a:spcPts val="1960"/>
               </a:lnSpc>
@@ -5211,6 +5088,13 @@
             <a:prstDash val="solid"/>
           </a:ln>
         </p:spPr>
+        <p:txBody>
+          <a:bodyPr/>
+          <a:lstStyle/>
+          <a:p>
+            <a:endParaRPr lang="uz-Latn-UZ"/>
+          </a:p>
+        </p:txBody>
       </p:sp>
       <p:sp>
         <p:nvSpPr>
@@ -5235,7 +5119,7 @@
           </a:bodyPr>
           <a:lstStyle/>
           <a:p>
-            <a:pPr algn="l" indent="0" marL="0">
+            <a:pPr marL="0" indent="0" algn="l">
               <a:lnSpc>
                 <a:spcPts val="1680"/>
               </a:lnSpc>
@@ -5279,7 +5163,7 @@
           </a:bodyPr>
           <a:lstStyle/>
           <a:p>
-            <a:pPr algn="l" indent="0" marL="0">
+            <a:pPr marL="0" indent="0" algn="l">
               <a:lnSpc>
                 <a:spcPts val="3080"/>
               </a:lnSpc>
@@ -5323,7 +5207,7 @@
           </a:bodyPr>
           <a:lstStyle/>
           <a:p>
-            <a:pPr algn="l" indent="0" marL="0">
+            <a:pPr marL="0" indent="0" algn="l">
               <a:lnSpc>
                 <a:spcPts val="1680"/>
               </a:lnSpc>
@@ -5370,6 +5254,13 @@
             <a:prstDash val="solid"/>
           </a:ln>
         </p:spPr>
+        <p:txBody>
+          <a:bodyPr/>
+          <a:lstStyle/>
+          <a:p>
+            <a:endParaRPr lang="uz-Latn-UZ"/>
+          </a:p>
+        </p:txBody>
       </p:sp>
       <p:sp>
         <p:nvSpPr>
@@ -5394,7 +5285,7 @@
           </a:bodyPr>
           <a:lstStyle/>
           <a:p>
-            <a:pPr algn="l" indent="0" marL="0">
+            <a:pPr marL="0" indent="0" algn="l">
               <a:lnSpc>
                 <a:spcPts val="1680"/>
               </a:lnSpc>
@@ -5438,7 +5329,7 @@
           </a:bodyPr>
           <a:lstStyle/>
           <a:p>
-            <a:pPr algn="l" indent="0" marL="0">
+            <a:pPr marL="0" indent="0" algn="l">
               <a:lnSpc>
                 <a:spcPts val="3080"/>
               </a:lnSpc>
@@ -5482,7 +5373,7 @@
           </a:bodyPr>
           <a:lstStyle/>
           <a:p>
-            <a:pPr algn="l" indent="0" marL="0">
+            <a:pPr marL="0" indent="0" algn="l">
               <a:lnSpc>
                 <a:spcPts val="1680"/>
               </a:lnSpc>
@@ -5524,6 +5415,13 @@
           </a:solidFill>
           <a:ln/>
         </p:spPr>
+        <p:txBody>
+          <a:bodyPr/>
+          <a:lstStyle/>
+          <a:p>
+            <a:endParaRPr lang="uz-Latn-UZ"/>
+          </a:p>
+        </p:txBody>
       </p:sp>
       <p:sp>
         <p:nvSpPr>
@@ -5548,7 +5446,7 @@
           </a:bodyPr>
           <a:lstStyle/>
           <a:p>
-            <a:pPr algn="l" indent="0" marL="0">
+            <a:pPr marL="0" indent="0" algn="l">
               <a:lnSpc>
                 <a:spcPts val="1680"/>
               </a:lnSpc>
@@ -5592,7 +5490,7 @@
           </a:bodyPr>
           <a:lstStyle/>
           <a:p>
-            <a:pPr algn="l" indent="0" marL="0">
+            <a:pPr marL="0" indent="0" algn="l">
               <a:lnSpc>
                 <a:spcPts val="3080"/>
               </a:lnSpc>
@@ -5636,7 +5534,7 @@
           </a:bodyPr>
           <a:lstStyle/>
           <a:p>
-            <a:pPr algn="l" indent="0" marL="0">
+            <a:pPr marL="0" indent="0" algn="l">
               <a:lnSpc>
                 <a:spcPts val="1680"/>
               </a:lnSpc>
@@ -5678,6 +5576,13 @@
           </a:solidFill>
           <a:ln/>
         </p:spPr>
+        <p:txBody>
+          <a:bodyPr/>
+          <a:lstStyle/>
+          <a:p>
+            <a:endParaRPr lang="uz-Latn-UZ"/>
+          </a:p>
+        </p:txBody>
       </p:sp>
       <p:sp>
         <p:nvSpPr>
@@ -5702,7 +5607,7 @@
           </a:bodyPr>
           <a:lstStyle/>
           <a:p>
-            <a:pPr algn="l" indent="0" marL="0">
+            <a:pPr marL="0" indent="0" algn="l">
               <a:lnSpc>
                 <a:spcPts val="1800"/>
               </a:lnSpc>
@@ -5746,7 +5651,7 @@
           </a:bodyPr>
           <a:lstStyle/>
           <a:p>
-            <a:pPr algn="l" indent="0" marL="0">
+            <a:pPr marL="0" indent="0" algn="l">
               <a:lnSpc>
                 <a:spcPts val="1820"/>
               </a:lnSpc>
@@ -5790,7 +5695,7 @@
           </a:bodyPr>
           <a:lstStyle/>
           <a:p>
-            <a:pPr algn="l" indent="0" marL="0">
+            <a:pPr marL="0" indent="0" algn="l">
               <a:lnSpc>
                 <a:spcPts val="1680"/>
               </a:lnSpc>
@@ -5827,6 +5732,7 @@
         <a:solidFill>
           <a:srgbClr val="F5F3EE"/>
         </a:solidFill>
+        <a:effectLst/>
       </p:bgPr>
     </p:bg>
     <p:spTree>
@@ -5866,14 +5772,14 @@
           </a:bodyPr>
           <a:lstStyle/>
           <a:p>
-            <a:pPr algn="l" indent="0" marL="0">
+            <a:pPr marL="0" indent="0" algn="l">
               <a:lnSpc>
                 <a:spcPts val="1680"/>
               </a:lnSpc>
               <a:buNone/>
             </a:pPr>
             <a:r>
-              <a:rPr lang="en-US" sz="1200" b="1" spc="100" kern="0" dirty="0">
+              <a:rPr lang="en-US" sz="1200" b="1" kern="0" spc="100" dirty="0">
                 <a:solidFill>
                   <a:srgbClr val="B5521A"/>
                 </a:solidFill>
@@ -5890,7 +5796,9 @@
       <p:sp>
         <p:nvSpPr>
           <p:cNvPr id="3" name="Text 1"/>
-          <p:cNvSpPr/>
+          <p:cNvSpPr>
+            <a:spLocks noGrp="1"/>
+          </p:cNvSpPr>
           <p:nvPr>
             <p:ph type="title"/>
           </p:nvPr>
@@ -5912,7 +5820,7 @@
           </a:bodyPr>
           <a:lstStyle/>
           <a:p>
-            <a:pPr algn="l" indent="0" marL="0">
+            <a:pPr marL="0" indent="0" algn="l">
               <a:lnSpc>
                 <a:spcPts val="3520"/>
               </a:lnSpc>
@@ -5956,7 +5864,7 @@
           </a:bodyPr>
           <a:lstStyle/>
           <a:p>
-            <a:pPr algn="l" indent="0" marL="0">
+            <a:pPr marL="0" indent="0" algn="l">
               <a:lnSpc>
                 <a:spcPts val="1960"/>
               </a:lnSpc>
@@ -6000,7 +5908,7 @@
           </a:bodyPr>
           <a:lstStyle/>
           <a:p>
-            <a:pPr algn="l" indent="0" marL="0">
+            <a:pPr marL="0" indent="0" algn="l">
               <a:lnSpc>
                 <a:spcPts val="1680"/>
               </a:lnSpc>
@@ -6044,7 +5952,7 @@
           </a:bodyPr>
           <a:lstStyle/>
           <a:p>
-            <a:pPr algn="l" indent="0" marL="0">
+            <a:pPr marL="0" indent="0" algn="l">
               <a:lnSpc>
                 <a:spcPts val="2520"/>
               </a:lnSpc>
@@ -6088,7 +5996,7 @@
           </a:bodyPr>
           <a:lstStyle/>
           <a:p>
-            <a:pPr algn="l" indent="0" marL="0">
+            <a:pPr marL="0" indent="0" algn="l">
               <a:lnSpc>
                 <a:spcPts val="1680"/>
               </a:lnSpc>
@@ -6132,7 +6040,7 @@
           </a:bodyPr>
           <a:lstStyle/>
           <a:p>
-            <a:pPr algn="l" indent="0" marL="0">
+            <a:pPr marL="0" indent="0" algn="l">
               <a:lnSpc>
                 <a:spcPts val="2520"/>
               </a:lnSpc>
@@ -6179,6 +6087,13 @@
             <a:prstDash val="solid"/>
           </a:ln>
         </p:spPr>
+        <p:txBody>
+          <a:bodyPr/>
+          <a:lstStyle/>
+          <a:p>
+            <a:endParaRPr lang="uz-Latn-UZ"/>
+          </a:p>
+        </p:txBody>
       </p:sp>
       <p:sp>
         <p:nvSpPr>
@@ -6203,7 +6118,7 @@
           </a:bodyPr>
           <a:lstStyle/>
           <a:p>
-            <a:pPr algn="l" indent="0" marL="0">
+            <a:pPr marL="0" indent="0" algn="l">
               <a:lnSpc>
                 <a:spcPts val="3360"/>
               </a:lnSpc>
@@ -6247,7 +6162,7 @@
           </a:bodyPr>
           <a:lstStyle/>
           <a:p>
-            <a:pPr algn="l" indent="0" marL="0">
+            <a:pPr marL="0" indent="0" algn="l">
               <a:lnSpc>
                 <a:spcPts val="1680"/>
               </a:lnSpc>
@@ -6294,6 +6209,13 @@
             <a:prstDash val="solid"/>
           </a:ln>
         </p:spPr>
+        <p:txBody>
+          <a:bodyPr/>
+          <a:lstStyle/>
+          <a:p>
+            <a:endParaRPr lang="uz-Latn-UZ"/>
+          </a:p>
+        </p:txBody>
       </p:sp>
       <p:sp>
         <p:nvSpPr>
@@ -6318,7 +6240,7 @@
           </a:bodyPr>
           <a:lstStyle/>
           <a:p>
-            <a:pPr algn="l" indent="0" marL="0">
+            <a:pPr marL="0" indent="0" algn="l">
               <a:lnSpc>
                 <a:spcPts val="3360"/>
               </a:lnSpc>
@@ -6362,7 +6284,7 @@
           </a:bodyPr>
           <a:lstStyle/>
           <a:p>
-            <a:pPr algn="l" indent="0" marL="0">
+            <a:pPr marL="0" indent="0" algn="l">
               <a:lnSpc>
                 <a:spcPts val="1680"/>
               </a:lnSpc>
@@ -6404,6 +6326,13 @@
           </a:solidFill>
           <a:ln/>
         </p:spPr>
+        <p:txBody>
+          <a:bodyPr/>
+          <a:lstStyle/>
+          <a:p>
+            <a:endParaRPr lang="uz-Latn-UZ"/>
+          </a:p>
+        </p:txBody>
       </p:sp>
       <p:sp>
         <p:nvSpPr>
@@ -6428,7 +6357,7 @@
           </a:bodyPr>
           <a:lstStyle/>
           <a:p>
-            <a:pPr algn="l" indent="0" marL="0">
+            <a:pPr marL="0" indent="0" algn="l">
               <a:lnSpc>
                 <a:spcPts val="3360"/>
               </a:lnSpc>
@@ -6472,7 +6401,7 @@
           </a:bodyPr>
           <a:lstStyle/>
           <a:p>
-            <a:pPr algn="l" indent="0" marL="0">
+            <a:pPr marL="0" indent="0" algn="l">
               <a:lnSpc>
                 <a:spcPts val="1680"/>
               </a:lnSpc>
@@ -6516,7 +6445,7 @@
           </a:bodyPr>
           <a:lstStyle/>
           <a:p>
-            <a:pPr algn="l" indent="0" marL="0">
+            <a:pPr marL="0" indent="0" algn="l">
               <a:lnSpc>
                 <a:spcPts val="1680"/>
               </a:lnSpc>
@@ -6553,6 +6482,7 @@
         <a:solidFill>
           <a:srgbClr val="F5F3EE"/>
         </a:solidFill>
+        <a:effectLst/>
       </p:bgPr>
     </p:bg>
     <p:spTree>
@@ -6592,14 +6522,14 @@
           </a:bodyPr>
           <a:lstStyle/>
           <a:p>
-            <a:pPr algn="l" indent="0" marL="0">
+            <a:pPr marL="0" indent="0" algn="l">
               <a:lnSpc>
                 <a:spcPts val="1680"/>
               </a:lnSpc>
               <a:buNone/>
             </a:pPr>
             <a:r>
-              <a:rPr lang="en-US" sz="1200" b="1" spc="100" kern="0" dirty="0">
+              <a:rPr lang="en-US" sz="1200" b="1" kern="0" spc="100" dirty="0">
                 <a:solidFill>
                   <a:srgbClr val="B5521A"/>
                 </a:solidFill>
@@ -6616,7 +6546,9 @@
       <p:sp>
         <p:nvSpPr>
           <p:cNvPr id="3" name="Text 1"/>
-          <p:cNvSpPr/>
+          <p:cNvSpPr>
+            <a:spLocks noGrp="1"/>
+          </p:cNvSpPr>
           <p:nvPr>
             <p:ph type="title"/>
           </p:nvPr>
@@ -6638,7 +6570,7 @@
           </a:bodyPr>
           <a:lstStyle/>
           <a:p>
-            <a:pPr algn="l" indent="0" marL="0">
+            <a:pPr marL="0" indent="0" algn="l">
               <a:lnSpc>
                 <a:spcPts val="3520"/>
               </a:lnSpc>
@@ -6682,7 +6614,7 @@
           </a:bodyPr>
           <a:lstStyle/>
           <a:p>
-            <a:pPr algn="l" indent="0" marL="0">
+            <a:pPr marL="0" indent="0" algn="l">
               <a:lnSpc>
                 <a:spcPts val="2100"/>
               </a:lnSpc>
@@ -6729,6 +6661,13 @@
             <a:prstDash val="solid"/>
           </a:ln>
         </p:spPr>
+        <p:txBody>
+          <a:bodyPr/>
+          <a:lstStyle/>
+          <a:p>
+            <a:endParaRPr lang="uz-Latn-UZ"/>
+          </a:p>
+        </p:txBody>
       </p:sp>
       <p:sp>
         <p:nvSpPr>
@@ -6753,7 +6692,7 @@
           </a:bodyPr>
           <a:lstStyle/>
           <a:p>
-            <a:pPr algn="l" indent="0" marL="0">
+            <a:pPr marL="0" indent="0" algn="l">
               <a:lnSpc>
                 <a:spcPts val="1680"/>
               </a:lnSpc>
@@ -6797,7 +6736,7 @@
           </a:bodyPr>
           <a:lstStyle/>
           <a:p>
-            <a:pPr algn="l" indent="0" marL="0">
+            <a:pPr marL="0" indent="0" algn="l">
               <a:lnSpc>
                 <a:spcPts val="2100"/>
               </a:lnSpc>
@@ -6841,7 +6780,7 @@
           </a:bodyPr>
           <a:lstStyle/>
           <a:p>
-            <a:pPr algn="l" indent="0" marL="0">
+            <a:pPr marL="0" indent="0" algn="l">
               <a:lnSpc>
                 <a:spcPts val="5280"/>
               </a:lnSpc>
@@ -6883,6 +6822,13 @@
           </a:solidFill>
           <a:ln/>
         </p:spPr>
+        <p:txBody>
+          <a:bodyPr/>
+          <a:lstStyle/>
+          <a:p>
+            <a:endParaRPr lang="uz-Latn-UZ"/>
+          </a:p>
+        </p:txBody>
       </p:sp>
       <p:sp>
         <p:nvSpPr>
@@ -6907,7 +6853,7 @@
           </a:bodyPr>
           <a:lstStyle/>
           <a:p>
-            <a:pPr algn="l" indent="0" marL="0">
+            <a:pPr marL="0" indent="0" algn="l">
               <a:lnSpc>
                 <a:spcPts val="1680"/>
               </a:lnSpc>
@@ -6951,7 +6897,7 @@
           </a:bodyPr>
           <a:lstStyle/>
           <a:p>
-            <a:pPr algn="l" indent="0" marL="0">
+            <a:pPr marL="0" indent="0" algn="l">
               <a:lnSpc>
                 <a:spcPts val="2100"/>
               </a:lnSpc>
@@ -6995,7 +6941,7 @@
           </a:bodyPr>
           <a:lstStyle/>
           <a:p>
-            <a:pPr algn="l" indent="0" marL="0">
+            <a:pPr marL="0" indent="0" algn="l">
               <a:lnSpc>
                 <a:spcPts val="5280"/>
               </a:lnSpc>
@@ -7039,7 +6985,7 @@
           </a:bodyPr>
           <a:lstStyle/>
           <a:p>
-            <a:pPr algn="l" indent="0" marL="0">
+            <a:pPr marL="0" indent="0" algn="l">
               <a:lnSpc>
                 <a:spcPts val="1960"/>
               </a:lnSpc>
@@ -7083,7 +7029,7 @@
           </a:bodyPr>
           <a:lstStyle/>
           <a:p>
-            <a:pPr algn="l" indent="0" marL="0">
+            <a:pPr marL="0" indent="0" algn="l">
               <a:lnSpc>
                 <a:spcPts val="1680"/>
               </a:lnSpc>
@@ -7120,6 +7066,7 @@
         <a:solidFill>
           <a:srgbClr val="F5F3EE"/>
         </a:solidFill>
+        <a:effectLst/>
       </p:bgPr>
     </p:bg>
     <p:spTree>
@@ -7159,14 +7106,14 @@
           </a:bodyPr>
           <a:lstStyle/>
           <a:p>
-            <a:pPr algn="l" indent="0" marL="0">
+            <a:pPr marL="0" indent="0" algn="l">
               <a:lnSpc>
                 <a:spcPts val="1680"/>
               </a:lnSpc>
               <a:buNone/>
             </a:pPr>
             <a:r>
-              <a:rPr lang="en-US" sz="1200" b="1" spc="100" kern="0" dirty="0">
+              <a:rPr lang="en-US" sz="1200" b="1" kern="0" spc="100" dirty="0">
                 <a:solidFill>
                   <a:srgbClr val="B5521A"/>
                 </a:solidFill>
@@ -7183,7 +7130,9 @@
       <p:sp>
         <p:nvSpPr>
           <p:cNvPr id="3" name="Text 1"/>
-          <p:cNvSpPr/>
+          <p:cNvSpPr>
+            <a:spLocks noGrp="1"/>
+          </p:cNvSpPr>
           <p:nvPr>
             <p:ph type="title"/>
           </p:nvPr>
@@ -7205,7 +7154,7 @@
           </a:bodyPr>
           <a:lstStyle/>
           <a:p>
-            <a:pPr algn="l" indent="0" marL="0">
+            <a:pPr marL="0" indent="0" algn="l">
               <a:lnSpc>
                 <a:spcPts val="3520"/>
               </a:lnSpc>
@@ -7251,7 +7200,7 @@
                 <a:lnTo>
                   <a:pt x="10487025" y="0"/>
                 </a:lnTo>
-                <a:arcTo hR="73025" wR="73025" stAng="16200000" swAng="5400000"/>
+                <a:arcTo wR="73025" hR="73025" stAng="16200000" swAng="5400000"/>
                 <a:lnTo>
                   <a:pt x="10560050" y="674370"/>
                 </a:lnTo>
@@ -7261,7 +7210,7 @@
                 <a:lnTo>
                   <a:pt x="0" y="73025"/>
                 </a:lnTo>
-                <a:arcTo hR="73025" wR="73025" stAng="10800000" swAng="5400000"/>
+                <a:arcTo wR="73025" hR="73025" stAng="10800000" swAng="5400000"/>
                 <a:close/>
               </a:path>
             </a:pathLst>
@@ -7276,6 +7225,13 @@
             <a:prstDash val="solid"/>
           </a:ln>
         </p:spPr>
+        <p:txBody>
+          <a:bodyPr/>
+          <a:lstStyle/>
+          <a:p>
+            <a:endParaRPr lang="uz-Latn-UZ"/>
+          </a:p>
+        </p:txBody>
       </p:sp>
       <p:sp>
         <p:nvSpPr>
@@ -7300,7 +7256,7 @@
           </a:bodyPr>
           <a:lstStyle/>
           <a:p>
-            <a:pPr algn="l" indent="0" marL="0">
+            <a:pPr marL="0" indent="0" algn="l">
               <a:lnSpc>
                 <a:spcPts val="3080"/>
               </a:lnSpc>
@@ -7344,7 +7300,7 @@
           </a:bodyPr>
           <a:lstStyle/>
           <a:p>
-            <a:pPr algn="l" indent="0" marL="0">
+            <a:pPr marL="0" indent="0" algn="l">
               <a:lnSpc>
                 <a:spcPts val="2100"/>
               </a:lnSpc>
@@ -7388,7 +7344,7 @@
           </a:bodyPr>
           <a:lstStyle/>
           <a:p>
-            <a:pPr algn="l" indent="0" marL="0">
+            <a:pPr marL="0" indent="0" algn="l">
               <a:lnSpc>
                 <a:spcPts val="1820"/>
               </a:lnSpc>
@@ -7428,6 +7384,13 @@
           </a:solidFill>
           <a:ln/>
         </p:spPr>
+        <p:txBody>
+          <a:bodyPr/>
+          <a:lstStyle/>
+          <a:p>
+            <a:endParaRPr lang="uz-Latn-UZ"/>
+          </a:p>
+        </p:txBody>
       </p:sp>
       <p:sp>
         <p:nvSpPr>
@@ -7451,6 +7414,13 @@
             <a:prstDash val="solid"/>
           </a:ln>
         </p:spPr>
+        <p:txBody>
+          <a:bodyPr/>
+          <a:lstStyle/>
+          <a:p>
+            <a:endParaRPr lang="uz-Latn-UZ"/>
+          </a:p>
+        </p:txBody>
       </p:sp>
       <p:sp>
         <p:nvSpPr>
@@ -7474,6 +7444,13 @@
             <a:prstDash val="solid"/>
           </a:ln>
         </p:spPr>
+        <p:txBody>
+          <a:bodyPr/>
+          <a:lstStyle/>
+          <a:p>
+            <a:endParaRPr lang="uz-Latn-UZ"/>
+          </a:p>
+        </p:txBody>
       </p:sp>
       <p:sp>
         <p:nvSpPr>
@@ -7497,6 +7474,13 @@
             <a:prstDash val="solid"/>
           </a:ln>
         </p:spPr>
+        <p:txBody>
+          <a:bodyPr/>
+          <a:lstStyle/>
+          <a:p>
+            <a:endParaRPr lang="uz-Latn-UZ"/>
+          </a:p>
+        </p:txBody>
       </p:sp>
       <p:sp>
         <p:nvSpPr>
@@ -7521,7 +7505,7 @@
           </a:bodyPr>
           <a:lstStyle/>
           <a:p>
-            <a:pPr algn="l" indent="0" marL="0">
+            <a:pPr marL="0" indent="0" algn="l">
               <a:lnSpc>
                 <a:spcPts val="3080"/>
               </a:lnSpc>
@@ -7565,7 +7549,7 @@
           </a:bodyPr>
           <a:lstStyle/>
           <a:p>
-            <a:pPr algn="l" indent="0" marL="0">
+            <a:pPr marL="0" indent="0" algn="l">
               <a:lnSpc>
                 <a:spcPts val="2100"/>
               </a:lnSpc>
@@ -7609,7 +7593,7 @@
           </a:bodyPr>
           <a:lstStyle/>
           <a:p>
-            <a:pPr algn="l" indent="0" marL="0">
+            <a:pPr marL="0" indent="0" algn="l">
               <a:lnSpc>
                 <a:spcPts val="1820"/>
               </a:lnSpc>
@@ -7649,6 +7633,13 @@
           </a:solidFill>
           <a:ln/>
         </p:spPr>
+        <p:txBody>
+          <a:bodyPr/>
+          <a:lstStyle/>
+          <a:p>
+            <a:endParaRPr lang="uz-Latn-UZ"/>
+          </a:p>
+        </p:txBody>
       </p:sp>
       <p:sp>
         <p:nvSpPr>
@@ -7672,6 +7663,13 @@
             <a:prstDash val="solid"/>
           </a:ln>
         </p:spPr>
+        <p:txBody>
+          <a:bodyPr/>
+          <a:lstStyle/>
+          <a:p>
+            <a:endParaRPr lang="uz-Latn-UZ"/>
+          </a:p>
+        </p:txBody>
       </p:sp>
       <p:sp>
         <p:nvSpPr>
@@ -7695,6 +7693,13 @@
             <a:prstDash val="solid"/>
           </a:ln>
         </p:spPr>
+        <p:txBody>
+          <a:bodyPr/>
+          <a:lstStyle/>
+          <a:p>
+            <a:endParaRPr lang="uz-Latn-UZ"/>
+          </a:p>
+        </p:txBody>
       </p:sp>
       <p:sp>
         <p:nvSpPr>
@@ -7718,6 +7723,13 @@
             <a:prstDash val="solid"/>
           </a:ln>
         </p:spPr>
+        <p:txBody>
+          <a:bodyPr/>
+          <a:lstStyle/>
+          <a:p>
+            <a:endParaRPr lang="uz-Latn-UZ"/>
+          </a:p>
+        </p:txBody>
       </p:sp>
       <p:sp>
         <p:nvSpPr>
@@ -7742,7 +7754,7 @@
           </a:bodyPr>
           <a:lstStyle/>
           <a:p>
-            <a:pPr algn="l" indent="0" marL="0">
+            <a:pPr marL="0" indent="0" algn="l">
               <a:lnSpc>
                 <a:spcPts val="3080"/>
               </a:lnSpc>
@@ -7786,7 +7798,7 @@
           </a:bodyPr>
           <a:lstStyle/>
           <a:p>
-            <a:pPr algn="l" indent="0" marL="0">
+            <a:pPr marL="0" indent="0" algn="l">
               <a:lnSpc>
                 <a:spcPts val="2100"/>
               </a:lnSpc>
@@ -7830,7 +7842,7 @@
           </a:bodyPr>
           <a:lstStyle/>
           <a:p>
-            <a:pPr algn="l" indent="0" marL="0">
+            <a:pPr marL="0" indent="0" algn="l">
               <a:lnSpc>
                 <a:spcPts val="1820"/>
               </a:lnSpc>
@@ -7870,6 +7882,13 @@
           </a:solidFill>
           <a:ln/>
         </p:spPr>
+        <p:txBody>
+          <a:bodyPr/>
+          <a:lstStyle/>
+          <a:p>
+            <a:endParaRPr lang="uz-Latn-UZ"/>
+          </a:p>
+        </p:txBody>
       </p:sp>
       <p:sp>
         <p:nvSpPr>
@@ -7893,6 +7912,13 @@
             <a:prstDash val="solid"/>
           </a:ln>
         </p:spPr>
+        <p:txBody>
+          <a:bodyPr/>
+          <a:lstStyle/>
+          <a:p>
+            <a:endParaRPr lang="uz-Latn-UZ"/>
+          </a:p>
+        </p:txBody>
       </p:sp>
       <p:sp>
         <p:nvSpPr>
@@ -7916,6 +7942,13 @@
             <a:prstDash val="solid"/>
           </a:ln>
         </p:spPr>
+        <p:txBody>
+          <a:bodyPr/>
+          <a:lstStyle/>
+          <a:p>
+            <a:endParaRPr lang="uz-Latn-UZ"/>
+          </a:p>
+        </p:txBody>
       </p:sp>
       <p:sp>
         <p:nvSpPr>
@@ -7939,6 +7972,13 @@
             <a:prstDash val="solid"/>
           </a:ln>
         </p:spPr>
+        <p:txBody>
+          <a:bodyPr/>
+          <a:lstStyle/>
+          <a:p>
+            <a:endParaRPr lang="uz-Latn-UZ"/>
+          </a:p>
+        </p:txBody>
       </p:sp>
       <p:sp>
         <p:nvSpPr>
@@ -7963,7 +8003,7 @@
           </a:bodyPr>
           <a:lstStyle/>
           <a:p>
-            <a:pPr algn="l" indent="0" marL="0">
+            <a:pPr marL="0" indent="0" algn="l">
               <a:lnSpc>
                 <a:spcPts val="3080"/>
               </a:lnSpc>
@@ -8007,7 +8047,7 @@
           </a:bodyPr>
           <a:lstStyle/>
           <a:p>
-            <a:pPr algn="l" indent="0" marL="0">
+            <a:pPr marL="0" indent="0" algn="l">
               <a:lnSpc>
                 <a:spcPts val="2100"/>
               </a:lnSpc>
@@ -8051,7 +8091,7 @@
           </a:bodyPr>
           <a:lstStyle/>
           <a:p>
-            <a:pPr algn="l" indent="0" marL="0">
+            <a:pPr marL="0" indent="0" algn="l">
               <a:lnSpc>
                 <a:spcPts val="1820"/>
               </a:lnSpc>
@@ -8100,11 +8140,11 @@
                 <a:lnTo>
                   <a:pt x="10566400" y="594360"/>
                 </a:lnTo>
-                <a:arcTo hR="76200" wR="76200" stAng="0" swAng="5400000"/>
+                <a:arcTo wR="76200" hR="76200" stAng="0" swAng="5400000"/>
                 <a:lnTo>
                   <a:pt x="76200" y="670560"/>
                 </a:lnTo>
-                <a:arcTo hR="76200" wR="76200" stAng="5400000" swAng="5400000"/>
+                <a:arcTo wR="76200" hR="76200" stAng="5400000" swAng="5400000"/>
                 <a:lnTo>
                   <a:pt x="0" y="0"/>
                 </a:lnTo>
@@ -8117,6 +8157,13 @@
           </a:solidFill>
           <a:ln/>
         </p:spPr>
+        <p:txBody>
+          <a:bodyPr/>
+          <a:lstStyle/>
+          <a:p>
+            <a:endParaRPr lang="uz-Latn-UZ"/>
+          </a:p>
+        </p:txBody>
       </p:sp>
       <p:sp>
         <p:nvSpPr>
@@ -8141,7 +8188,7 @@
           </a:bodyPr>
           <a:lstStyle/>
           <a:p>
-            <a:pPr algn="l" indent="0" marL="0">
+            <a:pPr marL="0" indent="0" algn="l">
               <a:lnSpc>
                 <a:spcPts val="3080"/>
               </a:lnSpc>
@@ -8185,7 +8232,7 @@
           </a:bodyPr>
           <a:lstStyle/>
           <a:p>
-            <a:pPr algn="l" indent="0" marL="0">
+            <a:pPr marL="0" indent="0" algn="l">
               <a:lnSpc>
                 <a:spcPts val="2100"/>
               </a:lnSpc>
@@ -8229,7 +8276,7 @@
           </a:bodyPr>
           <a:lstStyle/>
           <a:p>
-            <a:pPr algn="l" indent="0" marL="0">
+            <a:pPr marL="0" indent="0" algn="l">
               <a:lnSpc>
                 <a:spcPts val="1820"/>
               </a:lnSpc>
@@ -8273,7 +8320,7 @@
           </a:bodyPr>
           <a:lstStyle/>
           <a:p>
-            <a:pPr algn="l" indent="0" marL="0">
+            <a:pPr marL="0" indent="0" algn="l">
               <a:lnSpc>
                 <a:spcPts val="1680"/>
               </a:lnSpc>
@@ -8310,6 +8357,7 @@
         <a:solidFill>
           <a:srgbClr val="16233B"/>
         </a:solidFill>
+        <a:effectLst/>
       </p:bgPr>
     </p:bg>
     <p:spTree>
@@ -8349,14 +8397,14 @@
           </a:bodyPr>
           <a:lstStyle/>
           <a:p>
-            <a:pPr algn="l" indent="0" marL="0">
+            <a:pPr marL="0" indent="0" algn="l">
               <a:lnSpc>
                 <a:spcPts val="1680"/>
               </a:lnSpc>
               <a:buNone/>
             </a:pPr>
             <a:r>
-              <a:rPr lang="en-US" sz="1200" b="1" spc="100" kern="0" dirty="0">
+              <a:rPr lang="en-US" sz="1200" b="1" kern="0" spc="100" dirty="0">
                 <a:solidFill>
                   <a:srgbClr val="F0A46E"/>
                 </a:solidFill>
@@ -8373,7 +8421,9 @@
       <p:sp>
         <p:nvSpPr>
           <p:cNvPr id="3" name="Text 1"/>
-          <p:cNvSpPr/>
+          <p:cNvSpPr>
+            <a:spLocks noGrp="1"/>
+          </p:cNvSpPr>
           <p:nvPr>
             <p:ph type="title"/>
           </p:nvPr>
@@ -8395,7 +8445,7 @@
           </a:bodyPr>
           <a:lstStyle/>
           <a:p>
-            <a:pPr algn="l" indent="0" marL="0">
+            <a:pPr marL="0" indent="0" algn="l">
               <a:lnSpc>
                 <a:spcPts val="3520"/>
               </a:lnSpc>
@@ -8439,13 +8489,13 @@
           </a:bodyPr>
           <a:lstStyle/>
           <a:p>
-            <a:pPr algn="l" marL="181610" indent="-181610">
+            <a:pPr marL="181610" indent="-181610" algn="l">
               <a:lnSpc>
                 <a:spcPts val="1820"/>
               </a:lnSpc>
               <a:buSzPct val="100000"/>
               <a:buFontTx/>
-              <a:buAutoNum type="arabicPeriod" startAt="1"/>
+              <a:buAutoNum type="arabicPeriod"/>
             </a:pPr>
             <a:r>
               <a:rPr lang="en-US" sz="1300" dirty="0">
@@ -8461,13 +8511,13 @@
             <a:endParaRPr lang="en-US" sz="1300" dirty="0"/>
           </a:p>
           <a:p>
-            <a:pPr algn="l" marL="181610" indent="-181610">
+            <a:pPr marL="181610" indent="-181610" algn="l">
               <a:lnSpc>
                 <a:spcPts val="1820"/>
               </a:lnSpc>
               <a:buSzPct val="100000"/>
               <a:buFontTx/>
-              <a:buAutoNum type="arabicPeriod" startAt="1"/>
+              <a:buAutoNum type="arabicPeriod"/>
             </a:pPr>
             <a:r>
               <a:rPr lang="en-US" sz="1300" dirty="0">
@@ -8483,13 +8533,13 @@
             <a:endParaRPr lang="en-US" sz="1300" dirty="0"/>
           </a:p>
           <a:p>
-            <a:pPr algn="l" marL="181610" indent="-181610">
+            <a:pPr marL="181610" indent="-181610" algn="l">
               <a:lnSpc>
                 <a:spcPts val="1820"/>
               </a:lnSpc>
               <a:buSzPct val="100000"/>
               <a:buFontTx/>
-              <a:buAutoNum type="arabicPeriod" startAt="1"/>
+              <a:buAutoNum type="arabicPeriod"/>
             </a:pPr>
             <a:r>
               <a:rPr lang="en-US" sz="1300" dirty="0">
@@ -8505,13 +8555,13 @@
             <a:endParaRPr lang="en-US" sz="1300" dirty="0"/>
           </a:p>
           <a:p>
-            <a:pPr algn="l" marL="181610" indent="-181610">
+            <a:pPr marL="181610" indent="-181610" algn="l">
               <a:lnSpc>
                 <a:spcPts val="1820"/>
               </a:lnSpc>
               <a:buSzPct val="100000"/>
               <a:buFontTx/>
-              <a:buAutoNum type="arabicPeriod" startAt="1"/>
+              <a:buAutoNum type="arabicPeriod"/>
             </a:pPr>
             <a:r>
               <a:rPr lang="en-US" sz="1300" dirty="0">
@@ -8527,13 +8577,13 @@
             <a:endParaRPr lang="en-US" sz="1300" dirty="0"/>
           </a:p>
           <a:p>
-            <a:pPr algn="l" marL="181610" indent="-181610">
+            <a:pPr marL="181610" indent="-181610" algn="l">
               <a:lnSpc>
                 <a:spcPts val="1820"/>
               </a:lnSpc>
               <a:buSzPct val="100000"/>
               <a:buFontTx/>
-              <a:buAutoNum type="arabicPeriod" startAt="1"/>
+              <a:buAutoNum type="arabicPeriod"/>
             </a:pPr>
             <a:r>
               <a:rPr lang="en-US" sz="1300" dirty="0">
@@ -8549,13 +8599,13 @@
             <a:endParaRPr lang="en-US" sz="1300" dirty="0"/>
           </a:p>
           <a:p>
-            <a:pPr algn="l" marL="181610" indent="-181610">
+            <a:pPr marL="181610" indent="-181610" algn="l">
               <a:lnSpc>
                 <a:spcPts val="1820"/>
               </a:lnSpc>
               <a:buSzPct val="100000"/>
               <a:buFontTx/>
-              <a:buAutoNum type="arabicPeriod" startAt="1"/>
+              <a:buAutoNum type="arabicPeriod"/>
             </a:pPr>
             <a:r>
               <a:rPr lang="en-US" sz="1300" dirty="0">
@@ -8595,13 +8645,13 @@
           </a:bodyPr>
           <a:lstStyle/>
           <a:p>
-            <a:pPr algn="l" marL="181610" indent="-181610">
+            <a:pPr marL="181610" indent="-181610" algn="l">
               <a:lnSpc>
                 <a:spcPts val="1820"/>
               </a:lnSpc>
               <a:buSzPct val="100000"/>
               <a:buFontTx/>
-              <a:buAutoNum type="arabicPeriod" startAt="1"/>
+              <a:buAutoNum type="arabicPeriod"/>
             </a:pPr>
             <a:r>
               <a:rPr lang="en-US" sz="1300" dirty="0">
@@ -8617,13 +8667,13 @@
             <a:endParaRPr lang="en-US" sz="1300" dirty="0"/>
           </a:p>
           <a:p>
-            <a:pPr algn="l" marL="181610" indent="-181610">
+            <a:pPr marL="181610" indent="-181610" algn="l">
               <a:lnSpc>
                 <a:spcPts val="1820"/>
               </a:lnSpc>
               <a:buSzPct val="100000"/>
               <a:buFontTx/>
-              <a:buAutoNum type="arabicPeriod" startAt="1"/>
+              <a:buAutoNum type="arabicPeriod"/>
             </a:pPr>
             <a:r>
               <a:rPr lang="en-US" sz="1300" dirty="0">
@@ -8639,13 +8689,13 @@
             <a:endParaRPr lang="en-US" sz="1300" dirty="0"/>
           </a:p>
           <a:p>
-            <a:pPr algn="l" marL="181610" indent="-181610">
+            <a:pPr marL="181610" indent="-181610" algn="l">
               <a:lnSpc>
                 <a:spcPts val="1820"/>
               </a:lnSpc>
               <a:buSzPct val="100000"/>
               <a:buFontTx/>
-              <a:buAutoNum type="arabicPeriod" startAt="1"/>
+              <a:buAutoNum type="arabicPeriod"/>
             </a:pPr>
             <a:r>
               <a:rPr lang="en-US" sz="1300" dirty="0">
@@ -8661,13 +8711,13 @@
             <a:endParaRPr lang="en-US" sz="1300" dirty="0"/>
           </a:p>
           <a:p>
-            <a:pPr algn="l" marL="181610" indent="-181610">
+            <a:pPr marL="181610" indent="-181610" algn="l">
               <a:lnSpc>
                 <a:spcPts val="1820"/>
               </a:lnSpc>
               <a:buSzPct val="100000"/>
               <a:buFontTx/>
-              <a:buAutoNum type="arabicPeriod" startAt="1"/>
+              <a:buAutoNum type="arabicPeriod"/>
             </a:pPr>
             <a:r>
               <a:rPr lang="en-US" sz="1300" dirty="0">
@@ -8683,13 +8733,13 @@
             <a:endParaRPr lang="en-US" sz="1300" dirty="0"/>
           </a:p>
           <a:p>
-            <a:pPr algn="l" marL="181610" indent="-181610">
+            <a:pPr marL="181610" indent="-181610" algn="l">
               <a:lnSpc>
                 <a:spcPts val="1820"/>
               </a:lnSpc>
               <a:buSzPct val="100000"/>
               <a:buFontTx/>
-              <a:buAutoNum type="arabicPeriod" startAt="1"/>
+              <a:buAutoNum type="arabicPeriod"/>
             </a:pPr>
             <a:r>
               <a:rPr lang="en-US" sz="1300" dirty="0">
@@ -8705,13 +8755,13 @@
             <a:endParaRPr lang="en-US" sz="1300" dirty="0"/>
           </a:p>
           <a:p>
-            <a:pPr algn="l" marL="181610" indent="-181610">
+            <a:pPr marL="181610" indent="-181610" algn="l">
               <a:lnSpc>
                 <a:spcPts val="1820"/>
               </a:lnSpc>
               <a:buSzPct val="100000"/>
               <a:buFontTx/>
-              <a:buAutoNum type="arabicPeriod" startAt="1"/>
+              <a:buAutoNum type="arabicPeriod"/>
             </a:pPr>
             <a:r>
               <a:rPr lang="en-US" sz="1300" dirty="0">
@@ -8751,7 +8801,7 @@
           </a:bodyPr>
           <a:lstStyle/>
           <a:p>
-            <a:pPr algn="l" indent="0" marL="0">
+            <a:pPr marL="0" indent="0" algn="l">
               <a:lnSpc>
                 <a:spcPts val="1680"/>
               </a:lnSpc>
@@ -8788,6 +8838,7 @@
         <a:solidFill>
           <a:srgbClr val="F5F3EE"/>
         </a:solidFill>
+        <a:effectLst/>
       </p:bgPr>
     </p:bg>
     <p:spTree>
@@ -8827,14 +8878,14 @@
           </a:bodyPr>
           <a:lstStyle/>
           <a:p>
-            <a:pPr algn="l" indent="0" marL="0">
+            <a:pPr marL="0" indent="0" algn="l">
               <a:lnSpc>
                 <a:spcPts val="1680"/>
               </a:lnSpc>
               <a:buNone/>
             </a:pPr>
             <a:r>
-              <a:rPr lang="en-US" sz="1200" b="1" spc="100" kern="0" dirty="0">
+              <a:rPr lang="en-US" sz="1200" b="1" kern="0" spc="100" dirty="0">
                 <a:solidFill>
                   <a:srgbClr val="B5521A"/>
                 </a:solidFill>
@@ -8851,7 +8902,9 @@
       <p:sp>
         <p:nvSpPr>
           <p:cNvPr id="3" name="Text 1"/>
-          <p:cNvSpPr/>
+          <p:cNvSpPr>
+            <a:spLocks noGrp="1"/>
+          </p:cNvSpPr>
           <p:nvPr>
             <p:ph type="title"/>
           </p:nvPr>
@@ -8873,7 +8926,7 @@
           </a:bodyPr>
           <a:lstStyle/>
           <a:p>
-            <a:pPr algn="l" indent="0" marL="0">
+            <a:pPr marL="0" indent="0" algn="l">
               <a:lnSpc>
                 <a:spcPts val="3520"/>
               </a:lnSpc>
@@ -8917,7 +8970,7 @@
           </a:bodyPr>
           <a:lstStyle/>
           <a:p>
-            <a:pPr algn="l" indent="0" marL="0">
+            <a:pPr marL="0" indent="0" algn="l">
               <a:lnSpc>
                 <a:spcPts val="2240"/>
               </a:lnSpc>
@@ -8964,6 +9017,13 @@
             <a:prstDash val="solid"/>
           </a:ln>
         </p:spPr>
+        <p:txBody>
+          <a:bodyPr/>
+          <a:lstStyle/>
+          <a:p>
+            <a:endParaRPr lang="uz-Latn-UZ"/>
+          </a:p>
+        </p:txBody>
       </p:sp>
       <p:sp>
         <p:nvSpPr>
@@ -8988,7 +9048,7 @@
           </a:bodyPr>
           <a:lstStyle/>
           <a:p>
-            <a:pPr algn="l" indent="0" marL="0">
+            <a:pPr marL="0" indent="0" algn="l">
               <a:lnSpc>
                 <a:spcPts val="2800"/>
               </a:lnSpc>
@@ -9032,7 +9092,7 @@
           </a:bodyPr>
           <a:lstStyle/>
           <a:p>
-            <a:pPr algn="l" indent="0" marL="0">
+            <a:pPr marL="0" indent="0" algn="l">
               <a:lnSpc>
                 <a:spcPts val="1820"/>
               </a:lnSpc>
@@ -9079,6 +9139,13 @@
             <a:prstDash val="solid"/>
           </a:ln>
         </p:spPr>
+        <p:txBody>
+          <a:bodyPr/>
+          <a:lstStyle/>
+          <a:p>
+            <a:endParaRPr lang="uz-Latn-UZ"/>
+          </a:p>
+        </p:txBody>
       </p:sp>
       <p:sp>
         <p:nvSpPr>
@@ -9103,7 +9170,7 @@
           </a:bodyPr>
           <a:lstStyle/>
           <a:p>
-            <a:pPr algn="l" indent="0" marL="0">
+            <a:pPr marL="0" indent="0" algn="l">
               <a:lnSpc>
                 <a:spcPts val="2800"/>
               </a:lnSpc>
@@ -9147,7 +9214,7 @@
           </a:bodyPr>
           <a:lstStyle/>
           <a:p>
-            <a:pPr algn="l" indent="0" marL="0">
+            <a:pPr marL="0" indent="0" algn="l">
               <a:lnSpc>
                 <a:spcPts val="1820"/>
               </a:lnSpc>
@@ -9194,6 +9261,13 @@
             <a:prstDash val="solid"/>
           </a:ln>
         </p:spPr>
+        <p:txBody>
+          <a:bodyPr/>
+          <a:lstStyle/>
+          <a:p>
+            <a:endParaRPr lang="uz-Latn-UZ"/>
+          </a:p>
+        </p:txBody>
       </p:sp>
       <p:sp>
         <p:nvSpPr>
@@ -9218,7 +9292,7 @@
           </a:bodyPr>
           <a:lstStyle/>
           <a:p>
-            <a:pPr algn="l" indent="0" marL="0">
+            <a:pPr marL="0" indent="0" algn="l">
               <a:lnSpc>
                 <a:spcPts val="2800"/>
               </a:lnSpc>
@@ -9262,7 +9336,7 @@
           </a:bodyPr>
           <a:lstStyle/>
           <a:p>
-            <a:pPr algn="l" indent="0" marL="0">
+            <a:pPr marL="0" indent="0" algn="l">
               <a:lnSpc>
                 <a:spcPts val="1820"/>
               </a:lnSpc>
@@ -9309,6 +9383,13 @@
             <a:prstDash val="solid"/>
           </a:ln>
         </p:spPr>
+        <p:txBody>
+          <a:bodyPr/>
+          <a:lstStyle/>
+          <a:p>
+            <a:endParaRPr lang="uz-Latn-UZ"/>
+          </a:p>
+        </p:txBody>
       </p:sp>
       <p:sp>
         <p:nvSpPr>
@@ -9333,7 +9414,7 @@
           </a:bodyPr>
           <a:lstStyle/>
           <a:p>
-            <a:pPr algn="l" indent="0" marL="0">
+            <a:pPr marL="0" indent="0" algn="l">
               <a:lnSpc>
                 <a:spcPts val="2800"/>
               </a:lnSpc>
@@ -9377,7 +9458,7 @@
           </a:bodyPr>
           <a:lstStyle/>
           <a:p>
-            <a:pPr algn="l" indent="0" marL="0">
+            <a:pPr marL="0" indent="0" algn="l">
               <a:lnSpc>
                 <a:spcPts val="1820"/>
               </a:lnSpc>
@@ -9424,6 +9505,13 @@
             <a:prstDash val="solid"/>
           </a:ln>
         </p:spPr>
+        <p:txBody>
+          <a:bodyPr/>
+          <a:lstStyle/>
+          <a:p>
+            <a:endParaRPr lang="uz-Latn-UZ"/>
+          </a:p>
+        </p:txBody>
       </p:sp>
       <p:sp>
         <p:nvSpPr>
@@ -9448,7 +9536,7 @@
           </a:bodyPr>
           <a:lstStyle/>
           <a:p>
-            <a:pPr algn="l" indent="0" marL="0">
+            <a:pPr marL="0" indent="0" algn="l">
               <a:lnSpc>
                 <a:spcPts val="2800"/>
               </a:lnSpc>
@@ -9492,7 +9580,7 @@
           </a:bodyPr>
           <a:lstStyle/>
           <a:p>
-            <a:pPr algn="l" indent="0" marL="0">
+            <a:pPr marL="0" indent="0" algn="l">
               <a:lnSpc>
                 <a:spcPts val="1820"/>
               </a:lnSpc>
@@ -9536,7 +9624,7 @@
           </a:bodyPr>
           <a:lstStyle/>
           <a:p>
-            <a:pPr algn="l" indent="0" marL="0">
+            <a:pPr marL="0" indent="0" algn="l">
               <a:lnSpc>
                 <a:spcPts val="1680"/>
               </a:lnSpc>
@@ -9573,6 +9661,7 @@
         <a:solidFill>
           <a:srgbClr val="F5F3EE"/>
         </a:solidFill>
+        <a:effectLst/>
       </p:bgPr>
     </p:bg>
     <p:spTree>
@@ -9612,14 +9701,14 @@
           </a:bodyPr>
           <a:lstStyle/>
           <a:p>
-            <a:pPr algn="l" indent="0" marL="0">
+            <a:pPr marL="0" indent="0" algn="l">
               <a:lnSpc>
                 <a:spcPts val="1680"/>
               </a:lnSpc>
               <a:buNone/>
             </a:pPr>
             <a:r>
-              <a:rPr lang="en-US" sz="1200" b="1" spc="100" kern="0" dirty="0">
+              <a:rPr lang="en-US" sz="1200" b="1" kern="0" spc="100" dirty="0">
                 <a:solidFill>
                   <a:srgbClr val="B5521A"/>
                 </a:solidFill>
@@ -9636,7 +9725,9 @@
       <p:sp>
         <p:nvSpPr>
           <p:cNvPr id="3" name="Text 1"/>
-          <p:cNvSpPr/>
+          <p:cNvSpPr>
+            <a:spLocks noGrp="1"/>
+          </p:cNvSpPr>
           <p:nvPr>
             <p:ph type="title"/>
           </p:nvPr>
@@ -9658,7 +9749,7 @@
           </a:bodyPr>
           <a:lstStyle/>
           <a:p>
-            <a:pPr algn="l" indent="0" marL="0">
+            <a:pPr marL="0" indent="0" algn="l">
               <a:lnSpc>
                 <a:spcPts val="3520"/>
               </a:lnSpc>
@@ -9705,6 +9796,13 @@
             <a:prstDash val="solid"/>
           </a:ln>
         </p:spPr>
+        <p:txBody>
+          <a:bodyPr/>
+          <a:lstStyle/>
+          <a:p>
+            <a:endParaRPr lang="uz-Latn-UZ"/>
+          </a:p>
+        </p:txBody>
       </p:sp>
       <p:sp>
         <p:nvSpPr>
@@ -9729,7 +9827,7 @@
           </a:bodyPr>
           <a:lstStyle/>
           <a:p>
-            <a:pPr algn="l" indent="0" marL="0">
+            <a:pPr marL="0" indent="0" algn="l">
               <a:lnSpc>
                 <a:spcPts val="1920"/>
               </a:lnSpc>
@@ -9773,7 +9871,7 @@
           </a:bodyPr>
           <a:lstStyle/>
           <a:p>
-            <a:pPr algn="l" indent="0" marL="0">
+            <a:pPr marL="0" indent="0" algn="l">
               <a:lnSpc>
                 <a:spcPts val="1820"/>
               </a:lnSpc>
@@ -9820,6 +9918,13 @@
             <a:prstDash val="solid"/>
           </a:ln>
         </p:spPr>
+        <p:txBody>
+          <a:bodyPr/>
+          <a:lstStyle/>
+          <a:p>
+            <a:endParaRPr lang="uz-Latn-UZ"/>
+          </a:p>
+        </p:txBody>
       </p:sp>
       <p:sp>
         <p:nvSpPr>
@@ -9844,7 +9949,7 @@
           </a:bodyPr>
           <a:lstStyle/>
           <a:p>
-            <a:pPr algn="l" indent="0" marL="0">
+            <a:pPr marL="0" indent="0" algn="l">
               <a:lnSpc>
                 <a:spcPts val="1920"/>
               </a:lnSpc>
@@ -9888,7 +9993,7 @@
           </a:bodyPr>
           <a:lstStyle/>
           <a:p>
-            <a:pPr algn="l" indent="0" marL="0">
+            <a:pPr marL="0" indent="0" algn="l">
               <a:lnSpc>
                 <a:spcPts val="1820"/>
               </a:lnSpc>
@@ -9935,6 +10040,13 @@
             <a:prstDash val="solid"/>
           </a:ln>
         </p:spPr>
+        <p:txBody>
+          <a:bodyPr/>
+          <a:lstStyle/>
+          <a:p>
+            <a:endParaRPr lang="uz-Latn-UZ"/>
+          </a:p>
+        </p:txBody>
       </p:sp>
       <p:sp>
         <p:nvSpPr>
@@ -9959,7 +10071,7 @@
           </a:bodyPr>
           <a:lstStyle/>
           <a:p>
-            <a:pPr algn="l" indent="0" marL="0">
+            <a:pPr marL="0" indent="0" algn="l">
               <a:lnSpc>
                 <a:spcPts val="1920"/>
               </a:lnSpc>
@@ -10003,7 +10115,7 @@
           </a:bodyPr>
           <a:lstStyle/>
           <a:p>
-            <a:pPr algn="l" indent="0" marL="0">
+            <a:pPr marL="0" indent="0" algn="l">
               <a:lnSpc>
                 <a:spcPts val="1820"/>
               </a:lnSpc>
@@ -10045,6 +10157,13 @@
           </a:solidFill>
           <a:ln/>
         </p:spPr>
+        <p:txBody>
+          <a:bodyPr/>
+          <a:lstStyle/>
+          <a:p>
+            <a:endParaRPr lang="uz-Latn-UZ"/>
+          </a:p>
+        </p:txBody>
       </p:sp>
       <p:sp>
         <p:nvSpPr>
@@ -10071,19 +10190,19 @@
                 <a:lnTo>
                   <a:pt x="76200" y="1198880"/>
                 </a:lnTo>
-                <a:arcTo hR="76200" wR="76200" stAng="5400000" swAng="5400000"/>
+                <a:arcTo wR="76200" hR="76200" stAng="5400000" swAng="5400000"/>
                 <a:lnTo>
                   <a:pt x="0" y="76200"/>
                 </a:lnTo>
-                <a:arcTo hR="76200" wR="76200" stAng="10800000" swAng="5400000"/>
+                <a:arcTo wR="76200" hR="76200" stAng="10800000" swAng="5400000"/>
                 <a:lnTo>
                   <a:pt x="76200" y="0"/>
                 </a:lnTo>
-                <a:arcTo hR="76200" wR="25400" stAng="16200000" swAng="-5400000"/>
+                <a:arcTo wR="25400" hR="76200" stAng="16200000" swAng="-5400000"/>
                 <a:lnTo>
                   <a:pt x="50800" y="1122680"/>
                 </a:lnTo>
-                <a:arcTo hR="76200" wR="25400" stAng="10800000" swAng="-5400000"/>
+                <a:arcTo wR="25400" hR="76200" stAng="10800000" swAng="-5400000"/>
                 <a:close/>
               </a:path>
             </a:pathLst>
@@ -10093,6 +10212,13 @@
           </a:solidFill>
           <a:ln/>
         </p:spPr>
+        <p:txBody>
+          <a:bodyPr/>
+          <a:lstStyle/>
+          <a:p>
+            <a:endParaRPr lang="uz-Latn-UZ"/>
+          </a:p>
+        </p:txBody>
       </p:sp>
       <p:sp>
         <p:nvSpPr>
@@ -10117,7 +10243,7 @@
           </a:bodyPr>
           <a:lstStyle/>
           <a:p>
-            <a:pPr algn="l" indent="0" marL="0">
+            <a:pPr marL="0" indent="0" algn="l">
               <a:lnSpc>
                 <a:spcPts val="1920"/>
               </a:lnSpc>
@@ -10161,7 +10287,7 @@
           </a:bodyPr>
           <a:lstStyle/>
           <a:p>
-            <a:pPr algn="l" indent="0" marL="0">
+            <a:pPr marL="0" indent="0" algn="l">
               <a:lnSpc>
                 <a:spcPts val="1820"/>
               </a:lnSpc>
@@ -10205,7 +10331,7 @@
           </a:bodyPr>
           <a:lstStyle/>
           <a:p>
-            <a:pPr algn="l" indent="0" marL="0">
+            <a:pPr marL="0" indent="0" algn="l">
               <a:lnSpc>
                 <a:spcPts val="1680"/>
               </a:lnSpc>
@@ -10242,6 +10368,7 @@
         <a:solidFill>
           <a:srgbClr val="F5F3EE"/>
         </a:solidFill>
+        <a:effectLst/>
       </p:bgPr>
     </p:bg>
     <p:spTree>
@@ -10281,14 +10408,14 @@
           </a:bodyPr>
           <a:lstStyle/>
           <a:p>
-            <a:pPr algn="l" indent="0" marL="0">
+            <a:pPr marL="0" indent="0" algn="l">
               <a:lnSpc>
                 <a:spcPts val="1680"/>
               </a:lnSpc>
               <a:buNone/>
             </a:pPr>
             <a:r>
-              <a:rPr lang="en-US" sz="1200" b="1" spc="100" kern="0" dirty="0">
+              <a:rPr lang="en-US" sz="1200" b="1" kern="0" spc="100" dirty="0">
                 <a:solidFill>
                   <a:srgbClr val="B5521A"/>
                 </a:solidFill>
@@ -10305,7 +10432,9 @@
       <p:sp>
         <p:nvSpPr>
           <p:cNvPr id="3" name="Text 1"/>
-          <p:cNvSpPr/>
+          <p:cNvSpPr>
+            <a:spLocks noGrp="1"/>
+          </p:cNvSpPr>
           <p:nvPr>
             <p:ph type="title"/>
           </p:nvPr>
@@ -10327,7 +10456,7 @@
           </a:bodyPr>
           <a:lstStyle/>
           <a:p>
-            <a:pPr algn="l" indent="0" marL="0">
+            <a:pPr marL="0" indent="0" algn="l">
               <a:lnSpc>
                 <a:spcPts val="3520"/>
               </a:lnSpc>
@@ -10371,7 +10500,7 @@
           </a:bodyPr>
           <a:lstStyle/>
           <a:p>
-            <a:pPr algn="l" indent="0" marL="0">
+            <a:pPr marL="0" indent="0" algn="l">
               <a:lnSpc>
                 <a:spcPts val="2100"/>
               </a:lnSpc>
@@ -10418,6 +10547,13 @@
             <a:prstDash val="solid"/>
           </a:ln>
         </p:spPr>
+        <p:txBody>
+          <a:bodyPr/>
+          <a:lstStyle/>
+          <a:p>
+            <a:endParaRPr lang="uz-Latn-UZ"/>
+          </a:p>
+        </p:txBody>
       </p:sp>
       <p:sp>
         <p:nvSpPr>
@@ -10442,7 +10578,7 @@
           </a:bodyPr>
           <a:lstStyle/>
           <a:p>
-            <a:pPr algn="l" indent="0" marL="0">
+            <a:pPr marL="0" indent="0" algn="l">
               <a:lnSpc>
                 <a:spcPts val="2160"/>
               </a:lnSpc>
@@ -10486,7 +10622,7 @@
           </a:bodyPr>
           <a:lstStyle/>
           <a:p>
-            <a:pPr algn="l" indent="0" marL="0">
+            <a:pPr marL="0" indent="0" algn="l">
               <a:lnSpc>
                 <a:spcPts val="1960"/>
               </a:lnSpc>
@@ -10530,7 +10666,7 @@
           </a:bodyPr>
           <a:lstStyle/>
           <a:p>
-            <a:pPr algn="l" indent="0" marL="0">
+            <a:pPr marL="0" indent="0" algn="l">
               <a:lnSpc>
                 <a:spcPts val="1820"/>
               </a:lnSpc>
@@ -10577,6 +10713,13 @@
             <a:prstDash val="solid"/>
           </a:ln>
         </p:spPr>
+        <p:txBody>
+          <a:bodyPr/>
+          <a:lstStyle/>
+          <a:p>
+            <a:endParaRPr lang="uz-Latn-UZ"/>
+          </a:p>
+        </p:txBody>
       </p:sp>
       <p:sp>
         <p:nvSpPr>
@@ -10601,7 +10744,7 @@
           </a:bodyPr>
           <a:lstStyle/>
           <a:p>
-            <a:pPr algn="l" indent="0" marL="0">
+            <a:pPr marL="0" indent="0" algn="l">
               <a:lnSpc>
                 <a:spcPts val="2160"/>
               </a:lnSpc>
@@ -10645,7 +10788,7 @@
           </a:bodyPr>
           <a:lstStyle/>
           <a:p>
-            <a:pPr algn="l" indent="0" marL="0">
+            <a:pPr marL="0" indent="0" algn="l">
               <a:lnSpc>
                 <a:spcPts val="1960"/>
               </a:lnSpc>
@@ -10689,7 +10832,7 @@
           </a:bodyPr>
           <a:lstStyle/>
           <a:p>
-            <a:pPr algn="l" indent="0" marL="0">
+            <a:pPr marL="0" indent="0" algn="l">
               <a:lnSpc>
                 <a:spcPts val="1820"/>
               </a:lnSpc>
@@ -10733,7 +10876,7 @@
           </a:bodyPr>
           <a:lstStyle/>
           <a:p>
-            <a:pPr algn="l" indent="0" marL="0">
+            <a:pPr marL="0" indent="0" algn="l">
               <a:lnSpc>
                 <a:spcPts val="1680"/>
               </a:lnSpc>
@@ -10770,6 +10913,7 @@
         <a:solidFill>
           <a:srgbClr val="F5F3EE"/>
         </a:solidFill>
+        <a:effectLst/>
       </p:bgPr>
     </p:bg>
     <p:spTree>
@@ -10809,14 +10953,14 @@
           </a:bodyPr>
           <a:lstStyle/>
           <a:p>
-            <a:pPr algn="l" indent="0" marL="0">
+            <a:pPr marL="0" indent="0" algn="l">
               <a:lnSpc>
                 <a:spcPts val="1680"/>
               </a:lnSpc>
               <a:buNone/>
             </a:pPr>
             <a:r>
-              <a:rPr lang="en-US" sz="1200" b="1" spc="100" kern="0" dirty="0">
+              <a:rPr lang="en-US" sz="1200" b="1" kern="0" spc="100" dirty="0">
                 <a:solidFill>
                   <a:srgbClr val="B5521A"/>
                 </a:solidFill>
@@ -10833,7 +10977,9 @@
       <p:sp>
         <p:nvSpPr>
           <p:cNvPr id="3" name="Text 1"/>
-          <p:cNvSpPr/>
+          <p:cNvSpPr>
+            <a:spLocks noGrp="1"/>
+          </p:cNvSpPr>
           <p:nvPr>
             <p:ph type="title"/>
           </p:nvPr>
@@ -10855,7 +11001,7 @@
           </a:bodyPr>
           <a:lstStyle/>
           <a:p>
-            <a:pPr algn="l" indent="0" marL="0">
+            <a:pPr marL="0" indent="0" algn="l">
               <a:lnSpc>
                 <a:spcPts val="3520"/>
               </a:lnSpc>
@@ -10878,15 +11024,15 @@
       </p:sp>
       <p:pic>
         <p:nvPicPr>
-          <p:cNvPr id="4" name="Image 0" descr="Fizik kattalik, birlamchi oʻzgartirgich, ikkilamchi oʻzgartirgich, signalni konditsiyalash, ADC va mikrokontroller ketma-ket zanjiri">    </p:cNvPr>
+          <p:cNvPr id="4" name="Image 0" descr="Fizik kattalik, birlamchi oʻzgartirgich, ikkilamchi oʻzgartirgich, signalni konditsiyalash, ADC va mikrokontroller ketma-ket zanjiri"/>
           <p:cNvPicPr>
             <a:picLocks noChangeAspect="1"/>
           </p:cNvPicPr>
           <p:nvPr/>
         </p:nvPicPr>
         <p:blipFill>
-          <a:blip r:embed="rId1"/>
-          <a:srcRect l="0" r="0" t="0" b="0"/>
+          <a:blip r:embed="rId3"/>
+          <a:srcRect/>
           <a:stretch/>
         </p:blipFill>
         <p:spPr>
@@ -10926,7 +11072,7 @@
           </a:bodyPr>
           <a:lstStyle/>
           <a:p>
-            <a:pPr algn="l" indent="0" marL="0">
+            <a:pPr marL="0" indent="0" algn="l">
               <a:lnSpc>
                 <a:spcPts val="2240"/>
               </a:lnSpc>
@@ -10970,7 +11116,7 @@
           </a:bodyPr>
           <a:lstStyle/>
           <a:p>
-            <a:pPr algn="l" indent="0" marL="0">
+            <a:pPr marL="0" indent="0" algn="l">
               <a:lnSpc>
                 <a:spcPts val="1680"/>
               </a:lnSpc>
@@ -11007,6 +11153,7 @@
         <a:solidFill>
           <a:srgbClr val="F5F3EE"/>
         </a:solidFill>
+        <a:effectLst/>
       </p:bgPr>
     </p:bg>
     <p:spTree>
@@ -11046,14 +11193,14 @@
           </a:bodyPr>
           <a:lstStyle/>
           <a:p>
-            <a:pPr algn="l" indent="0" marL="0">
+            <a:pPr marL="0" indent="0" algn="l">
               <a:lnSpc>
                 <a:spcPts val="1680"/>
               </a:lnSpc>
               <a:buNone/>
             </a:pPr>
             <a:r>
-              <a:rPr lang="en-US" sz="1200" b="1" spc="100" kern="0" dirty="0">
+              <a:rPr lang="en-US" sz="1200" b="1" kern="0" spc="100" dirty="0">
                 <a:solidFill>
                   <a:srgbClr val="B5521A"/>
                 </a:solidFill>
@@ -11070,7 +11217,9 @@
       <p:sp>
         <p:nvSpPr>
           <p:cNvPr id="3" name="Text 1"/>
-          <p:cNvSpPr/>
+          <p:cNvSpPr>
+            <a:spLocks noGrp="1"/>
+          </p:cNvSpPr>
           <p:nvPr>
             <p:ph type="title"/>
           </p:nvPr>
@@ -11092,7 +11241,7 @@
           </a:bodyPr>
           <a:lstStyle/>
           <a:p>
-            <a:pPr algn="l" indent="0" marL="0">
+            <a:pPr marL="0" indent="0" algn="l">
               <a:lnSpc>
                 <a:spcPts val="3520"/>
               </a:lnSpc>
@@ -11108,6 +11257,1744 @@
                 <a:cs typeface="Noto Sans" pitchFamily="34" charset="-120"/>
               </a:rPr>
               <a:t>Optik datchiklarning turlari</a:t>
+            </a:r>
+            <a:endParaRPr lang="en-US" sz="3200" dirty="0"/>
+          </a:p>
+        </p:txBody>
+      </p:sp>
+      <p:graphicFrame>
+        <p:nvGraphicFramePr>
+          <p:cNvPr id="4" name="Table 0"/>
+          <p:cNvGraphicFramePr>
+            <a:graphicFrameLocks noGrp="1"/>
+          </p:cNvGraphicFramePr>
+          <p:nvPr>
+            <p:extLst>
+              <p:ext uri="{D42A27DB-BD31-4B8C-83A1-F6EECF244321}">
+                <p14:modId xmlns:p14="http://schemas.microsoft.com/office/powerpoint/2010/main" val="1579011935"/>
+              </p:ext>
+            </p:extLst>
+          </p:nvPr>
+        </p:nvGraphicFramePr>
+        <p:xfrm>
+          <a:off x="822960" y="1813560"/>
+          <a:ext cx="10556241" cy="2945765"/>
+        </p:xfrm>
+        <a:graphic>
+          <a:graphicData uri="http://schemas.openxmlformats.org/drawingml/2006/table">
+            <a:tbl>
+              <a:tblPr/>
+              <a:tblGrid>
+                <a:gridCol w="3518747">
+                  <a:extLst>
+                    <a:ext uri="{9D8B030D-6E8A-4147-A177-3AD203B41FA5}">
+                      <a16:colId xmlns:a16="http://schemas.microsoft.com/office/drawing/2014/main" val="20000"/>
+                    </a:ext>
+                  </a:extLst>
+                </a:gridCol>
+                <a:gridCol w="3518747">
+                  <a:extLst>
+                    <a:ext uri="{9D8B030D-6E8A-4147-A177-3AD203B41FA5}">
+                      <a16:colId xmlns:a16="http://schemas.microsoft.com/office/drawing/2014/main" val="20001"/>
+                    </a:ext>
+                  </a:extLst>
+                </a:gridCol>
+                <a:gridCol w="3518747">
+                  <a:extLst>
+                    <a:ext uri="{9D8B030D-6E8A-4147-A177-3AD203B41FA5}">
+                      <a16:colId xmlns:a16="http://schemas.microsoft.com/office/drawing/2014/main" val="20002"/>
+                    </a:ext>
+                  </a:extLst>
+                </a:gridCol>
+              </a:tblGrid>
+              <a:tr h="410845">
+                <a:tc>
+                  <a:txBody>
+                    <a:bodyPr/>
+                    <a:lstStyle/>
+                    <a:p>
+                      <a:pPr marL="0" indent="0">
+                        <a:lnSpc>
+                          <a:spcPts val="1820"/>
+                        </a:lnSpc>
+                        <a:buNone/>
+                      </a:pPr>
+                      <a:r>
+                        <a:rPr lang="en-US" sz="1300" b="1" dirty="0">
+                          <a:solidFill>
+                            <a:srgbClr val="F5F3EE"/>
+                          </a:solidFill>
+                          <a:latin typeface="Noto Sans" pitchFamily="34" charset="0"/>
+                          <a:ea typeface="Noto Sans" pitchFamily="34" charset="-122"/>
+                          <a:cs typeface="Noto Sans" pitchFamily="34" charset="-120"/>
+                        </a:rPr>
+                        <a:t>Datchik</a:t>
+                      </a:r>
+                      <a:endParaRPr lang="en-US" sz="1300" dirty="0">
+                        <a:latin typeface="Noto Sans" charset="0"/>
+                        <a:ea typeface="Noto Sans" charset="0"/>
+                        <a:cs typeface="Noto Sans" charset="0"/>
+                      </a:endParaRPr>
+                    </a:p>
+                  </a:txBody>
+                  <a:tcPr marL="127000" marR="127000" marT="88900" marB="88900">
+                    <a:lnL w="12700" cap="flat" cmpd="sng" algn="ctr">
+                      <a:solidFill>
+                        <a:srgbClr val="C4C2BE"/>
+                      </a:solidFill>
+                      <a:prstDash val="solid"/>
+                      <a:round/>
+                      <a:headEnd type="none" w="med" len="med"/>
+                      <a:tailEnd type="none" w="med" len="med"/>
+                    </a:lnL>
+                    <a:lnR w="12700" cap="flat" cmpd="sng" algn="ctr">
+                      <a:solidFill>
+                        <a:srgbClr val="162032"/>
+                      </a:solidFill>
+                      <a:prstDash val="solid"/>
+                      <a:round/>
+                      <a:headEnd type="none" w="med" len="med"/>
+                      <a:tailEnd type="none" w="med" len="med"/>
+                    </a:lnR>
+                    <a:lnT w="12700" cap="flat" cmpd="sng" algn="ctr">
+                      <a:solidFill>
+                        <a:srgbClr val="C4C2BE"/>
+                      </a:solidFill>
+                      <a:prstDash val="solid"/>
+                      <a:round/>
+                      <a:headEnd type="none" w="med" len="med"/>
+                      <a:tailEnd type="none" w="med" len="med"/>
+                    </a:lnT>
+                    <a:lnB w="12700" cap="flat" cmpd="sng" algn="ctr">
+                      <a:solidFill>
+                        <a:srgbClr val="162032"/>
+                      </a:solidFill>
+                      <a:prstDash val="solid"/>
+                      <a:round/>
+                      <a:headEnd type="none" w="med" len="med"/>
+                      <a:tailEnd type="none" w="med" len="med"/>
+                    </a:lnB>
+                    <a:solidFill>
+                      <a:srgbClr val="16233B"/>
+                    </a:solidFill>
+                  </a:tcPr>
+                </a:tc>
+                <a:tc>
+                  <a:txBody>
+                    <a:bodyPr/>
+                    <a:lstStyle/>
+                    <a:p>
+                      <a:pPr marL="0" indent="0">
+                        <a:lnSpc>
+                          <a:spcPts val="1820"/>
+                        </a:lnSpc>
+                        <a:buNone/>
+                      </a:pPr>
+                      <a:r>
+                        <a:rPr lang="en-US" sz="1300" b="1" dirty="0">
+                          <a:solidFill>
+                            <a:srgbClr val="F5F3EE"/>
+                          </a:solidFill>
+                          <a:latin typeface="Noto Sans" pitchFamily="34" charset="0"/>
+                          <a:ea typeface="Noto Sans" pitchFamily="34" charset="-122"/>
+                          <a:cs typeface="Noto Sans" pitchFamily="34" charset="-120"/>
+                        </a:rPr>
+                        <a:t>Fizik tamoyil</a:t>
+                      </a:r>
+                      <a:endParaRPr lang="en-US" sz="1300" dirty="0">
+                        <a:latin typeface="Noto Sans" charset="0"/>
+                        <a:ea typeface="Noto Sans" charset="0"/>
+                        <a:cs typeface="Noto Sans" charset="0"/>
+                      </a:endParaRPr>
+                    </a:p>
+                  </a:txBody>
+                  <a:tcPr marL="127000" marR="127000" marT="88900" marB="88900">
+                    <a:lnL w="12700" cap="flat" cmpd="sng" algn="ctr">
+                      <a:solidFill>
+                        <a:srgbClr val="162032"/>
+                      </a:solidFill>
+                      <a:prstDash val="solid"/>
+                      <a:round/>
+                      <a:headEnd type="none" w="med" len="med"/>
+                      <a:tailEnd type="none" w="med" len="med"/>
+                    </a:lnL>
+                    <a:lnR w="12700" cap="flat" cmpd="sng" algn="ctr">
+                      <a:solidFill>
+                        <a:srgbClr val="162032"/>
+                      </a:solidFill>
+                      <a:prstDash val="solid"/>
+                      <a:round/>
+                      <a:headEnd type="none" w="med" len="med"/>
+                      <a:tailEnd type="none" w="med" len="med"/>
+                    </a:lnR>
+                    <a:lnT w="12700" cap="flat" cmpd="sng" algn="ctr">
+                      <a:solidFill>
+                        <a:srgbClr val="C4C2BE"/>
+                      </a:solidFill>
+                      <a:prstDash val="solid"/>
+                      <a:round/>
+                      <a:headEnd type="none" w="med" len="med"/>
+                      <a:tailEnd type="none" w="med" len="med"/>
+                    </a:lnT>
+                    <a:lnB w="12700" cap="flat" cmpd="sng" algn="ctr">
+                      <a:solidFill>
+                        <a:srgbClr val="162032"/>
+                      </a:solidFill>
+                      <a:prstDash val="solid"/>
+                      <a:round/>
+                      <a:headEnd type="none" w="med" len="med"/>
+                      <a:tailEnd type="none" w="med" len="med"/>
+                    </a:lnB>
+                    <a:solidFill>
+                      <a:srgbClr val="16233B"/>
+                    </a:solidFill>
+                  </a:tcPr>
+                </a:tc>
+                <a:tc>
+                  <a:txBody>
+                    <a:bodyPr/>
+                    <a:lstStyle/>
+                    <a:p>
+                      <a:pPr marL="0" indent="0">
+                        <a:lnSpc>
+                          <a:spcPts val="1820"/>
+                        </a:lnSpc>
+                        <a:buNone/>
+                      </a:pPr>
+                      <a:r>
+                        <a:rPr lang="en-US" sz="1300" b="1" dirty="0">
+                          <a:solidFill>
+                            <a:srgbClr val="F5F3EE"/>
+                          </a:solidFill>
+                          <a:latin typeface="Noto Sans" pitchFamily="34" charset="0"/>
+                          <a:ea typeface="Noto Sans" pitchFamily="34" charset="-122"/>
+                          <a:cs typeface="Noto Sans" pitchFamily="34" charset="-120"/>
+                        </a:rPr>
+                        <a:t>Xususiyati va qoʻllanilishi</a:t>
+                      </a:r>
+                      <a:endParaRPr lang="en-US" sz="1300" dirty="0">
+                        <a:latin typeface="Noto Sans" charset="0"/>
+                        <a:ea typeface="Noto Sans" charset="0"/>
+                        <a:cs typeface="Noto Sans" charset="0"/>
+                      </a:endParaRPr>
+                    </a:p>
+                  </a:txBody>
+                  <a:tcPr marL="127000" marR="127000" marT="88900" marB="88900">
+                    <a:lnL w="12700" cap="flat" cmpd="sng" algn="ctr">
+                      <a:solidFill>
+                        <a:srgbClr val="162032"/>
+                      </a:solidFill>
+                      <a:prstDash val="solid"/>
+                      <a:round/>
+                      <a:headEnd type="none" w="med" len="med"/>
+                      <a:tailEnd type="none" w="med" len="med"/>
+                    </a:lnL>
+                    <a:lnR w="12700" cap="flat" cmpd="sng" algn="ctr">
+                      <a:solidFill>
+                        <a:srgbClr val="162032"/>
+                      </a:solidFill>
+                      <a:prstDash val="solid"/>
+                      <a:round/>
+                      <a:headEnd type="none" w="med" len="med"/>
+                      <a:tailEnd type="none" w="med" len="med"/>
+                    </a:lnR>
+                    <a:lnT w="12700" cap="flat" cmpd="sng" algn="ctr">
+                      <a:solidFill>
+                        <a:srgbClr val="C4C2BE"/>
+                      </a:solidFill>
+                      <a:prstDash val="solid"/>
+                      <a:round/>
+                      <a:headEnd type="none" w="med" len="med"/>
+                      <a:tailEnd type="none" w="med" len="med"/>
+                    </a:lnT>
+                    <a:lnB w="12700" cap="flat" cmpd="sng" algn="ctr">
+                      <a:solidFill>
+                        <a:srgbClr val="162032"/>
+                      </a:solidFill>
+                      <a:prstDash val="solid"/>
+                      <a:round/>
+                      <a:headEnd type="none" w="med" len="med"/>
+                      <a:tailEnd type="none" w="med" len="med"/>
+                    </a:lnB>
+                    <a:solidFill>
+                      <a:srgbClr val="16233B"/>
+                    </a:solidFill>
+                  </a:tcPr>
+                </a:tc>
+                <a:extLst>
+                  <a:ext uri="{0D108BD9-81ED-4DB2-BD59-A6C34878D82A}">
+                    <a16:rowId xmlns:a16="http://schemas.microsoft.com/office/drawing/2014/main" val="10000"/>
+                  </a:ext>
+                </a:extLst>
+              </a:tr>
+              <a:tr h="633730">
+                <a:tc>
+                  <a:txBody>
+                    <a:bodyPr/>
+                    <a:lstStyle/>
+                    <a:p>
+                      <a:pPr marL="0" indent="0">
+                        <a:lnSpc>
+                          <a:spcPts val="1820"/>
+                        </a:lnSpc>
+                        <a:buNone/>
+                      </a:pPr>
+                      <a:r>
+                        <a:rPr lang="en-US" sz="1300" dirty="0">
+                          <a:solidFill>
+                            <a:srgbClr val="1D2433"/>
+                          </a:solidFill>
+                          <a:latin typeface="Noto Sans" pitchFamily="34" charset="0"/>
+                          <a:ea typeface="Noto Sans" pitchFamily="34" charset="-122"/>
+                          <a:cs typeface="Noto Sans" pitchFamily="34" charset="-120"/>
+                        </a:rPr>
+                        <a:t>Fotorezistor (LDR)</a:t>
+                      </a:r>
+                      <a:endParaRPr lang="en-US" sz="1300" dirty="0">
+                        <a:latin typeface="Noto Sans" charset="0"/>
+                        <a:ea typeface="Noto Sans" charset="0"/>
+                        <a:cs typeface="Noto Sans" charset="0"/>
+                      </a:endParaRPr>
+                    </a:p>
+                  </a:txBody>
+                  <a:tcPr marL="127000" marR="127000" marT="88900" marB="88900">
+                    <a:lnL w="12700" cap="flat" cmpd="sng" algn="ctr">
+                      <a:solidFill>
+                        <a:srgbClr val="C4C2BE"/>
+                      </a:solidFill>
+                      <a:prstDash val="solid"/>
+                      <a:round/>
+                      <a:headEnd type="none" w="med" len="med"/>
+                      <a:tailEnd type="none" w="med" len="med"/>
+                    </a:lnL>
+                    <a:lnR w="12700" cap="flat" cmpd="sng" algn="ctr">
+                      <a:solidFill>
+                        <a:srgbClr val="C4C2BE"/>
+                      </a:solidFill>
+                      <a:prstDash val="solid"/>
+                      <a:round/>
+                      <a:headEnd type="none" w="med" len="med"/>
+                      <a:tailEnd type="none" w="med" len="med"/>
+                    </a:lnR>
+                    <a:lnT w="12700" cap="flat" cmpd="sng" algn="ctr">
+                      <a:solidFill>
+                        <a:srgbClr val="162032"/>
+                      </a:solidFill>
+                      <a:prstDash val="solid"/>
+                      <a:round/>
+                      <a:headEnd type="none" w="med" len="med"/>
+                      <a:tailEnd type="none" w="med" len="med"/>
+                    </a:lnT>
+                    <a:lnB w="12700" cap="flat" cmpd="sng" algn="ctr">
+                      <a:solidFill>
+                        <a:srgbClr val="C4C2BE"/>
+                      </a:solidFill>
+                      <a:prstDash val="solid"/>
+                      <a:round/>
+                      <a:headEnd type="none" w="med" len="med"/>
+                      <a:tailEnd type="none" w="med" len="med"/>
+                    </a:lnB>
+                  </a:tcPr>
+                </a:tc>
+                <a:tc>
+                  <a:txBody>
+                    <a:bodyPr/>
+                    <a:lstStyle/>
+                    <a:p>
+                      <a:pPr marL="0" indent="0">
+                        <a:lnSpc>
+                          <a:spcPts val="1820"/>
+                        </a:lnSpc>
+                        <a:buNone/>
+                      </a:pPr>
+                      <a:r>
+                        <a:rPr lang="en-US" sz="1300" dirty="0">
+                          <a:solidFill>
+                            <a:srgbClr val="1D2433"/>
+                          </a:solidFill>
+                          <a:latin typeface="Noto Sans" pitchFamily="34" charset="0"/>
+                          <a:ea typeface="Noto Sans" pitchFamily="34" charset="-122"/>
+                          <a:cs typeface="Noto Sans" pitchFamily="34" charset="-120"/>
+                        </a:rPr>
+                        <a:t>Ichki fotoeffekt: yorugʻlikda qarshilik keskin kamayadi</a:t>
+                      </a:r>
+                      <a:endParaRPr lang="en-US" sz="1300" dirty="0">
+                        <a:latin typeface="Noto Sans" charset="0"/>
+                        <a:ea typeface="Noto Sans" charset="0"/>
+                        <a:cs typeface="Noto Sans" charset="0"/>
+                      </a:endParaRPr>
+                    </a:p>
+                  </a:txBody>
+                  <a:tcPr marL="127000" marR="127000" marT="88900" marB="88900">
+                    <a:lnL w="12700" cap="flat" cmpd="sng" algn="ctr">
+                      <a:solidFill>
+                        <a:srgbClr val="C4C2BE"/>
+                      </a:solidFill>
+                      <a:prstDash val="solid"/>
+                      <a:round/>
+                      <a:headEnd type="none" w="med" len="med"/>
+                      <a:tailEnd type="none" w="med" len="med"/>
+                    </a:lnL>
+                    <a:lnR w="12700" cap="flat" cmpd="sng" algn="ctr">
+                      <a:solidFill>
+                        <a:srgbClr val="C4C2BE"/>
+                      </a:solidFill>
+                      <a:prstDash val="solid"/>
+                      <a:round/>
+                      <a:headEnd type="none" w="med" len="med"/>
+                      <a:tailEnd type="none" w="med" len="med"/>
+                    </a:lnR>
+                    <a:lnT w="12700" cap="flat" cmpd="sng" algn="ctr">
+                      <a:solidFill>
+                        <a:srgbClr val="162032"/>
+                      </a:solidFill>
+                      <a:prstDash val="solid"/>
+                      <a:round/>
+                      <a:headEnd type="none" w="med" len="med"/>
+                      <a:tailEnd type="none" w="med" len="med"/>
+                    </a:lnT>
+                    <a:lnB w="12700" cap="flat" cmpd="sng" algn="ctr">
+                      <a:solidFill>
+                        <a:srgbClr val="C4C2BE"/>
+                      </a:solidFill>
+                      <a:prstDash val="solid"/>
+                      <a:round/>
+                      <a:headEnd type="none" w="med" len="med"/>
+                      <a:tailEnd type="none" w="med" len="med"/>
+                    </a:lnB>
+                  </a:tcPr>
+                </a:tc>
+                <a:tc>
+                  <a:txBody>
+                    <a:bodyPr/>
+                    <a:lstStyle/>
+                    <a:p>
+                      <a:pPr marL="0" indent="0">
+                        <a:lnSpc>
+                          <a:spcPts val="1820"/>
+                        </a:lnSpc>
+                        <a:buNone/>
+                      </a:pPr>
+                      <a:r>
+                        <a:rPr lang="en-US" sz="1300" dirty="0">
+                          <a:solidFill>
+                            <a:srgbClr val="1D2433"/>
+                          </a:solidFill>
+                          <a:latin typeface="Noto Sans" pitchFamily="34" charset="0"/>
+                          <a:ea typeface="Noto Sans" pitchFamily="34" charset="-122"/>
+                          <a:cs typeface="Noto Sans" pitchFamily="34" charset="-120"/>
+                        </a:rPr>
+                        <a:t>Nochiziqli, sezgir, inersion (10…100 ms); yorugʻlik kalitlari</a:t>
+                      </a:r>
+                      <a:endParaRPr lang="en-US" sz="1300" dirty="0">
+                        <a:latin typeface="Noto Sans" charset="0"/>
+                        <a:ea typeface="Noto Sans" charset="0"/>
+                        <a:cs typeface="Noto Sans" charset="0"/>
+                      </a:endParaRPr>
+                    </a:p>
+                  </a:txBody>
+                  <a:tcPr marL="127000" marR="127000" marT="88900" marB="88900">
+                    <a:lnL w="12700" cap="flat" cmpd="sng" algn="ctr">
+                      <a:solidFill>
+                        <a:srgbClr val="C4C2BE"/>
+                      </a:solidFill>
+                      <a:prstDash val="solid"/>
+                      <a:round/>
+                      <a:headEnd type="none" w="med" len="med"/>
+                      <a:tailEnd type="none" w="med" len="med"/>
+                    </a:lnL>
+                    <a:lnR w="12700" cap="flat" cmpd="sng" algn="ctr">
+                      <a:solidFill>
+                        <a:srgbClr val="C4C2BE"/>
+                      </a:solidFill>
+                      <a:prstDash val="solid"/>
+                      <a:round/>
+                      <a:headEnd type="none" w="med" len="med"/>
+                      <a:tailEnd type="none" w="med" len="med"/>
+                    </a:lnR>
+                    <a:lnT w="12700" cap="flat" cmpd="sng" algn="ctr">
+                      <a:solidFill>
+                        <a:srgbClr val="162032"/>
+                      </a:solidFill>
+                      <a:prstDash val="solid"/>
+                      <a:round/>
+                      <a:headEnd type="none" w="med" len="med"/>
+                      <a:tailEnd type="none" w="med" len="med"/>
+                    </a:lnT>
+                    <a:lnB w="12700" cap="flat" cmpd="sng" algn="ctr">
+                      <a:solidFill>
+                        <a:srgbClr val="C4C2BE"/>
+                      </a:solidFill>
+                      <a:prstDash val="solid"/>
+                      <a:round/>
+                      <a:headEnd type="none" w="med" len="med"/>
+                      <a:tailEnd type="none" w="med" len="med"/>
+                    </a:lnB>
+                  </a:tcPr>
+                </a:tc>
+                <a:extLst>
+                  <a:ext uri="{0D108BD9-81ED-4DB2-BD59-A6C34878D82A}">
+                    <a16:rowId xmlns:a16="http://schemas.microsoft.com/office/drawing/2014/main" val="10001"/>
+                  </a:ext>
+                </a:extLst>
+              </a:tr>
+              <a:tr h="633730">
+                <a:tc>
+                  <a:txBody>
+                    <a:bodyPr/>
+                    <a:lstStyle/>
+                    <a:p>
+                      <a:pPr marL="0" indent="0">
+                        <a:lnSpc>
+                          <a:spcPts val="1820"/>
+                        </a:lnSpc>
+                        <a:buNone/>
+                      </a:pPr>
+                      <a:r>
+                        <a:rPr lang="en-US" sz="1300" dirty="0">
+                          <a:solidFill>
+                            <a:srgbClr val="1D2433"/>
+                          </a:solidFill>
+                          <a:latin typeface="Noto Sans" pitchFamily="34" charset="0"/>
+                          <a:ea typeface="Noto Sans" pitchFamily="34" charset="-122"/>
+                          <a:cs typeface="Noto Sans" pitchFamily="34" charset="-120"/>
+                        </a:rPr>
+                        <a:t>Fotodiod</a:t>
+                      </a:r>
+                      <a:endParaRPr lang="en-US" sz="1300" dirty="0">
+                        <a:latin typeface="Noto Sans" charset="0"/>
+                        <a:ea typeface="Noto Sans" charset="0"/>
+                        <a:cs typeface="Noto Sans" charset="0"/>
+                      </a:endParaRPr>
+                    </a:p>
+                  </a:txBody>
+                  <a:tcPr marL="127000" marR="127000" marT="88900" marB="88900">
+                    <a:lnL w="12700" cap="flat" cmpd="sng" algn="ctr">
+                      <a:solidFill>
+                        <a:srgbClr val="C4C2BE"/>
+                      </a:solidFill>
+                      <a:prstDash val="solid"/>
+                      <a:round/>
+                      <a:headEnd type="none" w="med" len="med"/>
+                      <a:tailEnd type="none" w="med" len="med"/>
+                    </a:lnL>
+                    <a:lnR w="12700" cap="flat" cmpd="sng" algn="ctr">
+                      <a:solidFill>
+                        <a:srgbClr val="C4C2BE"/>
+                      </a:solidFill>
+                      <a:prstDash val="solid"/>
+                      <a:round/>
+                      <a:headEnd type="none" w="med" len="med"/>
+                      <a:tailEnd type="none" w="med" len="med"/>
+                    </a:lnR>
+                    <a:lnT w="12700" cap="flat" cmpd="sng" algn="ctr">
+                      <a:solidFill>
+                        <a:srgbClr val="C4C2BE"/>
+                      </a:solidFill>
+                      <a:prstDash val="solid"/>
+                      <a:round/>
+                      <a:headEnd type="none" w="med" len="med"/>
+                      <a:tailEnd type="none" w="med" len="med"/>
+                    </a:lnT>
+                    <a:lnB w="12700" cap="flat" cmpd="sng" algn="ctr">
+                      <a:solidFill>
+                        <a:srgbClr val="C4C2BE"/>
+                      </a:solidFill>
+                      <a:prstDash val="solid"/>
+                      <a:round/>
+                      <a:headEnd type="none" w="med" len="med"/>
+                      <a:tailEnd type="none" w="med" len="med"/>
+                    </a:lnB>
+                  </a:tcPr>
+                </a:tc>
+                <a:tc>
+                  <a:txBody>
+                    <a:bodyPr/>
+                    <a:lstStyle/>
+                    <a:p>
+                      <a:pPr marL="0" indent="0">
+                        <a:lnSpc>
+                          <a:spcPts val="1820"/>
+                        </a:lnSpc>
+                        <a:buNone/>
+                      </a:pPr>
+                      <a:r>
+                        <a:rPr lang="en-US" sz="1300" dirty="0">
+                          <a:solidFill>
+                            <a:srgbClr val="1D2433"/>
+                          </a:solidFill>
+                          <a:latin typeface="Noto Sans" pitchFamily="34" charset="0"/>
+                          <a:ea typeface="Noto Sans" pitchFamily="34" charset="-122"/>
+                          <a:cs typeface="Noto Sans" pitchFamily="34" charset="-120"/>
+                        </a:rPr>
+                        <a:t>Teskari siljitilgan p-n oʻtishda fototok hosil boʻladi</a:t>
+                      </a:r>
+                      <a:endParaRPr lang="en-US" sz="1300" dirty="0">
+                        <a:latin typeface="Noto Sans" charset="0"/>
+                        <a:ea typeface="Noto Sans" charset="0"/>
+                        <a:cs typeface="Noto Sans" charset="0"/>
+                      </a:endParaRPr>
+                    </a:p>
+                  </a:txBody>
+                  <a:tcPr marL="127000" marR="127000" marT="88900" marB="88900">
+                    <a:lnL w="12700" cap="flat" cmpd="sng" algn="ctr">
+                      <a:solidFill>
+                        <a:srgbClr val="C4C2BE"/>
+                      </a:solidFill>
+                      <a:prstDash val="solid"/>
+                      <a:round/>
+                      <a:headEnd type="none" w="med" len="med"/>
+                      <a:tailEnd type="none" w="med" len="med"/>
+                    </a:lnL>
+                    <a:lnR w="12700" cap="flat" cmpd="sng" algn="ctr">
+                      <a:solidFill>
+                        <a:srgbClr val="C4C2BE"/>
+                      </a:solidFill>
+                      <a:prstDash val="solid"/>
+                      <a:round/>
+                      <a:headEnd type="none" w="med" len="med"/>
+                      <a:tailEnd type="none" w="med" len="med"/>
+                    </a:lnR>
+                    <a:lnT w="12700" cap="flat" cmpd="sng" algn="ctr">
+                      <a:solidFill>
+                        <a:srgbClr val="C4C2BE"/>
+                      </a:solidFill>
+                      <a:prstDash val="solid"/>
+                      <a:round/>
+                      <a:headEnd type="none" w="med" len="med"/>
+                      <a:tailEnd type="none" w="med" len="med"/>
+                    </a:lnT>
+                    <a:lnB w="12700" cap="flat" cmpd="sng" algn="ctr">
+                      <a:solidFill>
+                        <a:srgbClr val="C4C2BE"/>
+                      </a:solidFill>
+                      <a:prstDash val="solid"/>
+                      <a:round/>
+                      <a:headEnd type="none" w="med" len="med"/>
+                      <a:tailEnd type="none" w="med" len="med"/>
+                    </a:lnB>
+                  </a:tcPr>
+                </a:tc>
+                <a:tc>
+                  <a:txBody>
+                    <a:bodyPr/>
+                    <a:lstStyle/>
+                    <a:p>
+                      <a:pPr marL="0" indent="0">
+                        <a:lnSpc>
+                          <a:spcPts val="1820"/>
+                        </a:lnSpc>
+                        <a:buNone/>
+                      </a:pPr>
+                      <a:r>
+                        <a:rPr lang="en-US" sz="1300" dirty="0">
+                          <a:solidFill>
+                            <a:srgbClr val="1D2433"/>
+                          </a:solidFill>
+                          <a:latin typeface="Noto Sans" pitchFamily="34" charset="0"/>
+                          <a:ea typeface="Noto Sans" pitchFamily="34" charset="-122"/>
+                          <a:cs typeface="Noto Sans" pitchFamily="34" charset="-120"/>
+                        </a:rPr>
+                        <a:t>Juda tez (ns), chiziqli; enkoderlar, optik tola aloqasi</a:t>
+                      </a:r>
+                      <a:endParaRPr lang="en-US" sz="1300" dirty="0">
+                        <a:latin typeface="Noto Sans" charset="0"/>
+                        <a:ea typeface="Noto Sans" charset="0"/>
+                        <a:cs typeface="Noto Sans" charset="0"/>
+                      </a:endParaRPr>
+                    </a:p>
+                  </a:txBody>
+                  <a:tcPr marL="127000" marR="127000" marT="88900" marB="88900">
+                    <a:lnL w="12700" cap="flat" cmpd="sng" algn="ctr">
+                      <a:solidFill>
+                        <a:srgbClr val="C4C2BE"/>
+                      </a:solidFill>
+                      <a:prstDash val="solid"/>
+                      <a:round/>
+                      <a:headEnd type="none" w="med" len="med"/>
+                      <a:tailEnd type="none" w="med" len="med"/>
+                    </a:lnL>
+                    <a:lnR w="12700" cap="flat" cmpd="sng" algn="ctr">
+                      <a:solidFill>
+                        <a:srgbClr val="C4C2BE"/>
+                      </a:solidFill>
+                      <a:prstDash val="solid"/>
+                      <a:round/>
+                      <a:headEnd type="none" w="med" len="med"/>
+                      <a:tailEnd type="none" w="med" len="med"/>
+                    </a:lnR>
+                    <a:lnT w="12700" cap="flat" cmpd="sng" algn="ctr">
+                      <a:solidFill>
+                        <a:srgbClr val="C4C2BE"/>
+                      </a:solidFill>
+                      <a:prstDash val="solid"/>
+                      <a:round/>
+                      <a:headEnd type="none" w="med" len="med"/>
+                      <a:tailEnd type="none" w="med" len="med"/>
+                    </a:lnT>
+                    <a:lnB w="12700" cap="flat" cmpd="sng" algn="ctr">
+                      <a:solidFill>
+                        <a:srgbClr val="C4C2BE"/>
+                      </a:solidFill>
+                      <a:prstDash val="solid"/>
+                      <a:round/>
+                      <a:headEnd type="none" w="med" len="med"/>
+                      <a:tailEnd type="none" w="med" len="med"/>
+                    </a:lnB>
+                  </a:tcPr>
+                </a:tc>
+                <a:extLst>
+                  <a:ext uri="{0D108BD9-81ED-4DB2-BD59-A6C34878D82A}">
+                    <a16:rowId xmlns:a16="http://schemas.microsoft.com/office/drawing/2014/main" val="10002"/>
+                  </a:ext>
+                </a:extLst>
+              </a:tr>
+              <a:tr h="633730">
+                <a:tc>
+                  <a:txBody>
+                    <a:bodyPr/>
+                    <a:lstStyle/>
+                    <a:p>
+                      <a:pPr marL="0" indent="0">
+                        <a:lnSpc>
+                          <a:spcPts val="1820"/>
+                        </a:lnSpc>
+                        <a:buNone/>
+                      </a:pPr>
+                      <a:r>
+                        <a:rPr lang="en-US" sz="1300" dirty="0">
+                          <a:solidFill>
+                            <a:srgbClr val="1D2433"/>
+                          </a:solidFill>
+                          <a:latin typeface="Noto Sans" pitchFamily="34" charset="0"/>
+                          <a:ea typeface="Noto Sans" pitchFamily="34" charset="-122"/>
+                          <a:cs typeface="Noto Sans" pitchFamily="34" charset="-120"/>
+                        </a:rPr>
+                        <a:t>Fototranzistor</a:t>
+                      </a:r>
+                      <a:endParaRPr lang="en-US" sz="1300" dirty="0">
+                        <a:latin typeface="Noto Sans" charset="0"/>
+                        <a:ea typeface="Noto Sans" charset="0"/>
+                        <a:cs typeface="Noto Sans" charset="0"/>
+                      </a:endParaRPr>
+                    </a:p>
+                  </a:txBody>
+                  <a:tcPr marL="127000" marR="127000" marT="88900" marB="88900">
+                    <a:lnL w="12700" cap="flat" cmpd="sng" algn="ctr">
+                      <a:solidFill>
+                        <a:srgbClr val="C4C2BE"/>
+                      </a:solidFill>
+                      <a:prstDash val="solid"/>
+                      <a:round/>
+                      <a:headEnd type="none" w="med" len="med"/>
+                      <a:tailEnd type="none" w="med" len="med"/>
+                    </a:lnL>
+                    <a:lnR w="12700" cap="flat" cmpd="sng" algn="ctr">
+                      <a:solidFill>
+                        <a:srgbClr val="C4C2BE"/>
+                      </a:solidFill>
+                      <a:prstDash val="solid"/>
+                      <a:round/>
+                      <a:headEnd type="none" w="med" len="med"/>
+                      <a:tailEnd type="none" w="med" len="med"/>
+                    </a:lnR>
+                    <a:lnT w="12700" cap="flat" cmpd="sng" algn="ctr">
+                      <a:solidFill>
+                        <a:srgbClr val="C4C2BE"/>
+                      </a:solidFill>
+                      <a:prstDash val="solid"/>
+                      <a:round/>
+                      <a:headEnd type="none" w="med" len="med"/>
+                      <a:tailEnd type="none" w="med" len="med"/>
+                    </a:lnT>
+                    <a:lnB w="12700" cap="flat" cmpd="sng" algn="ctr">
+                      <a:solidFill>
+                        <a:srgbClr val="C4C2BE"/>
+                      </a:solidFill>
+                      <a:prstDash val="solid"/>
+                      <a:round/>
+                      <a:headEnd type="none" w="med" len="med"/>
+                      <a:tailEnd type="none" w="med" len="med"/>
+                    </a:lnB>
+                  </a:tcPr>
+                </a:tc>
+                <a:tc>
+                  <a:txBody>
+                    <a:bodyPr/>
+                    <a:lstStyle/>
+                    <a:p>
+                      <a:pPr marL="0" indent="0">
+                        <a:lnSpc>
+                          <a:spcPts val="1820"/>
+                        </a:lnSpc>
+                        <a:buNone/>
+                      </a:pPr>
+                      <a:r>
+                        <a:rPr lang="en-US" sz="1300" dirty="0">
+                          <a:solidFill>
+                            <a:srgbClr val="1D2433"/>
+                          </a:solidFill>
+                          <a:latin typeface="Noto Sans" pitchFamily="34" charset="0"/>
+                          <a:ea typeface="Noto Sans" pitchFamily="34" charset="-122"/>
+                          <a:cs typeface="Noto Sans" pitchFamily="34" charset="-120"/>
+                        </a:rPr>
+                        <a:t>Fotodiod va tranzistor kuchaytirgichi birikmasi</a:t>
+                      </a:r>
+                      <a:endParaRPr lang="en-US" sz="1300" dirty="0">
+                        <a:latin typeface="Noto Sans" charset="0"/>
+                        <a:ea typeface="Noto Sans" charset="0"/>
+                        <a:cs typeface="Noto Sans" charset="0"/>
+                      </a:endParaRPr>
+                    </a:p>
+                  </a:txBody>
+                  <a:tcPr marL="127000" marR="127000" marT="88900" marB="88900">
+                    <a:lnL w="12700" cap="flat" cmpd="sng" algn="ctr">
+                      <a:solidFill>
+                        <a:srgbClr val="C4C2BE"/>
+                      </a:solidFill>
+                      <a:prstDash val="solid"/>
+                      <a:round/>
+                      <a:headEnd type="none" w="med" len="med"/>
+                      <a:tailEnd type="none" w="med" len="med"/>
+                    </a:lnL>
+                    <a:lnR w="12700" cap="flat" cmpd="sng" algn="ctr">
+                      <a:solidFill>
+                        <a:srgbClr val="C4C2BE"/>
+                      </a:solidFill>
+                      <a:prstDash val="solid"/>
+                      <a:round/>
+                      <a:headEnd type="none" w="med" len="med"/>
+                      <a:tailEnd type="none" w="med" len="med"/>
+                    </a:lnR>
+                    <a:lnT w="12700" cap="flat" cmpd="sng" algn="ctr">
+                      <a:solidFill>
+                        <a:srgbClr val="C4C2BE"/>
+                      </a:solidFill>
+                      <a:prstDash val="solid"/>
+                      <a:round/>
+                      <a:headEnd type="none" w="med" len="med"/>
+                      <a:tailEnd type="none" w="med" len="med"/>
+                    </a:lnT>
+                    <a:lnB w="12700" cap="flat" cmpd="sng" algn="ctr">
+                      <a:solidFill>
+                        <a:srgbClr val="C4C2BE"/>
+                      </a:solidFill>
+                      <a:prstDash val="solid"/>
+                      <a:round/>
+                      <a:headEnd type="none" w="med" len="med"/>
+                      <a:tailEnd type="none" w="med" len="med"/>
+                    </a:lnB>
+                  </a:tcPr>
+                </a:tc>
+                <a:tc>
+                  <a:txBody>
+                    <a:bodyPr/>
+                    <a:lstStyle/>
+                    <a:p>
+                      <a:pPr marL="0" indent="0">
+                        <a:lnSpc>
+                          <a:spcPts val="1820"/>
+                        </a:lnSpc>
+                        <a:buNone/>
+                      </a:pPr>
+                      <a:r>
+                        <a:rPr lang="en-US" sz="1300" dirty="0">
+                          <a:solidFill>
+                            <a:srgbClr val="1D2433"/>
+                          </a:solidFill>
+                          <a:latin typeface="Noto Sans" pitchFamily="34" charset="0"/>
+                          <a:ea typeface="Noto Sans" pitchFamily="34" charset="-122"/>
+                          <a:cs typeface="Noto Sans" pitchFamily="34" charset="-120"/>
+                        </a:rPr>
+                        <a:t>Fotodioddan 100…500 marta sezgirroq, sekinroq; optoparalar</a:t>
+                      </a:r>
+                      <a:endParaRPr lang="en-US" sz="1300" dirty="0">
+                        <a:latin typeface="Noto Sans" charset="0"/>
+                        <a:ea typeface="Noto Sans" charset="0"/>
+                        <a:cs typeface="Noto Sans" charset="0"/>
+                      </a:endParaRPr>
+                    </a:p>
+                  </a:txBody>
+                  <a:tcPr marL="127000" marR="127000" marT="88900" marB="88900">
+                    <a:lnL w="12700" cap="flat" cmpd="sng" algn="ctr">
+                      <a:solidFill>
+                        <a:srgbClr val="C4C2BE"/>
+                      </a:solidFill>
+                      <a:prstDash val="solid"/>
+                      <a:round/>
+                      <a:headEnd type="none" w="med" len="med"/>
+                      <a:tailEnd type="none" w="med" len="med"/>
+                    </a:lnL>
+                    <a:lnR w="12700" cap="flat" cmpd="sng" algn="ctr">
+                      <a:solidFill>
+                        <a:srgbClr val="C4C2BE"/>
+                      </a:solidFill>
+                      <a:prstDash val="solid"/>
+                      <a:round/>
+                      <a:headEnd type="none" w="med" len="med"/>
+                      <a:tailEnd type="none" w="med" len="med"/>
+                    </a:lnR>
+                    <a:lnT w="12700" cap="flat" cmpd="sng" algn="ctr">
+                      <a:solidFill>
+                        <a:srgbClr val="C4C2BE"/>
+                      </a:solidFill>
+                      <a:prstDash val="solid"/>
+                      <a:round/>
+                      <a:headEnd type="none" w="med" len="med"/>
+                      <a:tailEnd type="none" w="med" len="med"/>
+                    </a:lnT>
+                    <a:lnB w="12700" cap="flat" cmpd="sng" algn="ctr">
+                      <a:solidFill>
+                        <a:srgbClr val="C4C2BE"/>
+                      </a:solidFill>
+                      <a:prstDash val="solid"/>
+                      <a:round/>
+                      <a:headEnd type="none" w="med" len="med"/>
+                      <a:tailEnd type="none" w="med" len="med"/>
+                    </a:lnB>
+                  </a:tcPr>
+                </a:tc>
+                <a:extLst>
+                  <a:ext uri="{0D108BD9-81ED-4DB2-BD59-A6C34878D82A}">
+                    <a16:rowId xmlns:a16="http://schemas.microsoft.com/office/drawing/2014/main" val="10003"/>
+                  </a:ext>
+                </a:extLst>
+              </a:tr>
+              <a:tr h="633730">
+                <a:tc>
+                  <a:txBody>
+                    <a:bodyPr/>
+                    <a:lstStyle/>
+                    <a:p>
+                      <a:pPr marL="0" indent="0">
+                        <a:lnSpc>
+                          <a:spcPts val="1820"/>
+                        </a:lnSpc>
+                        <a:buNone/>
+                      </a:pPr>
+                      <a:r>
+                        <a:rPr lang="en-US" sz="1300" dirty="0">
+                          <a:solidFill>
+                            <a:srgbClr val="1D2433"/>
+                          </a:solidFill>
+                          <a:latin typeface="Noto Sans" pitchFamily="34" charset="0"/>
+                          <a:ea typeface="Noto Sans" pitchFamily="34" charset="-122"/>
+                          <a:cs typeface="Noto Sans" pitchFamily="34" charset="-120"/>
+                        </a:rPr>
+                        <a:t>Optik enkoder</a:t>
+                      </a:r>
+                      <a:endParaRPr lang="en-US" sz="1300" dirty="0">
+                        <a:latin typeface="Noto Sans" charset="0"/>
+                        <a:ea typeface="Noto Sans" charset="0"/>
+                        <a:cs typeface="Noto Sans" charset="0"/>
+                      </a:endParaRPr>
+                    </a:p>
+                  </a:txBody>
+                  <a:tcPr marL="127000" marR="127000" marT="88900" marB="88900">
+                    <a:lnL w="12700" cap="flat" cmpd="sng" algn="ctr">
+                      <a:solidFill>
+                        <a:srgbClr val="C4C2BE"/>
+                      </a:solidFill>
+                      <a:prstDash val="solid"/>
+                      <a:round/>
+                      <a:headEnd type="none" w="med" len="med"/>
+                      <a:tailEnd type="none" w="med" len="med"/>
+                    </a:lnL>
+                    <a:lnR w="12700" cap="flat" cmpd="sng" algn="ctr">
+                      <a:solidFill>
+                        <a:srgbClr val="C4C2BE"/>
+                      </a:solidFill>
+                      <a:prstDash val="solid"/>
+                      <a:round/>
+                      <a:headEnd type="none" w="med" len="med"/>
+                      <a:tailEnd type="none" w="med" len="med"/>
+                    </a:lnR>
+                    <a:lnT w="12700" cap="flat" cmpd="sng" algn="ctr">
+                      <a:solidFill>
+                        <a:srgbClr val="C4C2BE"/>
+                      </a:solidFill>
+                      <a:prstDash val="solid"/>
+                      <a:round/>
+                      <a:headEnd type="none" w="med" len="med"/>
+                      <a:tailEnd type="none" w="med" len="med"/>
+                    </a:lnT>
+                    <a:lnB w="12700" cap="flat" cmpd="sng" algn="ctr">
+                      <a:solidFill>
+                        <a:srgbClr val="C4C2BE"/>
+                      </a:solidFill>
+                      <a:prstDash val="solid"/>
+                      <a:round/>
+                      <a:headEnd type="none" w="med" len="med"/>
+                      <a:tailEnd type="none" w="med" len="med"/>
+                    </a:lnB>
+                  </a:tcPr>
+                </a:tc>
+                <a:tc>
+                  <a:txBody>
+                    <a:bodyPr/>
+                    <a:lstStyle/>
+                    <a:p>
+                      <a:pPr marL="0" indent="0">
+                        <a:lnSpc>
+                          <a:spcPts val="1820"/>
+                        </a:lnSpc>
+                        <a:buNone/>
+                      </a:pPr>
+                      <a:r>
+                        <a:rPr lang="en-US" sz="1300" dirty="0">
+                          <a:solidFill>
+                            <a:srgbClr val="1D2433"/>
+                          </a:solidFill>
+                          <a:latin typeface="Noto Sans" pitchFamily="34" charset="0"/>
+                          <a:ea typeface="Noto Sans" pitchFamily="34" charset="-122"/>
+                          <a:cs typeface="Noto Sans" pitchFamily="34" charset="-120"/>
+                        </a:rPr>
+                        <a:t>Disk tirqishlari orqali oʻtgan nurni sanash</a:t>
+                      </a:r>
+                      <a:endParaRPr lang="en-US" sz="1300" dirty="0">
+                        <a:latin typeface="Noto Sans" charset="0"/>
+                        <a:ea typeface="Noto Sans" charset="0"/>
+                        <a:cs typeface="Noto Sans" charset="0"/>
+                      </a:endParaRPr>
+                    </a:p>
+                  </a:txBody>
+                  <a:tcPr marL="127000" marR="127000" marT="88900" marB="88900">
+                    <a:lnL w="12700" cap="flat" cmpd="sng" algn="ctr">
+                      <a:solidFill>
+                        <a:srgbClr val="C4C2BE"/>
+                      </a:solidFill>
+                      <a:prstDash val="solid"/>
+                      <a:round/>
+                      <a:headEnd type="none" w="med" len="med"/>
+                      <a:tailEnd type="none" w="med" len="med"/>
+                    </a:lnL>
+                    <a:lnR w="12700" cap="flat" cmpd="sng" algn="ctr">
+                      <a:solidFill>
+                        <a:srgbClr val="C4C2BE"/>
+                      </a:solidFill>
+                      <a:prstDash val="solid"/>
+                      <a:round/>
+                      <a:headEnd type="none" w="med" len="med"/>
+                      <a:tailEnd type="none" w="med" len="med"/>
+                    </a:lnR>
+                    <a:lnT w="12700" cap="flat" cmpd="sng" algn="ctr">
+                      <a:solidFill>
+                        <a:srgbClr val="C4C2BE"/>
+                      </a:solidFill>
+                      <a:prstDash val="solid"/>
+                      <a:round/>
+                      <a:headEnd type="none" w="med" len="med"/>
+                      <a:tailEnd type="none" w="med" len="med"/>
+                    </a:lnT>
+                    <a:lnB w="12700" cap="flat" cmpd="sng" algn="ctr">
+                      <a:solidFill>
+                        <a:srgbClr val="C4C2BE"/>
+                      </a:solidFill>
+                      <a:prstDash val="solid"/>
+                      <a:round/>
+                      <a:headEnd type="none" w="med" len="med"/>
+                      <a:tailEnd type="none" w="med" len="med"/>
+                    </a:lnB>
+                  </a:tcPr>
+                </a:tc>
+                <a:tc>
+                  <a:txBody>
+                    <a:bodyPr/>
+                    <a:lstStyle/>
+                    <a:p>
+                      <a:pPr marL="0" indent="0">
+                        <a:lnSpc>
+                          <a:spcPts val="1820"/>
+                        </a:lnSpc>
+                        <a:buNone/>
+                      </a:pPr>
+                      <a:r>
+                        <a:rPr lang="en-US" sz="1300" dirty="0">
+                          <a:solidFill>
+                            <a:srgbClr val="1D2433"/>
+                          </a:solidFill>
+                          <a:latin typeface="Noto Sans" pitchFamily="34" charset="0"/>
+                          <a:ea typeface="Noto Sans" pitchFamily="34" charset="-122"/>
+                          <a:cs typeface="Noto Sans" pitchFamily="34" charset="-120"/>
+                        </a:rPr>
+                        <a:t>1024…65 536 ppr; robot boʻgʻinlari va motor vallari</a:t>
+                      </a:r>
+                      <a:endParaRPr lang="en-US" sz="1300" dirty="0">
+                        <a:latin typeface="Noto Sans" charset="0"/>
+                        <a:ea typeface="Noto Sans" charset="0"/>
+                        <a:cs typeface="Noto Sans" charset="0"/>
+                      </a:endParaRPr>
+                    </a:p>
+                  </a:txBody>
+                  <a:tcPr marL="127000" marR="127000" marT="88900" marB="88900">
+                    <a:lnL w="12700" cap="flat" cmpd="sng" algn="ctr">
+                      <a:solidFill>
+                        <a:srgbClr val="C4C2BE"/>
+                      </a:solidFill>
+                      <a:prstDash val="solid"/>
+                      <a:round/>
+                      <a:headEnd type="none" w="med" len="med"/>
+                      <a:tailEnd type="none" w="med" len="med"/>
+                    </a:lnL>
+                    <a:lnR w="12700" cap="flat" cmpd="sng" algn="ctr">
+                      <a:solidFill>
+                        <a:srgbClr val="C4C2BE"/>
+                      </a:solidFill>
+                      <a:prstDash val="solid"/>
+                      <a:round/>
+                      <a:headEnd type="none" w="med" len="med"/>
+                      <a:tailEnd type="none" w="med" len="med"/>
+                    </a:lnR>
+                    <a:lnT w="12700" cap="flat" cmpd="sng" algn="ctr">
+                      <a:solidFill>
+                        <a:srgbClr val="C4C2BE"/>
+                      </a:solidFill>
+                      <a:prstDash val="solid"/>
+                      <a:round/>
+                      <a:headEnd type="none" w="med" len="med"/>
+                      <a:tailEnd type="none" w="med" len="med"/>
+                    </a:lnT>
+                    <a:lnB w="12700" cap="flat" cmpd="sng" algn="ctr">
+                      <a:solidFill>
+                        <a:srgbClr val="C4C2BE"/>
+                      </a:solidFill>
+                      <a:prstDash val="solid"/>
+                      <a:round/>
+                      <a:headEnd type="none" w="med" len="med"/>
+                      <a:tailEnd type="none" w="med" len="med"/>
+                    </a:lnB>
+                  </a:tcPr>
+                </a:tc>
+                <a:extLst>
+                  <a:ext uri="{0D108BD9-81ED-4DB2-BD59-A6C34878D82A}">
+                    <a16:rowId xmlns:a16="http://schemas.microsoft.com/office/drawing/2014/main" val="10004"/>
+                  </a:ext>
+                </a:extLst>
+              </a:tr>
+            </a:tbl>
+          </a:graphicData>
+        </a:graphic>
+      </p:graphicFrame>
+      <p:sp>
+        <p:nvSpPr>
+          <p:cNvPr id="5" name="Text 2"/>
+          <p:cNvSpPr/>
+          <p:nvPr/>
+        </p:nvSpPr>
+        <p:spPr>
+          <a:xfrm>
+            <a:off x="812800" y="5013325"/>
+            <a:ext cx="10883392" cy="274320"/>
+          </a:xfrm>
+          <a:prstGeom prst="rect">
+            <a:avLst/>
+          </a:prstGeom>
+          <a:noFill/>
+          <a:ln/>
+        </p:spPr>
+        <p:txBody>
+          <a:bodyPr wrap="square" lIns="0" tIns="0" rIns="0" bIns="0" rtlCol="0" anchor="t">
+            <a:normAutofit/>
+          </a:bodyPr>
+          <a:lstStyle/>
+          <a:p>
+            <a:pPr marL="0" indent="0" algn="l">
+              <a:lnSpc>
+                <a:spcPts val="1960"/>
+              </a:lnSpc>
+              <a:buNone/>
+            </a:pPr>
+            <a:r>
+              <a:rPr lang="en-US" sz="1400" dirty="0">
+                <a:solidFill>
+                  <a:srgbClr val="4B5563"/>
+                </a:solidFill>
+                <a:latin typeface="Noto Sans" pitchFamily="34" charset="0"/>
+                <a:ea typeface="Noto Sans" pitchFamily="34" charset="-122"/>
+                <a:cs typeface="Noto Sans" pitchFamily="34" charset="-120"/>
+              </a:rPr>
+              <a:t>Optopara galvanik ajratish uchun ham ishlatiladi: signal yorugʻlik orqali uzatiladi, zanjirlar elektr jihatdan bogʻlanmaydi.</a:t>
+            </a:r>
+            <a:endParaRPr lang="en-US" sz="1400" dirty="0"/>
+          </a:p>
+        </p:txBody>
+      </p:sp>
+      <p:sp>
+        <p:nvSpPr>
+          <p:cNvPr id="6" name="Text 3"/>
+          <p:cNvSpPr/>
+          <p:nvPr/>
+        </p:nvSpPr>
+        <p:spPr>
+          <a:xfrm>
+            <a:off x="812800" y="6238239"/>
+            <a:ext cx="10883392" cy="238760"/>
+          </a:xfrm>
+          <a:prstGeom prst="rect">
+            <a:avLst/>
+          </a:prstGeom>
+          <a:noFill/>
+          <a:ln/>
+        </p:spPr>
+        <p:txBody>
+          <a:bodyPr wrap="square" lIns="0" tIns="0" rIns="0" bIns="0" rtlCol="0" anchor="t">
+            <a:normAutofit/>
+          </a:bodyPr>
+          <a:lstStyle/>
+          <a:p>
+            <a:pPr marL="0" indent="0" algn="l">
+              <a:lnSpc>
+                <a:spcPts val="1680"/>
+              </a:lnSpc>
+              <a:buNone/>
+            </a:pPr>
+            <a:r>
+              <a:rPr lang="en-US" sz="1200" dirty="0">
+                <a:solidFill>
+                  <a:srgbClr val="6B7280"/>
+                </a:solidFill>
+                <a:latin typeface="Noto Sans" pitchFamily="34" charset="0"/>
+                <a:ea typeface="Noto Sans" pitchFamily="34" charset="-122"/>
+                <a:cs typeface="Noto Sans" pitchFamily="34" charset="-120"/>
+              </a:rPr>
+              <a:t>Amaliyot №6 · Optik va temperatura datchiklari · 06</a:t>
+            </a:r>
+            <a:endParaRPr lang="en-US" sz="1200" dirty="0"/>
+          </a:p>
+        </p:txBody>
+      </p:sp>
+    </p:spTree>
+  </p:cSld>
+  <p:clrMapOvr>
+    <a:masterClrMapping/>
+  </p:clrMapOvr>
+</p:sld>
+</file>
+
+<file path=ppt/slides/slide7.xml><?xml version="1.0" encoding="utf-8"?>
+<p:sld xmlns:a="http://schemas.openxmlformats.org/drawingml/2006/main" xmlns:r="http://schemas.openxmlformats.org/officeDocument/2006/relationships" xmlns:p="http://schemas.openxmlformats.org/presentationml/2006/main">
+  <p:cSld name="Slide 7">
+    <p:bg>
+      <p:bgPr>
+        <a:solidFill>
+          <a:srgbClr val="F5F3EE"/>
+        </a:solidFill>
+        <a:effectLst/>
+      </p:bgPr>
+    </p:bg>
+    <p:spTree>
+      <p:nvGrpSpPr>
+        <p:cNvPr id="1" name=""/>
+        <p:cNvGrpSpPr/>
+        <p:nvPr/>
+      </p:nvGrpSpPr>
+      <p:grpSpPr>
+        <a:xfrm>
+          <a:off x="0" y="0"/>
+          <a:ext cx="0" cy="0"/>
+          <a:chOff x="0" y="0"/>
+          <a:chExt cx="0" cy="0"/>
+        </a:xfrm>
+      </p:grpSpPr>
+      <p:sp>
+        <p:nvSpPr>
+          <p:cNvPr id="2" name="Text 0"/>
+          <p:cNvSpPr/>
+          <p:nvPr/>
+        </p:nvSpPr>
+        <p:spPr>
+          <a:xfrm>
+            <a:off x="812800" y="812800"/>
+            <a:ext cx="10883392" cy="238760"/>
+          </a:xfrm>
+          <a:prstGeom prst="rect">
+            <a:avLst/>
+          </a:prstGeom>
+          <a:noFill/>
+          <a:ln/>
+        </p:spPr>
+        <p:txBody>
+          <a:bodyPr wrap="square" lIns="0" tIns="0" rIns="0" bIns="0" rtlCol="0" anchor="t">
+            <a:normAutofit/>
+          </a:bodyPr>
+          <a:lstStyle/>
+          <a:p>
+            <a:pPr marL="0" indent="0" algn="l">
+              <a:lnSpc>
+                <a:spcPts val="1680"/>
+              </a:lnSpc>
+              <a:buNone/>
+            </a:pPr>
+            <a:r>
+              <a:rPr lang="en-US" sz="1200" b="1" kern="0" spc="100" dirty="0">
+                <a:solidFill>
+                  <a:srgbClr val="B5521A"/>
+                </a:solidFill>
+                <a:latin typeface="Noto Sans" pitchFamily="34" charset="0"/>
+                <a:ea typeface="Noto Sans" pitchFamily="34" charset="-122"/>
+                <a:cs typeface="Noto Sans" pitchFamily="34" charset="-120"/>
+              </a:rPr>
+              <a:t>OPTIK DATCHIKLAR</a:t>
+            </a:r>
+            <a:endParaRPr lang="en-US" sz="1200" dirty="0"/>
+          </a:p>
+        </p:txBody>
+      </p:sp>
+      <p:sp>
+        <p:nvSpPr>
+          <p:cNvPr id="3" name="Text 1"/>
+          <p:cNvSpPr>
+            <a:spLocks noGrp="1"/>
+          </p:cNvSpPr>
+          <p:nvPr>
+            <p:ph type="title"/>
+          </p:nvPr>
+        </p:nvSpPr>
+        <p:spPr>
+          <a:xfrm>
+            <a:off x="812800" y="1102361"/>
+            <a:ext cx="10883392" cy="472440"/>
+          </a:xfrm>
+          <a:prstGeom prst="rect">
+            <a:avLst/>
+          </a:prstGeom>
+          <a:noFill/>
+          <a:ln/>
+        </p:spPr>
+        <p:txBody>
+          <a:bodyPr wrap="square" lIns="0" tIns="0" rIns="0" bIns="0" rtlCol="0" anchor="t">
+            <a:normAutofit/>
+          </a:bodyPr>
+          <a:lstStyle/>
+          <a:p>
+            <a:pPr marL="0" indent="0" algn="l">
+              <a:lnSpc>
+                <a:spcPts val="3520"/>
+              </a:lnSpc>
+              <a:buNone/>
+            </a:pPr>
+            <a:r>
+              <a:rPr lang="en-US" sz="3200" b="1" i="0" dirty="0">
+                <a:solidFill>
+                  <a:srgbClr val="16233B"/>
+                </a:solidFill>
+                <a:latin typeface="Noto Sans" pitchFamily="34" charset="0"/>
+                <a:ea typeface="Noto Sans" pitchFamily="34" charset="-122"/>
+                <a:cs typeface="Noto Sans" pitchFamily="34" charset="-120"/>
+              </a:rPr>
+              <a:t>Fotodiod va transimpedans kuchaytirgich (TIA)</a:t>
+            </a:r>
+            <a:endParaRPr lang="en-US" sz="3200" dirty="0"/>
+          </a:p>
+        </p:txBody>
+      </p:sp>
+      <p:pic>
+        <p:nvPicPr>
+          <p:cNvPr id="4" name="Image 0" descr="TIA sxemasi: LED nuri fotodiodga tushadi, fototok operatsion kuchaytirgichning inverslovchi kirishiga beriladi, Rf qayta aloqa qarshiligi chiqishdan kirishga ulangan"/>
+          <p:cNvPicPr>
+            <a:picLocks noChangeAspect="1"/>
+          </p:cNvPicPr>
+          <p:nvPr/>
+        </p:nvPicPr>
+        <p:blipFill>
+          <a:blip r:embed="rId3"/>
+          <a:srcRect/>
+          <a:stretch/>
+        </p:blipFill>
+        <p:spPr>
+          <a:xfrm>
+            <a:off x="812800" y="1803400"/>
+            <a:ext cx="5715000" cy="3302000"/>
+          </a:xfrm>
+          <a:prstGeom prst="rect">
+            <a:avLst/>
+          </a:prstGeom>
+        </p:spPr>
+      </p:pic>
+      <p:sp>
+        <p:nvSpPr>
+          <p:cNvPr id="5" name="Text 2"/>
+          <p:cNvSpPr/>
+          <p:nvPr/>
+        </p:nvSpPr>
+        <p:spPr>
+          <a:xfrm>
+            <a:off x="6883400" y="2335529"/>
+            <a:ext cx="4630674" cy="238760"/>
+          </a:xfrm>
+          <a:prstGeom prst="rect">
+            <a:avLst/>
+          </a:prstGeom>
+          <a:noFill/>
+          <a:ln/>
+        </p:spPr>
+        <p:txBody>
+          <a:bodyPr wrap="square" lIns="0" tIns="0" rIns="0" bIns="0" rtlCol="0" anchor="t">
+            <a:normAutofit/>
+          </a:bodyPr>
+          <a:lstStyle/>
+          <a:p>
+            <a:pPr marL="0" indent="0" algn="l">
+              <a:lnSpc>
+                <a:spcPts val="1680"/>
+              </a:lnSpc>
+              <a:buNone/>
+            </a:pPr>
+            <a:r>
+              <a:rPr lang="en-US" sz="1200" b="1" dirty="0">
+                <a:solidFill>
+                  <a:srgbClr val="2D6CB0"/>
+                </a:solidFill>
+                <a:latin typeface="Noto Sans" pitchFamily="34" charset="0"/>
+                <a:ea typeface="Noto Sans" pitchFamily="34" charset="-122"/>
+                <a:cs typeface="Noto Sans" pitchFamily="34" charset="-120"/>
+              </a:rPr>
+              <a:t>Fototok</a:t>
+            </a:r>
+            <a:endParaRPr lang="en-US" sz="1200" dirty="0"/>
+          </a:p>
+        </p:txBody>
+      </p:sp>
+      <p:sp>
+        <p:nvSpPr>
+          <p:cNvPr id="6" name="Text 3"/>
+          <p:cNvSpPr/>
+          <p:nvPr/>
+        </p:nvSpPr>
+        <p:spPr>
+          <a:xfrm>
+            <a:off x="6883400" y="2599689"/>
+            <a:ext cx="4630674" cy="381000"/>
+          </a:xfrm>
+          <a:prstGeom prst="rect">
+            <a:avLst/>
+          </a:prstGeom>
+          <a:noFill/>
+          <a:ln/>
+        </p:spPr>
+        <p:txBody>
+          <a:bodyPr wrap="square" lIns="0" tIns="0" rIns="0" bIns="0" rtlCol="0" anchor="t">
+            <a:normAutofit/>
+          </a:bodyPr>
+          <a:lstStyle/>
+          <a:p>
+            <a:pPr marL="0" indent="0" algn="l">
+              <a:lnSpc>
+                <a:spcPts val="2800"/>
+              </a:lnSpc>
+              <a:buNone/>
+            </a:pPr>
+            <a:r>
+              <a:rPr lang="en-US" sz="2000" b="1" dirty="0">
+                <a:solidFill>
+                  <a:srgbClr val="1D2433"/>
+                </a:solidFill>
+                <a:latin typeface="Noto Sans" pitchFamily="34" charset="0"/>
+                <a:ea typeface="Noto Sans" pitchFamily="34" charset="-122"/>
+                <a:cs typeface="Noto Sans" pitchFamily="34" charset="-120"/>
+              </a:rPr>
+              <a:t>I(ph) = R(photo) · P(opt)</a:t>
+            </a:r>
+            <a:endParaRPr lang="en-US" sz="2000" dirty="0"/>
+          </a:p>
+        </p:txBody>
+      </p:sp>
+      <p:sp>
+        <p:nvSpPr>
+          <p:cNvPr id="7" name="Text 4"/>
+          <p:cNvSpPr/>
+          <p:nvPr/>
+        </p:nvSpPr>
+        <p:spPr>
+          <a:xfrm>
+            <a:off x="6883400" y="3107689"/>
+            <a:ext cx="4630674" cy="238760"/>
+          </a:xfrm>
+          <a:prstGeom prst="rect">
+            <a:avLst/>
+          </a:prstGeom>
+          <a:noFill/>
+          <a:ln/>
+        </p:spPr>
+        <p:txBody>
+          <a:bodyPr wrap="square" lIns="0" tIns="0" rIns="0" bIns="0" rtlCol="0" anchor="t">
+            <a:normAutofit/>
+          </a:bodyPr>
+          <a:lstStyle/>
+          <a:p>
+            <a:pPr marL="0" indent="0" algn="l">
+              <a:lnSpc>
+                <a:spcPts val="1680"/>
+              </a:lnSpc>
+              <a:buNone/>
+            </a:pPr>
+            <a:r>
+              <a:rPr lang="en-US" sz="1200" b="1" dirty="0">
+                <a:solidFill>
+                  <a:srgbClr val="2D6CB0"/>
+                </a:solidFill>
+                <a:latin typeface="Noto Sans" pitchFamily="34" charset="0"/>
+                <a:ea typeface="Noto Sans" pitchFamily="34" charset="-122"/>
+                <a:cs typeface="Noto Sans" pitchFamily="34" charset="-120"/>
+              </a:rPr>
+              <a:t>Chiqish kuchlanishi</a:t>
+            </a:r>
+            <a:endParaRPr lang="en-US" sz="1200" dirty="0"/>
+          </a:p>
+        </p:txBody>
+      </p:sp>
+      <p:sp>
+        <p:nvSpPr>
+          <p:cNvPr id="8" name="Text 5"/>
+          <p:cNvSpPr/>
+          <p:nvPr/>
+        </p:nvSpPr>
+        <p:spPr>
+          <a:xfrm>
+            <a:off x="6883400" y="3371850"/>
+            <a:ext cx="4630674" cy="381000"/>
+          </a:xfrm>
+          <a:prstGeom prst="rect">
+            <a:avLst/>
+          </a:prstGeom>
+          <a:noFill/>
+          <a:ln/>
+        </p:spPr>
+        <p:txBody>
+          <a:bodyPr wrap="square" lIns="0" tIns="0" rIns="0" bIns="0" rtlCol="0" anchor="t">
+            <a:normAutofit/>
+          </a:bodyPr>
+          <a:lstStyle/>
+          <a:p>
+            <a:pPr marL="0" indent="0" algn="l">
+              <a:lnSpc>
+                <a:spcPts val="2800"/>
+              </a:lnSpc>
+              <a:buNone/>
+            </a:pPr>
+            <a:r>
+              <a:rPr lang="en-US" sz="2000" b="1" dirty="0">
+                <a:solidFill>
+                  <a:srgbClr val="1D2433"/>
+                </a:solidFill>
+                <a:latin typeface="Noto Sans" pitchFamily="34" charset="0"/>
+                <a:ea typeface="Noto Sans" pitchFamily="34" charset="-122"/>
+                <a:cs typeface="Noto Sans" pitchFamily="34" charset="-120"/>
+              </a:rPr>
+              <a:t>V(out) = I(ph) · Rf</a:t>
+            </a:r>
+            <a:endParaRPr lang="en-US" sz="2000" dirty="0"/>
+          </a:p>
+        </p:txBody>
+      </p:sp>
+      <p:sp>
+        <p:nvSpPr>
+          <p:cNvPr id="9" name="Text 6"/>
+          <p:cNvSpPr/>
+          <p:nvPr/>
+        </p:nvSpPr>
+        <p:spPr>
+          <a:xfrm>
+            <a:off x="6883400" y="3879850"/>
+            <a:ext cx="4630674" cy="718820"/>
+          </a:xfrm>
+          <a:prstGeom prst="rect">
+            <a:avLst/>
+          </a:prstGeom>
+          <a:noFill/>
+          <a:ln/>
+        </p:spPr>
+        <p:txBody>
+          <a:bodyPr wrap="square" lIns="0" tIns="0" rIns="0" bIns="0" rtlCol="0" anchor="t">
+            <a:normAutofit/>
+          </a:bodyPr>
+          <a:lstStyle/>
+          <a:p>
+            <a:pPr marL="0" indent="0" algn="l">
+              <a:lnSpc>
+                <a:spcPts val="1820"/>
+              </a:lnSpc>
+              <a:buNone/>
+            </a:pPr>
+            <a:r>
+              <a:rPr lang="en-US" sz="1300" dirty="0">
+                <a:solidFill>
+                  <a:srgbClr val="1D2433"/>
+                </a:solidFill>
+                <a:latin typeface="Noto Sans" pitchFamily="34" charset="0"/>
+                <a:ea typeface="Noto Sans" pitchFamily="34" charset="-122"/>
+                <a:cs typeface="Noto Sans" pitchFamily="34" charset="-120"/>
+              </a:rPr>
+              <a:t>TIA fotodiodning kichik tokini (nA…µA) oʻlchanadigan kuchlanishga aylantiradi va fotodiod kuchlanishini deyarli nol ushlaydi — bu tezkorlik va chiziqlilikni oshiradi.</a:t>
+            </a:r>
+            <a:endParaRPr lang="en-US" sz="1300" dirty="0"/>
+          </a:p>
+        </p:txBody>
+      </p:sp>
+      <p:sp>
+        <p:nvSpPr>
+          <p:cNvPr id="10" name="Text 7"/>
+          <p:cNvSpPr/>
+          <p:nvPr/>
+        </p:nvSpPr>
+        <p:spPr>
+          <a:xfrm>
+            <a:off x="812800" y="6238239"/>
+            <a:ext cx="10883392" cy="238760"/>
+          </a:xfrm>
+          <a:prstGeom prst="rect">
+            <a:avLst/>
+          </a:prstGeom>
+          <a:noFill/>
+          <a:ln/>
+        </p:spPr>
+        <p:txBody>
+          <a:bodyPr wrap="square" lIns="0" tIns="0" rIns="0" bIns="0" rtlCol="0" anchor="t">
+            <a:normAutofit/>
+          </a:bodyPr>
+          <a:lstStyle/>
+          <a:p>
+            <a:pPr marL="0" indent="0" algn="l">
+              <a:lnSpc>
+                <a:spcPts val="1680"/>
+              </a:lnSpc>
+              <a:buNone/>
+            </a:pPr>
+            <a:r>
+              <a:rPr lang="en-US" sz="1200" dirty="0">
+                <a:solidFill>
+                  <a:srgbClr val="6B7280"/>
+                </a:solidFill>
+                <a:latin typeface="Noto Sans" pitchFamily="34" charset="0"/>
+                <a:ea typeface="Noto Sans" pitchFamily="34" charset="-122"/>
+                <a:cs typeface="Noto Sans" pitchFamily="34" charset="-120"/>
+              </a:rPr>
+              <a:t>Amaliyot №6 · Optik va temperatura datchiklari · 07</a:t>
+            </a:r>
+            <a:endParaRPr lang="en-US" sz="1200" dirty="0"/>
+          </a:p>
+        </p:txBody>
+      </p:sp>
+    </p:spTree>
+  </p:cSld>
+  <p:clrMapOvr>
+    <a:masterClrMapping/>
+  </p:clrMapOvr>
+</p:sld>
+</file>
+
+<file path=ppt/slides/slide8.xml><?xml version="1.0" encoding="utf-8"?>
+<p:sld xmlns:a="http://schemas.openxmlformats.org/drawingml/2006/main" xmlns:r="http://schemas.openxmlformats.org/officeDocument/2006/relationships" xmlns:p="http://schemas.openxmlformats.org/presentationml/2006/main">
+  <p:cSld name="Slide 8">
+    <p:bg>
+      <p:bgPr>
+        <a:solidFill>
+          <a:srgbClr val="F5F3EE"/>
+        </a:solidFill>
+        <a:effectLst/>
+      </p:bgPr>
+    </p:bg>
+    <p:spTree>
+      <p:nvGrpSpPr>
+        <p:cNvPr id="1" name=""/>
+        <p:cNvGrpSpPr/>
+        <p:nvPr/>
+      </p:nvGrpSpPr>
+      <p:grpSpPr>
+        <a:xfrm>
+          <a:off x="0" y="0"/>
+          <a:ext cx="0" cy="0"/>
+          <a:chOff x="0" y="0"/>
+          <a:chExt cx="0" cy="0"/>
+        </a:xfrm>
+      </p:grpSpPr>
+      <p:sp>
+        <p:nvSpPr>
+          <p:cNvPr id="2" name="Text 0"/>
+          <p:cNvSpPr/>
+          <p:nvPr/>
+        </p:nvSpPr>
+        <p:spPr>
+          <a:xfrm>
+            <a:off x="812800" y="812800"/>
+            <a:ext cx="10883392" cy="238760"/>
+          </a:xfrm>
+          <a:prstGeom prst="rect">
+            <a:avLst/>
+          </a:prstGeom>
+          <a:noFill/>
+          <a:ln/>
+        </p:spPr>
+        <p:txBody>
+          <a:bodyPr wrap="square" lIns="0" tIns="0" rIns="0" bIns="0" rtlCol="0" anchor="t">
+            <a:normAutofit/>
+          </a:bodyPr>
+          <a:lstStyle/>
+          <a:p>
+            <a:pPr marL="0" indent="0" algn="l">
+              <a:lnSpc>
+                <a:spcPts val="1680"/>
+              </a:lnSpc>
+              <a:buNone/>
+            </a:pPr>
+            <a:r>
+              <a:rPr lang="en-US" sz="1200" b="1" kern="0" spc="100" dirty="0">
+                <a:solidFill>
+                  <a:srgbClr val="B5521A"/>
+                </a:solidFill>
+                <a:latin typeface="Noto Sans" pitchFamily="34" charset="0"/>
+                <a:ea typeface="Noto Sans" pitchFamily="34" charset="-122"/>
+                <a:cs typeface="Noto Sans" pitchFamily="34" charset="-120"/>
+              </a:rPr>
+              <a:t>TEMPERATURA DATCHIKLARI</a:t>
+            </a:r>
+            <a:endParaRPr lang="en-US" sz="1200" dirty="0"/>
+          </a:p>
+        </p:txBody>
+      </p:sp>
+      <p:sp>
+        <p:nvSpPr>
+          <p:cNvPr id="3" name="Text 1"/>
+          <p:cNvSpPr>
+            <a:spLocks noGrp="1"/>
+          </p:cNvSpPr>
+          <p:nvPr>
+            <p:ph type="title"/>
+          </p:nvPr>
+        </p:nvSpPr>
+        <p:spPr>
+          <a:xfrm>
+            <a:off x="812800" y="1102361"/>
+            <a:ext cx="10883392" cy="472440"/>
+          </a:xfrm>
+          <a:prstGeom prst="rect">
+            <a:avLst/>
+          </a:prstGeom>
+          <a:noFill/>
+          <a:ln/>
+        </p:spPr>
+        <p:txBody>
+          <a:bodyPr wrap="square" lIns="0" tIns="0" rIns="0" bIns="0" rtlCol="0" anchor="t">
+            <a:normAutofit/>
+          </a:bodyPr>
+          <a:lstStyle/>
+          <a:p>
+            <a:pPr marL="0" indent="0" algn="l">
+              <a:lnSpc>
+                <a:spcPts val="3520"/>
+              </a:lnSpc>
+              <a:buNone/>
+            </a:pPr>
+            <a:r>
+              <a:rPr lang="en-US" sz="3200" b="1" i="0" dirty="0">
+                <a:solidFill>
+                  <a:srgbClr val="16233B"/>
+                </a:solidFill>
+                <a:latin typeface="Noto Sans" pitchFamily="34" charset="0"/>
+                <a:ea typeface="Noto Sans" pitchFamily="34" charset="-122"/>
+                <a:cs typeface="Noto Sans" pitchFamily="34" charset="-120"/>
+              </a:rPr>
+              <a:t>Harorat datchiklarini taqqoslash</a:t>
             </a:r>
             <a:endParaRPr lang="en-US" sz="3200" dirty="0"/>
           </a:p>
@@ -11136,9 +13023,34 @@
             <a:tbl>
               <a:tblPr/>
               <a:tblGrid>
-                <a:gridCol w="3518747"/>
-                <a:gridCol w="3518747"/>
-                <a:gridCol w="3518747"/>
+                <a:gridCol w="2639060">
+                  <a:extLst>
+                    <a:ext uri="{9D8B030D-6E8A-4147-A177-3AD203B41FA5}">
+                      <a16:colId xmlns:a16="http://schemas.microsoft.com/office/drawing/2014/main" val="20000"/>
+                    </a:ext>
+                  </a:extLst>
+                </a:gridCol>
+                <a:gridCol w="2639060">
+                  <a:extLst>
+                    <a:ext uri="{9D8B030D-6E8A-4147-A177-3AD203B41FA5}">
+                      <a16:colId xmlns:a16="http://schemas.microsoft.com/office/drawing/2014/main" val="20001"/>
+                    </a:ext>
+                  </a:extLst>
+                </a:gridCol>
+                <a:gridCol w="2639060">
+                  <a:extLst>
+                    <a:ext uri="{9D8B030D-6E8A-4147-A177-3AD203B41FA5}">
+                      <a16:colId xmlns:a16="http://schemas.microsoft.com/office/drawing/2014/main" val="20002"/>
+                    </a:ext>
+                  </a:extLst>
+                </a:gridCol>
+                <a:gridCol w="2639060">
+                  <a:extLst>
+                    <a:ext uri="{9D8B030D-6E8A-4147-A177-3AD203B41FA5}">
+                      <a16:colId xmlns:a16="http://schemas.microsoft.com/office/drawing/2014/main" val="20003"/>
+                    </a:ext>
+                  </a:extLst>
+                </a:gridCol>
               </a:tblGrid>
               <a:tr h="410845">
                 <a:tc>
@@ -11146,7 +13058,7 @@
                     <a:bodyPr/>
                     <a:lstStyle/>
                     <a:p>
-                      <a:pPr indent="0" marL="0">
+                      <a:pPr marL="0" indent="0">
                         <a:lnSpc>
                           <a:spcPts val="1820"/>
                         </a:lnSpc>
@@ -11170,7 +13082,7 @@
                       </a:endParaRPr>
                     </a:p>
                   </a:txBody>
-                  <a:tcPr marL="127000" marR="127000" marT="88900" marB="88900" anchor="t">
+                  <a:tcPr marL="127000" marR="127000" marT="88900" marB="88900">
                     <a:lnL w="12700" cap="flat" cmpd="sng" algn="ctr">
                       <a:solidFill>
                         <a:srgbClr val="C4C2BE"/>
@@ -11217,1697 +13129,7 @@
                     <a:bodyPr/>
                     <a:lstStyle/>
                     <a:p>
-                      <a:pPr indent="0" marL="0">
-                        <a:lnSpc>
-                          <a:spcPts val="1820"/>
-                        </a:lnSpc>
-                        <a:buNone/>
-                      </a:pPr>
-                      <a:r>
-                        <a:rPr lang="en-US" sz="1300" b="1" dirty="0">
-                          <a:solidFill>
-                            <a:srgbClr val="F5F3EE"/>
-                          </a:solidFill>
-                          <a:latin typeface="Noto Sans" pitchFamily="34" charset="0"/>
-                          <a:ea typeface="Noto Sans" pitchFamily="34" charset="-122"/>
-                          <a:cs typeface="Noto Sans" pitchFamily="34" charset="-120"/>
-                        </a:rPr>
-                        <a:t>Fizik tamoyil</a:t>
-                      </a:r>
-                      <a:endParaRPr lang="en-US" sz="1300" dirty="0">
-                        <a:latin typeface="Noto Sans" charset="0"/>
-                        <a:ea typeface="Noto Sans" charset="0"/>
-                        <a:cs typeface="Noto Sans" charset="0"/>
-                      </a:endParaRPr>
-                    </a:p>
-                  </a:txBody>
-                  <a:tcPr marL="127000" marR="127000" marT="88900" marB="88900" anchor="t">
-                    <a:lnL w="12700" cap="flat" cmpd="sng" algn="ctr">
-                      <a:solidFill>
-                        <a:srgbClr val="162032"/>
-                      </a:solidFill>
-                      <a:prstDash val="solid"/>
-                      <a:round/>
-                      <a:headEnd type="none" w="med" len="med"/>
-                      <a:tailEnd type="none" w="med" len="med"/>
-                    </a:lnL>
-                    <a:lnR w="12700" cap="flat" cmpd="sng" algn="ctr">
-                      <a:solidFill>
-                        <a:srgbClr val="162032"/>
-                      </a:solidFill>
-                      <a:prstDash val="solid"/>
-                      <a:round/>
-                      <a:headEnd type="none" w="med" len="med"/>
-                      <a:tailEnd type="none" w="med" len="med"/>
-                    </a:lnR>
-                    <a:lnT w="12700" cap="flat" cmpd="sng" algn="ctr">
-                      <a:solidFill>
-                        <a:srgbClr val="C4C2BE"/>
-                      </a:solidFill>
-                      <a:prstDash val="solid"/>
-                      <a:round/>
-                      <a:headEnd type="none" w="med" len="med"/>
-                      <a:tailEnd type="none" w="med" len="med"/>
-                    </a:lnT>
-                    <a:lnB w="12700" cap="flat" cmpd="sng" algn="ctr">
-                      <a:solidFill>
-                        <a:srgbClr val="162032"/>
-                      </a:solidFill>
-                      <a:prstDash val="solid"/>
-                      <a:round/>
-                      <a:headEnd type="none" w="med" len="med"/>
-                      <a:tailEnd type="none" w="med" len="med"/>
-                    </a:lnB>
-                    <a:solidFill>
-                      <a:srgbClr val="16233B"/>
-                    </a:solidFill>
-                  </a:tcPr>
-                </a:tc>
-                <a:tc>
-                  <a:txBody>
-                    <a:bodyPr/>
-                    <a:lstStyle/>
-                    <a:p>
-                      <a:pPr indent="0" marL="0">
-                        <a:lnSpc>
-                          <a:spcPts val="1820"/>
-                        </a:lnSpc>
-                        <a:buNone/>
-                      </a:pPr>
-                      <a:r>
-                        <a:rPr lang="en-US" sz="1300" b="1" dirty="0">
-                          <a:solidFill>
-                            <a:srgbClr val="F5F3EE"/>
-                          </a:solidFill>
-                          <a:latin typeface="Noto Sans" pitchFamily="34" charset="0"/>
-                          <a:ea typeface="Noto Sans" pitchFamily="34" charset="-122"/>
-                          <a:cs typeface="Noto Sans" pitchFamily="34" charset="-120"/>
-                        </a:rPr>
-                        <a:t>Xususiyati va qoʻllanilishi</a:t>
-                      </a:r>
-                      <a:endParaRPr lang="en-US" sz="1300" dirty="0">
-                        <a:latin typeface="Noto Sans" charset="0"/>
-                        <a:ea typeface="Noto Sans" charset="0"/>
-                        <a:cs typeface="Noto Sans" charset="0"/>
-                      </a:endParaRPr>
-                    </a:p>
-                  </a:txBody>
-                  <a:tcPr marL="127000" marR="127000" marT="88900" marB="88900" anchor="t">
-                    <a:lnL w="12700" cap="flat" cmpd="sng" algn="ctr">
-                      <a:solidFill>
-                        <a:srgbClr val="162032"/>
-                      </a:solidFill>
-                      <a:prstDash val="solid"/>
-                      <a:round/>
-                      <a:headEnd type="none" w="med" len="med"/>
-                      <a:tailEnd type="none" w="med" len="med"/>
-                    </a:lnL>
-                    <a:lnR w="12700" cap="flat" cmpd="sng" algn="ctr">
-                      <a:solidFill>
-                        <a:srgbClr val="162032"/>
-                      </a:solidFill>
-                      <a:prstDash val="solid"/>
-                      <a:round/>
-                      <a:headEnd type="none" w="med" len="med"/>
-                      <a:tailEnd type="none" w="med" len="med"/>
-                    </a:lnR>
-                    <a:lnT w="12700" cap="flat" cmpd="sng" algn="ctr">
-                      <a:solidFill>
-                        <a:srgbClr val="C4C2BE"/>
-                      </a:solidFill>
-                      <a:prstDash val="solid"/>
-                      <a:round/>
-                      <a:headEnd type="none" w="med" len="med"/>
-                      <a:tailEnd type="none" w="med" len="med"/>
-                    </a:lnT>
-                    <a:lnB w="12700" cap="flat" cmpd="sng" algn="ctr">
-                      <a:solidFill>
-                        <a:srgbClr val="162032"/>
-                      </a:solidFill>
-                      <a:prstDash val="solid"/>
-                      <a:round/>
-                      <a:headEnd type="none" w="med" len="med"/>
-                      <a:tailEnd type="none" w="med" len="med"/>
-                    </a:lnB>
-                    <a:solidFill>
-                      <a:srgbClr val="16233B"/>
-                    </a:solidFill>
-                  </a:tcPr>
-                </a:tc>
-              </a:tr>
-              <a:tr h="633730">
-                <a:tc>
-                  <a:txBody>
-                    <a:bodyPr/>
-                    <a:lstStyle/>
-                    <a:p>
-                      <a:pPr indent="0" marL="0">
-                        <a:lnSpc>
-                          <a:spcPts val="1820"/>
-                        </a:lnSpc>
-                        <a:buNone/>
-                      </a:pPr>
-                      <a:r>
-                        <a:rPr lang="en-US" sz="1300" dirty="0">
-                          <a:solidFill>
-                            <a:srgbClr val="1D2433"/>
-                          </a:solidFill>
-                          <a:latin typeface="Noto Sans" pitchFamily="34" charset="0"/>
-                          <a:ea typeface="Noto Sans" pitchFamily="34" charset="-122"/>
-                          <a:cs typeface="Noto Sans" pitchFamily="34" charset="-120"/>
-                        </a:rPr>
-                        <a:t>Fotorezistor (LDR)</a:t>
-                      </a:r>
-                      <a:endParaRPr lang="en-US" sz="1300" dirty="0">
-                        <a:latin typeface="Noto Sans" charset="0"/>
-                        <a:ea typeface="Noto Sans" charset="0"/>
-                        <a:cs typeface="Noto Sans" charset="0"/>
-                      </a:endParaRPr>
-                    </a:p>
-                  </a:txBody>
-                  <a:tcPr marL="127000" marR="127000" marT="88900" marB="88900" anchor="t">
-                    <a:lnL w="12700" cap="flat" cmpd="sng" algn="ctr">
-                      <a:solidFill>
-                        <a:srgbClr val="C4C2BE"/>
-                      </a:solidFill>
-                      <a:prstDash val="solid"/>
-                      <a:round/>
-                      <a:headEnd type="none" w="med" len="med"/>
-                      <a:tailEnd type="none" w="med" len="med"/>
-                    </a:lnL>
-                    <a:lnR w="12700" cap="flat" cmpd="sng" algn="ctr">
-                      <a:solidFill>
-                        <a:srgbClr val="C4C2BE"/>
-                      </a:solidFill>
-                      <a:prstDash val="solid"/>
-                      <a:round/>
-                      <a:headEnd type="none" w="med" len="med"/>
-                      <a:tailEnd type="none" w="med" len="med"/>
-                    </a:lnR>
-                    <a:lnT w="12700" cap="flat" cmpd="sng" algn="ctr">
-                      <a:solidFill>
-                        <a:srgbClr val="162032"/>
-                      </a:solidFill>
-                      <a:prstDash val="solid"/>
-                      <a:round/>
-                      <a:headEnd type="none" w="med" len="med"/>
-                      <a:tailEnd type="none" w="med" len="med"/>
-                    </a:lnT>
-                    <a:lnB w="12700" cap="flat" cmpd="sng" algn="ctr">
-                      <a:solidFill>
-                        <a:srgbClr val="C4C2BE"/>
-                      </a:solidFill>
-                      <a:prstDash val="solid"/>
-                      <a:round/>
-                      <a:headEnd type="none" w="med" len="med"/>
-                      <a:tailEnd type="none" w="med" len="med"/>
-                    </a:lnB>
-                  </a:tcPr>
-                </a:tc>
-                <a:tc>
-                  <a:txBody>
-                    <a:bodyPr/>
-                    <a:lstStyle/>
-                    <a:p>
-                      <a:pPr indent="0" marL="0">
-                        <a:lnSpc>
-                          <a:spcPts val="1820"/>
-                        </a:lnSpc>
-                        <a:buNone/>
-                      </a:pPr>
-                      <a:r>
-                        <a:rPr lang="en-US" sz="1300" dirty="0">
-                          <a:solidFill>
-                            <a:srgbClr val="1D2433"/>
-                          </a:solidFill>
-                          <a:latin typeface="Noto Sans" pitchFamily="34" charset="0"/>
-                          <a:ea typeface="Noto Sans" pitchFamily="34" charset="-122"/>
-                          <a:cs typeface="Noto Sans" pitchFamily="34" charset="-120"/>
-                        </a:rPr>
-                        <a:t>Ichki fotoeffekt: yorugʻlikda qarshilik keskin kamayadi</a:t>
-                      </a:r>
-                      <a:endParaRPr lang="en-US" sz="1300" dirty="0">
-                        <a:latin typeface="Noto Sans" charset="0"/>
-                        <a:ea typeface="Noto Sans" charset="0"/>
-                        <a:cs typeface="Noto Sans" charset="0"/>
-                      </a:endParaRPr>
-                    </a:p>
-                  </a:txBody>
-                  <a:tcPr marL="127000" marR="127000" marT="88900" marB="88900" anchor="t">
-                    <a:lnL w="12700" cap="flat" cmpd="sng" algn="ctr">
-                      <a:solidFill>
-                        <a:srgbClr val="C4C2BE"/>
-                      </a:solidFill>
-                      <a:prstDash val="solid"/>
-                      <a:round/>
-                      <a:headEnd type="none" w="med" len="med"/>
-                      <a:tailEnd type="none" w="med" len="med"/>
-                    </a:lnL>
-                    <a:lnR w="12700" cap="flat" cmpd="sng" algn="ctr">
-                      <a:solidFill>
-                        <a:srgbClr val="C4C2BE"/>
-                      </a:solidFill>
-                      <a:prstDash val="solid"/>
-                      <a:round/>
-                      <a:headEnd type="none" w="med" len="med"/>
-                      <a:tailEnd type="none" w="med" len="med"/>
-                    </a:lnR>
-                    <a:lnT w="12700" cap="flat" cmpd="sng" algn="ctr">
-                      <a:solidFill>
-                        <a:srgbClr val="162032"/>
-                      </a:solidFill>
-                      <a:prstDash val="solid"/>
-                      <a:round/>
-                      <a:headEnd type="none" w="med" len="med"/>
-                      <a:tailEnd type="none" w="med" len="med"/>
-                    </a:lnT>
-                    <a:lnB w="12700" cap="flat" cmpd="sng" algn="ctr">
-                      <a:solidFill>
-                        <a:srgbClr val="C4C2BE"/>
-                      </a:solidFill>
-                      <a:prstDash val="solid"/>
-                      <a:round/>
-                      <a:headEnd type="none" w="med" len="med"/>
-                      <a:tailEnd type="none" w="med" len="med"/>
-                    </a:lnB>
-                  </a:tcPr>
-                </a:tc>
-                <a:tc>
-                  <a:txBody>
-                    <a:bodyPr/>
-                    <a:lstStyle/>
-                    <a:p>
-                      <a:pPr indent="0" marL="0">
-                        <a:lnSpc>
-                          <a:spcPts val="1820"/>
-                        </a:lnSpc>
-                        <a:buNone/>
-                      </a:pPr>
-                      <a:r>
-                        <a:rPr lang="en-US" sz="1300" dirty="0">
-                          <a:solidFill>
-                            <a:srgbClr val="1D2433"/>
-                          </a:solidFill>
-                          <a:latin typeface="Noto Sans" pitchFamily="34" charset="0"/>
-                          <a:ea typeface="Noto Sans" pitchFamily="34" charset="-122"/>
-                          <a:cs typeface="Noto Sans" pitchFamily="34" charset="-120"/>
-                        </a:rPr>
-                        <a:t>Nochiziqli, sezgir, inersion (10…100 ms); yorugʻlik kalitlari</a:t>
-                      </a:r>
-                      <a:endParaRPr lang="en-US" sz="1300" dirty="0">
-                        <a:latin typeface="Noto Sans" charset="0"/>
-                        <a:ea typeface="Noto Sans" charset="0"/>
-                        <a:cs typeface="Noto Sans" charset="0"/>
-                      </a:endParaRPr>
-                    </a:p>
-                  </a:txBody>
-                  <a:tcPr marL="127000" marR="127000" marT="88900" marB="88900" anchor="t">
-                    <a:lnL w="12700" cap="flat" cmpd="sng" algn="ctr">
-                      <a:solidFill>
-                        <a:srgbClr val="C4C2BE"/>
-                      </a:solidFill>
-                      <a:prstDash val="solid"/>
-                      <a:round/>
-                      <a:headEnd type="none" w="med" len="med"/>
-                      <a:tailEnd type="none" w="med" len="med"/>
-                    </a:lnL>
-                    <a:lnR w="12700" cap="flat" cmpd="sng" algn="ctr">
-                      <a:solidFill>
-                        <a:srgbClr val="C4C2BE"/>
-                      </a:solidFill>
-                      <a:prstDash val="solid"/>
-                      <a:round/>
-                      <a:headEnd type="none" w="med" len="med"/>
-                      <a:tailEnd type="none" w="med" len="med"/>
-                    </a:lnR>
-                    <a:lnT w="12700" cap="flat" cmpd="sng" algn="ctr">
-                      <a:solidFill>
-                        <a:srgbClr val="162032"/>
-                      </a:solidFill>
-                      <a:prstDash val="solid"/>
-                      <a:round/>
-                      <a:headEnd type="none" w="med" len="med"/>
-                      <a:tailEnd type="none" w="med" len="med"/>
-                    </a:lnT>
-                    <a:lnB w="12700" cap="flat" cmpd="sng" algn="ctr">
-                      <a:solidFill>
-                        <a:srgbClr val="C4C2BE"/>
-                      </a:solidFill>
-                      <a:prstDash val="solid"/>
-                      <a:round/>
-                      <a:headEnd type="none" w="med" len="med"/>
-                      <a:tailEnd type="none" w="med" len="med"/>
-                    </a:lnB>
-                  </a:tcPr>
-                </a:tc>
-              </a:tr>
-              <a:tr h="633730">
-                <a:tc>
-                  <a:txBody>
-                    <a:bodyPr/>
-                    <a:lstStyle/>
-                    <a:p>
-                      <a:pPr indent="0" marL="0">
-                        <a:lnSpc>
-                          <a:spcPts val="1820"/>
-                        </a:lnSpc>
-                        <a:buNone/>
-                      </a:pPr>
-                      <a:r>
-                        <a:rPr lang="en-US" sz="1300" dirty="0">
-                          <a:solidFill>
-                            <a:srgbClr val="1D2433"/>
-                          </a:solidFill>
-                          <a:latin typeface="Noto Sans" pitchFamily="34" charset="0"/>
-                          <a:ea typeface="Noto Sans" pitchFamily="34" charset="-122"/>
-                          <a:cs typeface="Noto Sans" pitchFamily="34" charset="-120"/>
-                        </a:rPr>
-                        <a:t>Fotodiod</a:t>
-                      </a:r>
-                      <a:endParaRPr lang="en-US" sz="1300" dirty="0">
-                        <a:latin typeface="Noto Sans" charset="0"/>
-                        <a:ea typeface="Noto Sans" charset="0"/>
-                        <a:cs typeface="Noto Sans" charset="0"/>
-                      </a:endParaRPr>
-                    </a:p>
-                  </a:txBody>
-                  <a:tcPr marL="127000" marR="127000" marT="88900" marB="88900" anchor="t">
-                    <a:lnL w="12700" cap="flat" cmpd="sng" algn="ctr">
-                      <a:solidFill>
-                        <a:srgbClr val="C4C2BE"/>
-                      </a:solidFill>
-                      <a:prstDash val="solid"/>
-                      <a:round/>
-                      <a:headEnd type="none" w="med" len="med"/>
-                      <a:tailEnd type="none" w="med" len="med"/>
-                    </a:lnL>
-                    <a:lnR w="12700" cap="flat" cmpd="sng" algn="ctr">
-                      <a:solidFill>
-                        <a:srgbClr val="C4C2BE"/>
-                      </a:solidFill>
-                      <a:prstDash val="solid"/>
-                      <a:round/>
-                      <a:headEnd type="none" w="med" len="med"/>
-                      <a:tailEnd type="none" w="med" len="med"/>
-                    </a:lnR>
-                    <a:lnT w="12700" cap="flat" cmpd="sng" algn="ctr">
-                      <a:solidFill>
-                        <a:srgbClr val="C4C2BE"/>
-                      </a:solidFill>
-                      <a:prstDash val="solid"/>
-                      <a:round/>
-                      <a:headEnd type="none" w="med" len="med"/>
-                      <a:tailEnd type="none" w="med" len="med"/>
-                    </a:lnT>
-                    <a:lnB w="12700" cap="flat" cmpd="sng" algn="ctr">
-                      <a:solidFill>
-                        <a:srgbClr val="C4C2BE"/>
-                      </a:solidFill>
-                      <a:prstDash val="solid"/>
-                      <a:round/>
-                      <a:headEnd type="none" w="med" len="med"/>
-                      <a:tailEnd type="none" w="med" len="med"/>
-                    </a:lnB>
-                  </a:tcPr>
-                </a:tc>
-                <a:tc>
-                  <a:txBody>
-                    <a:bodyPr/>
-                    <a:lstStyle/>
-                    <a:p>
-                      <a:pPr indent="0" marL="0">
-                        <a:lnSpc>
-                          <a:spcPts val="1820"/>
-                        </a:lnSpc>
-                        <a:buNone/>
-                      </a:pPr>
-                      <a:r>
-                        <a:rPr lang="en-US" sz="1300" dirty="0">
-                          <a:solidFill>
-                            <a:srgbClr val="1D2433"/>
-                          </a:solidFill>
-                          <a:latin typeface="Noto Sans" pitchFamily="34" charset="0"/>
-                          <a:ea typeface="Noto Sans" pitchFamily="34" charset="-122"/>
-                          <a:cs typeface="Noto Sans" pitchFamily="34" charset="-120"/>
-                        </a:rPr>
-                        <a:t>Teskari siljitilgan p-n oʻtishda fototok hosil boʻladi</a:t>
-                      </a:r>
-                      <a:endParaRPr lang="en-US" sz="1300" dirty="0">
-                        <a:latin typeface="Noto Sans" charset="0"/>
-                        <a:ea typeface="Noto Sans" charset="0"/>
-                        <a:cs typeface="Noto Sans" charset="0"/>
-                      </a:endParaRPr>
-                    </a:p>
-                  </a:txBody>
-                  <a:tcPr marL="127000" marR="127000" marT="88900" marB="88900" anchor="t">
-                    <a:lnL w="12700" cap="flat" cmpd="sng" algn="ctr">
-                      <a:solidFill>
-                        <a:srgbClr val="C4C2BE"/>
-                      </a:solidFill>
-                      <a:prstDash val="solid"/>
-                      <a:round/>
-                      <a:headEnd type="none" w="med" len="med"/>
-                      <a:tailEnd type="none" w="med" len="med"/>
-                    </a:lnL>
-                    <a:lnR w="12700" cap="flat" cmpd="sng" algn="ctr">
-                      <a:solidFill>
-                        <a:srgbClr val="C4C2BE"/>
-                      </a:solidFill>
-                      <a:prstDash val="solid"/>
-                      <a:round/>
-                      <a:headEnd type="none" w="med" len="med"/>
-                      <a:tailEnd type="none" w="med" len="med"/>
-                    </a:lnR>
-                    <a:lnT w="12700" cap="flat" cmpd="sng" algn="ctr">
-                      <a:solidFill>
-                        <a:srgbClr val="C4C2BE"/>
-                      </a:solidFill>
-                      <a:prstDash val="solid"/>
-                      <a:round/>
-                      <a:headEnd type="none" w="med" len="med"/>
-                      <a:tailEnd type="none" w="med" len="med"/>
-                    </a:lnT>
-                    <a:lnB w="12700" cap="flat" cmpd="sng" algn="ctr">
-                      <a:solidFill>
-                        <a:srgbClr val="C4C2BE"/>
-                      </a:solidFill>
-                      <a:prstDash val="solid"/>
-                      <a:round/>
-                      <a:headEnd type="none" w="med" len="med"/>
-                      <a:tailEnd type="none" w="med" len="med"/>
-                    </a:lnB>
-                  </a:tcPr>
-                </a:tc>
-                <a:tc>
-                  <a:txBody>
-                    <a:bodyPr/>
-                    <a:lstStyle/>
-                    <a:p>
-                      <a:pPr indent="0" marL="0">
-                        <a:lnSpc>
-                          <a:spcPts val="1820"/>
-                        </a:lnSpc>
-                        <a:buNone/>
-                      </a:pPr>
-                      <a:r>
-                        <a:rPr lang="en-US" sz="1300" dirty="0">
-                          <a:solidFill>
-                            <a:srgbClr val="1D2433"/>
-                          </a:solidFill>
-                          <a:latin typeface="Noto Sans" pitchFamily="34" charset="0"/>
-                          <a:ea typeface="Noto Sans" pitchFamily="34" charset="-122"/>
-                          <a:cs typeface="Noto Sans" pitchFamily="34" charset="-120"/>
-                        </a:rPr>
-                        <a:t>Juda tez (ns), chiziqli; enkoderlar, optik tola aloqasi</a:t>
-                      </a:r>
-                      <a:endParaRPr lang="en-US" sz="1300" dirty="0">
-                        <a:latin typeface="Noto Sans" charset="0"/>
-                        <a:ea typeface="Noto Sans" charset="0"/>
-                        <a:cs typeface="Noto Sans" charset="0"/>
-                      </a:endParaRPr>
-                    </a:p>
-                  </a:txBody>
-                  <a:tcPr marL="127000" marR="127000" marT="88900" marB="88900" anchor="t">
-                    <a:lnL w="12700" cap="flat" cmpd="sng" algn="ctr">
-                      <a:solidFill>
-                        <a:srgbClr val="C4C2BE"/>
-                      </a:solidFill>
-                      <a:prstDash val="solid"/>
-                      <a:round/>
-                      <a:headEnd type="none" w="med" len="med"/>
-                      <a:tailEnd type="none" w="med" len="med"/>
-                    </a:lnL>
-                    <a:lnR w="12700" cap="flat" cmpd="sng" algn="ctr">
-                      <a:solidFill>
-                        <a:srgbClr val="C4C2BE"/>
-                      </a:solidFill>
-                      <a:prstDash val="solid"/>
-                      <a:round/>
-                      <a:headEnd type="none" w="med" len="med"/>
-                      <a:tailEnd type="none" w="med" len="med"/>
-                    </a:lnR>
-                    <a:lnT w="12700" cap="flat" cmpd="sng" algn="ctr">
-                      <a:solidFill>
-                        <a:srgbClr val="C4C2BE"/>
-                      </a:solidFill>
-                      <a:prstDash val="solid"/>
-                      <a:round/>
-                      <a:headEnd type="none" w="med" len="med"/>
-                      <a:tailEnd type="none" w="med" len="med"/>
-                    </a:lnT>
-                    <a:lnB w="12700" cap="flat" cmpd="sng" algn="ctr">
-                      <a:solidFill>
-                        <a:srgbClr val="C4C2BE"/>
-                      </a:solidFill>
-                      <a:prstDash val="solid"/>
-                      <a:round/>
-                      <a:headEnd type="none" w="med" len="med"/>
-                      <a:tailEnd type="none" w="med" len="med"/>
-                    </a:lnB>
-                  </a:tcPr>
-                </a:tc>
-              </a:tr>
-              <a:tr h="633730">
-                <a:tc>
-                  <a:txBody>
-                    <a:bodyPr/>
-                    <a:lstStyle/>
-                    <a:p>
-                      <a:pPr indent="0" marL="0">
-                        <a:lnSpc>
-                          <a:spcPts val="1820"/>
-                        </a:lnSpc>
-                        <a:buNone/>
-                      </a:pPr>
-                      <a:r>
-                        <a:rPr lang="en-US" sz="1300" dirty="0">
-                          <a:solidFill>
-                            <a:srgbClr val="1D2433"/>
-                          </a:solidFill>
-                          <a:latin typeface="Noto Sans" pitchFamily="34" charset="0"/>
-                          <a:ea typeface="Noto Sans" pitchFamily="34" charset="-122"/>
-                          <a:cs typeface="Noto Sans" pitchFamily="34" charset="-120"/>
-                        </a:rPr>
-                        <a:t>Fototranzistor</a:t>
-                      </a:r>
-                      <a:endParaRPr lang="en-US" sz="1300" dirty="0">
-                        <a:latin typeface="Noto Sans" charset="0"/>
-                        <a:ea typeface="Noto Sans" charset="0"/>
-                        <a:cs typeface="Noto Sans" charset="0"/>
-                      </a:endParaRPr>
-                    </a:p>
-                  </a:txBody>
-                  <a:tcPr marL="127000" marR="127000" marT="88900" marB="88900" anchor="t">
-                    <a:lnL w="12700" cap="flat" cmpd="sng" algn="ctr">
-                      <a:solidFill>
-                        <a:srgbClr val="C4C2BE"/>
-                      </a:solidFill>
-                      <a:prstDash val="solid"/>
-                      <a:round/>
-                      <a:headEnd type="none" w="med" len="med"/>
-                      <a:tailEnd type="none" w="med" len="med"/>
-                    </a:lnL>
-                    <a:lnR w="12700" cap="flat" cmpd="sng" algn="ctr">
-                      <a:solidFill>
-                        <a:srgbClr val="C4C2BE"/>
-                      </a:solidFill>
-                      <a:prstDash val="solid"/>
-                      <a:round/>
-                      <a:headEnd type="none" w="med" len="med"/>
-                      <a:tailEnd type="none" w="med" len="med"/>
-                    </a:lnR>
-                    <a:lnT w="12700" cap="flat" cmpd="sng" algn="ctr">
-                      <a:solidFill>
-                        <a:srgbClr val="C4C2BE"/>
-                      </a:solidFill>
-                      <a:prstDash val="solid"/>
-                      <a:round/>
-                      <a:headEnd type="none" w="med" len="med"/>
-                      <a:tailEnd type="none" w="med" len="med"/>
-                    </a:lnT>
-                    <a:lnB w="12700" cap="flat" cmpd="sng" algn="ctr">
-                      <a:solidFill>
-                        <a:srgbClr val="C4C2BE"/>
-                      </a:solidFill>
-                      <a:prstDash val="solid"/>
-                      <a:round/>
-                      <a:headEnd type="none" w="med" len="med"/>
-                      <a:tailEnd type="none" w="med" len="med"/>
-                    </a:lnB>
-                  </a:tcPr>
-                </a:tc>
-                <a:tc>
-                  <a:txBody>
-                    <a:bodyPr/>
-                    <a:lstStyle/>
-                    <a:p>
-                      <a:pPr indent="0" marL="0">
-                        <a:lnSpc>
-                          <a:spcPts val="1820"/>
-                        </a:lnSpc>
-                        <a:buNone/>
-                      </a:pPr>
-                      <a:r>
-                        <a:rPr lang="en-US" sz="1300" dirty="0">
-                          <a:solidFill>
-                            <a:srgbClr val="1D2433"/>
-                          </a:solidFill>
-                          <a:latin typeface="Noto Sans" pitchFamily="34" charset="0"/>
-                          <a:ea typeface="Noto Sans" pitchFamily="34" charset="-122"/>
-                          <a:cs typeface="Noto Sans" pitchFamily="34" charset="-120"/>
-                        </a:rPr>
-                        <a:t>Fotodiod va tranzistor kuchaytirgichi birikmasi</a:t>
-                      </a:r>
-                      <a:endParaRPr lang="en-US" sz="1300" dirty="0">
-                        <a:latin typeface="Noto Sans" charset="0"/>
-                        <a:ea typeface="Noto Sans" charset="0"/>
-                        <a:cs typeface="Noto Sans" charset="0"/>
-                      </a:endParaRPr>
-                    </a:p>
-                  </a:txBody>
-                  <a:tcPr marL="127000" marR="127000" marT="88900" marB="88900" anchor="t">
-                    <a:lnL w="12700" cap="flat" cmpd="sng" algn="ctr">
-                      <a:solidFill>
-                        <a:srgbClr val="C4C2BE"/>
-                      </a:solidFill>
-                      <a:prstDash val="solid"/>
-                      <a:round/>
-                      <a:headEnd type="none" w="med" len="med"/>
-                      <a:tailEnd type="none" w="med" len="med"/>
-                    </a:lnL>
-                    <a:lnR w="12700" cap="flat" cmpd="sng" algn="ctr">
-                      <a:solidFill>
-                        <a:srgbClr val="C4C2BE"/>
-                      </a:solidFill>
-                      <a:prstDash val="solid"/>
-                      <a:round/>
-                      <a:headEnd type="none" w="med" len="med"/>
-                      <a:tailEnd type="none" w="med" len="med"/>
-                    </a:lnR>
-                    <a:lnT w="12700" cap="flat" cmpd="sng" algn="ctr">
-                      <a:solidFill>
-                        <a:srgbClr val="C4C2BE"/>
-                      </a:solidFill>
-                      <a:prstDash val="solid"/>
-                      <a:round/>
-                      <a:headEnd type="none" w="med" len="med"/>
-                      <a:tailEnd type="none" w="med" len="med"/>
-                    </a:lnT>
-                    <a:lnB w="12700" cap="flat" cmpd="sng" algn="ctr">
-                      <a:solidFill>
-                        <a:srgbClr val="C4C2BE"/>
-                      </a:solidFill>
-                      <a:prstDash val="solid"/>
-                      <a:round/>
-                      <a:headEnd type="none" w="med" len="med"/>
-                      <a:tailEnd type="none" w="med" len="med"/>
-                    </a:lnB>
-                  </a:tcPr>
-                </a:tc>
-                <a:tc>
-                  <a:txBody>
-                    <a:bodyPr/>
-                    <a:lstStyle/>
-                    <a:p>
-                      <a:pPr indent="0" marL="0">
-                        <a:lnSpc>
-                          <a:spcPts val="1820"/>
-                        </a:lnSpc>
-                        <a:buNone/>
-                      </a:pPr>
-                      <a:r>
-                        <a:rPr lang="en-US" sz="1300" dirty="0">
-                          <a:solidFill>
-                            <a:srgbClr val="1D2433"/>
-                          </a:solidFill>
-                          <a:latin typeface="Noto Sans" pitchFamily="34" charset="0"/>
-                          <a:ea typeface="Noto Sans" pitchFamily="34" charset="-122"/>
-                          <a:cs typeface="Noto Sans" pitchFamily="34" charset="-120"/>
-                        </a:rPr>
-                        <a:t>Fotodioddan 100…500 marta sezgirroq, sekinroq; optoparalar</a:t>
-                      </a:r>
-                      <a:endParaRPr lang="en-US" sz="1300" dirty="0">
-                        <a:latin typeface="Noto Sans" charset="0"/>
-                        <a:ea typeface="Noto Sans" charset="0"/>
-                        <a:cs typeface="Noto Sans" charset="0"/>
-                      </a:endParaRPr>
-                    </a:p>
-                  </a:txBody>
-                  <a:tcPr marL="127000" marR="127000" marT="88900" marB="88900" anchor="t">
-                    <a:lnL w="12700" cap="flat" cmpd="sng" algn="ctr">
-                      <a:solidFill>
-                        <a:srgbClr val="C4C2BE"/>
-                      </a:solidFill>
-                      <a:prstDash val="solid"/>
-                      <a:round/>
-                      <a:headEnd type="none" w="med" len="med"/>
-                      <a:tailEnd type="none" w="med" len="med"/>
-                    </a:lnL>
-                    <a:lnR w="12700" cap="flat" cmpd="sng" algn="ctr">
-                      <a:solidFill>
-                        <a:srgbClr val="C4C2BE"/>
-                      </a:solidFill>
-                      <a:prstDash val="solid"/>
-                      <a:round/>
-                      <a:headEnd type="none" w="med" len="med"/>
-                      <a:tailEnd type="none" w="med" len="med"/>
-                    </a:lnR>
-                    <a:lnT w="12700" cap="flat" cmpd="sng" algn="ctr">
-                      <a:solidFill>
-                        <a:srgbClr val="C4C2BE"/>
-                      </a:solidFill>
-                      <a:prstDash val="solid"/>
-                      <a:round/>
-                      <a:headEnd type="none" w="med" len="med"/>
-                      <a:tailEnd type="none" w="med" len="med"/>
-                    </a:lnT>
-                    <a:lnB w="12700" cap="flat" cmpd="sng" algn="ctr">
-                      <a:solidFill>
-                        <a:srgbClr val="C4C2BE"/>
-                      </a:solidFill>
-                      <a:prstDash val="solid"/>
-                      <a:round/>
-                      <a:headEnd type="none" w="med" len="med"/>
-                      <a:tailEnd type="none" w="med" len="med"/>
-                    </a:lnB>
-                  </a:tcPr>
-                </a:tc>
-              </a:tr>
-              <a:tr h="633730">
-                <a:tc>
-                  <a:txBody>
-                    <a:bodyPr/>
-                    <a:lstStyle/>
-                    <a:p>
-                      <a:pPr indent="0" marL="0">
-                        <a:lnSpc>
-                          <a:spcPts val="1820"/>
-                        </a:lnSpc>
-                        <a:buNone/>
-                      </a:pPr>
-                      <a:r>
-                        <a:rPr lang="en-US" sz="1300" dirty="0">
-                          <a:solidFill>
-                            <a:srgbClr val="1D2433"/>
-                          </a:solidFill>
-                          <a:latin typeface="Noto Sans" pitchFamily="34" charset="0"/>
-                          <a:ea typeface="Noto Sans" pitchFamily="34" charset="-122"/>
-                          <a:cs typeface="Noto Sans" pitchFamily="34" charset="-120"/>
-                        </a:rPr>
-                        <a:t>Optik enkoder</a:t>
-                      </a:r>
-                      <a:endParaRPr lang="en-US" sz="1300" dirty="0">
-                        <a:latin typeface="Noto Sans" charset="0"/>
-                        <a:ea typeface="Noto Sans" charset="0"/>
-                        <a:cs typeface="Noto Sans" charset="0"/>
-                      </a:endParaRPr>
-                    </a:p>
-                  </a:txBody>
-                  <a:tcPr marL="127000" marR="127000" marT="88900" marB="88900" anchor="t">
-                    <a:lnL w="12700" cap="flat" cmpd="sng" algn="ctr">
-                      <a:solidFill>
-                        <a:srgbClr val="C4C2BE"/>
-                      </a:solidFill>
-                      <a:prstDash val="solid"/>
-                      <a:round/>
-                      <a:headEnd type="none" w="med" len="med"/>
-                      <a:tailEnd type="none" w="med" len="med"/>
-                    </a:lnL>
-                    <a:lnR w="12700" cap="flat" cmpd="sng" algn="ctr">
-                      <a:solidFill>
-                        <a:srgbClr val="C4C2BE"/>
-                      </a:solidFill>
-                      <a:prstDash val="solid"/>
-                      <a:round/>
-                      <a:headEnd type="none" w="med" len="med"/>
-                      <a:tailEnd type="none" w="med" len="med"/>
-                    </a:lnR>
-                    <a:lnT w="12700" cap="flat" cmpd="sng" algn="ctr">
-                      <a:solidFill>
-                        <a:srgbClr val="C4C2BE"/>
-                      </a:solidFill>
-                      <a:prstDash val="solid"/>
-                      <a:round/>
-                      <a:headEnd type="none" w="med" len="med"/>
-                      <a:tailEnd type="none" w="med" len="med"/>
-                    </a:lnT>
-                    <a:lnB w="12700" cap="flat" cmpd="sng" algn="ctr">
-                      <a:solidFill>
-                        <a:srgbClr val="C4C2BE"/>
-                      </a:solidFill>
-                      <a:prstDash val="solid"/>
-                      <a:round/>
-                      <a:headEnd type="none" w="med" len="med"/>
-                      <a:tailEnd type="none" w="med" len="med"/>
-                    </a:lnB>
-                  </a:tcPr>
-                </a:tc>
-                <a:tc>
-                  <a:txBody>
-                    <a:bodyPr/>
-                    <a:lstStyle/>
-                    <a:p>
-                      <a:pPr indent="0" marL="0">
-                        <a:lnSpc>
-                          <a:spcPts val="1820"/>
-                        </a:lnSpc>
-                        <a:buNone/>
-                      </a:pPr>
-                      <a:r>
-                        <a:rPr lang="en-US" sz="1300" dirty="0">
-                          <a:solidFill>
-                            <a:srgbClr val="1D2433"/>
-                          </a:solidFill>
-                          <a:latin typeface="Noto Sans" pitchFamily="34" charset="0"/>
-                          <a:ea typeface="Noto Sans" pitchFamily="34" charset="-122"/>
-                          <a:cs typeface="Noto Sans" pitchFamily="34" charset="-120"/>
-                        </a:rPr>
-                        <a:t>Disk tirqishlari orqali oʻtgan nurni sanash</a:t>
-                      </a:r>
-                      <a:endParaRPr lang="en-US" sz="1300" dirty="0">
-                        <a:latin typeface="Noto Sans" charset="0"/>
-                        <a:ea typeface="Noto Sans" charset="0"/>
-                        <a:cs typeface="Noto Sans" charset="0"/>
-                      </a:endParaRPr>
-                    </a:p>
-                  </a:txBody>
-                  <a:tcPr marL="127000" marR="127000" marT="88900" marB="88900" anchor="t">
-                    <a:lnL w="12700" cap="flat" cmpd="sng" algn="ctr">
-                      <a:solidFill>
-                        <a:srgbClr val="C4C2BE"/>
-                      </a:solidFill>
-                      <a:prstDash val="solid"/>
-                      <a:round/>
-                      <a:headEnd type="none" w="med" len="med"/>
-                      <a:tailEnd type="none" w="med" len="med"/>
-                    </a:lnL>
-                    <a:lnR w="12700" cap="flat" cmpd="sng" algn="ctr">
-                      <a:solidFill>
-                        <a:srgbClr val="C4C2BE"/>
-                      </a:solidFill>
-                      <a:prstDash val="solid"/>
-                      <a:round/>
-                      <a:headEnd type="none" w="med" len="med"/>
-                      <a:tailEnd type="none" w="med" len="med"/>
-                    </a:lnR>
-                    <a:lnT w="12700" cap="flat" cmpd="sng" algn="ctr">
-                      <a:solidFill>
-                        <a:srgbClr val="C4C2BE"/>
-                      </a:solidFill>
-                      <a:prstDash val="solid"/>
-                      <a:round/>
-                      <a:headEnd type="none" w="med" len="med"/>
-                      <a:tailEnd type="none" w="med" len="med"/>
-                    </a:lnT>
-                    <a:lnB w="12700" cap="flat" cmpd="sng" algn="ctr">
-                      <a:solidFill>
-                        <a:srgbClr val="C4C2BE"/>
-                      </a:solidFill>
-                      <a:prstDash val="solid"/>
-                      <a:round/>
-                      <a:headEnd type="none" w="med" len="med"/>
-                      <a:tailEnd type="none" w="med" len="med"/>
-                    </a:lnB>
-                  </a:tcPr>
-                </a:tc>
-                <a:tc>
-                  <a:txBody>
-                    <a:bodyPr/>
-                    <a:lstStyle/>
-                    <a:p>
-                      <a:pPr indent="0" marL="0">
-                        <a:lnSpc>
-                          <a:spcPts val="1820"/>
-                        </a:lnSpc>
-                        <a:buNone/>
-                      </a:pPr>
-                      <a:r>
-                        <a:rPr lang="en-US" sz="1300" dirty="0">
-                          <a:solidFill>
-                            <a:srgbClr val="1D2433"/>
-                          </a:solidFill>
-                          <a:latin typeface="Noto Sans" pitchFamily="34" charset="0"/>
-                          <a:ea typeface="Noto Sans" pitchFamily="34" charset="-122"/>
-                          <a:cs typeface="Noto Sans" pitchFamily="34" charset="-120"/>
-                        </a:rPr>
-                        <a:t>1024…65 536 ppr; robot boʻgʻinlari va motor vallari</a:t>
-                      </a:r>
-                      <a:endParaRPr lang="en-US" sz="1300" dirty="0">
-                        <a:latin typeface="Noto Sans" charset="0"/>
-                        <a:ea typeface="Noto Sans" charset="0"/>
-                        <a:cs typeface="Noto Sans" charset="0"/>
-                      </a:endParaRPr>
-                    </a:p>
-                  </a:txBody>
-                  <a:tcPr marL="127000" marR="127000" marT="88900" marB="88900" anchor="t">
-                    <a:lnL w="12700" cap="flat" cmpd="sng" algn="ctr">
-                      <a:solidFill>
-                        <a:srgbClr val="C4C2BE"/>
-                      </a:solidFill>
-                      <a:prstDash val="solid"/>
-                      <a:round/>
-                      <a:headEnd type="none" w="med" len="med"/>
-                      <a:tailEnd type="none" w="med" len="med"/>
-                    </a:lnL>
-                    <a:lnR w="12700" cap="flat" cmpd="sng" algn="ctr">
-                      <a:solidFill>
-                        <a:srgbClr val="C4C2BE"/>
-                      </a:solidFill>
-                      <a:prstDash val="solid"/>
-                      <a:round/>
-                      <a:headEnd type="none" w="med" len="med"/>
-                      <a:tailEnd type="none" w="med" len="med"/>
-                    </a:lnR>
-                    <a:lnT w="12700" cap="flat" cmpd="sng" algn="ctr">
-                      <a:solidFill>
-                        <a:srgbClr val="C4C2BE"/>
-                      </a:solidFill>
-                      <a:prstDash val="solid"/>
-                      <a:round/>
-                      <a:headEnd type="none" w="med" len="med"/>
-                      <a:tailEnd type="none" w="med" len="med"/>
-                    </a:lnT>
-                    <a:lnB w="12700" cap="flat" cmpd="sng" algn="ctr">
-                      <a:solidFill>
-                        <a:srgbClr val="C4C2BE"/>
-                      </a:solidFill>
-                      <a:prstDash val="solid"/>
-                      <a:round/>
-                      <a:headEnd type="none" w="med" len="med"/>
-                      <a:tailEnd type="none" w="med" len="med"/>
-                    </a:lnB>
-                  </a:tcPr>
-                </a:tc>
-              </a:tr>
-            </a:tbl>
-          </a:graphicData>
-        </a:graphic>
-      </p:graphicFrame>
-      <p:sp>
-        <p:nvSpPr>
-          <p:cNvPr id="5" name="Text 2"/>
-          <p:cNvSpPr/>
-          <p:nvPr/>
-        </p:nvSpPr>
-        <p:spPr>
-          <a:xfrm>
-            <a:off x="812800" y="5013325"/>
-            <a:ext cx="10883392" cy="274320"/>
-          </a:xfrm>
-          <a:prstGeom prst="rect">
-            <a:avLst/>
-          </a:prstGeom>
-          <a:noFill/>
-          <a:ln/>
-        </p:spPr>
-        <p:txBody>
-          <a:bodyPr wrap="square" lIns="0" tIns="0" rIns="0" bIns="0" rtlCol="0" anchor="t">
-            <a:normAutofit/>
-          </a:bodyPr>
-          <a:lstStyle/>
-          <a:p>
-            <a:pPr algn="l" indent="0" marL="0">
-              <a:lnSpc>
-                <a:spcPts val="1960"/>
-              </a:lnSpc>
-              <a:buNone/>
-            </a:pPr>
-            <a:r>
-              <a:rPr lang="en-US" sz="1400" dirty="0">
-                <a:solidFill>
-                  <a:srgbClr val="4B5563"/>
-                </a:solidFill>
-                <a:latin typeface="Noto Sans" pitchFamily="34" charset="0"/>
-                <a:ea typeface="Noto Sans" pitchFamily="34" charset="-122"/>
-                <a:cs typeface="Noto Sans" pitchFamily="34" charset="-120"/>
-              </a:rPr>
-              <a:t>Optopara galvanik ajratish uchun ham ishlatiladi: signal yorugʻlik orqali uzatiladi, zanjirlar elektr jihatdan bogʻlanmaydi.</a:t>
-            </a:r>
-            <a:endParaRPr lang="en-US" sz="1400" dirty="0"/>
-          </a:p>
-        </p:txBody>
-      </p:sp>
-      <p:sp>
-        <p:nvSpPr>
-          <p:cNvPr id="6" name="Text 3"/>
-          <p:cNvSpPr/>
-          <p:nvPr/>
-        </p:nvSpPr>
-        <p:spPr>
-          <a:xfrm>
-            <a:off x="812800" y="6238239"/>
-            <a:ext cx="10883392" cy="238760"/>
-          </a:xfrm>
-          <a:prstGeom prst="rect">
-            <a:avLst/>
-          </a:prstGeom>
-          <a:noFill/>
-          <a:ln/>
-        </p:spPr>
-        <p:txBody>
-          <a:bodyPr wrap="square" lIns="0" tIns="0" rIns="0" bIns="0" rtlCol="0" anchor="t">
-            <a:normAutofit/>
-          </a:bodyPr>
-          <a:lstStyle/>
-          <a:p>
-            <a:pPr algn="l" indent="0" marL="0">
-              <a:lnSpc>
-                <a:spcPts val="1680"/>
-              </a:lnSpc>
-              <a:buNone/>
-            </a:pPr>
-            <a:r>
-              <a:rPr lang="en-US" sz="1200" dirty="0">
-                <a:solidFill>
-                  <a:srgbClr val="6B7280"/>
-                </a:solidFill>
-                <a:latin typeface="Noto Sans" pitchFamily="34" charset="0"/>
-                <a:ea typeface="Noto Sans" pitchFamily="34" charset="-122"/>
-                <a:cs typeface="Noto Sans" pitchFamily="34" charset="-120"/>
-              </a:rPr>
-              <a:t>Amaliyot №6 · Optik va temperatura datchiklari · 06</a:t>
-            </a:r>
-            <a:endParaRPr lang="en-US" sz="1200" dirty="0"/>
-          </a:p>
-        </p:txBody>
-      </p:sp>
-    </p:spTree>
-  </p:cSld>
-  <p:clrMapOvr>
-    <a:masterClrMapping/>
-  </p:clrMapOvr>
-</p:sld>
-</file>
-
-<file path=ppt/slides/slide7.xml><?xml version="1.0" encoding="utf-8"?>
-<p:sld xmlns:a="http://schemas.openxmlformats.org/drawingml/2006/main" xmlns:r="http://schemas.openxmlformats.org/officeDocument/2006/relationships" xmlns:p="http://schemas.openxmlformats.org/presentationml/2006/main">
-  <p:cSld name="Slide 7">
-    <p:bg>
-      <p:bgPr>
-        <a:solidFill>
-          <a:srgbClr val="F5F3EE"/>
-        </a:solidFill>
-      </p:bgPr>
-    </p:bg>
-    <p:spTree>
-      <p:nvGrpSpPr>
-        <p:cNvPr id="1" name=""/>
-        <p:cNvGrpSpPr/>
-        <p:nvPr/>
-      </p:nvGrpSpPr>
-      <p:grpSpPr>
-        <a:xfrm>
-          <a:off x="0" y="0"/>
-          <a:ext cx="0" cy="0"/>
-          <a:chOff x="0" y="0"/>
-          <a:chExt cx="0" cy="0"/>
-        </a:xfrm>
-      </p:grpSpPr>
-      <p:sp>
-        <p:nvSpPr>
-          <p:cNvPr id="2" name="Text 0"/>
-          <p:cNvSpPr/>
-          <p:nvPr/>
-        </p:nvSpPr>
-        <p:spPr>
-          <a:xfrm>
-            <a:off x="812800" y="812800"/>
-            <a:ext cx="10883392" cy="238760"/>
-          </a:xfrm>
-          <a:prstGeom prst="rect">
-            <a:avLst/>
-          </a:prstGeom>
-          <a:noFill/>
-          <a:ln/>
-        </p:spPr>
-        <p:txBody>
-          <a:bodyPr wrap="square" lIns="0" tIns="0" rIns="0" bIns="0" rtlCol="0" anchor="t">
-            <a:normAutofit/>
-          </a:bodyPr>
-          <a:lstStyle/>
-          <a:p>
-            <a:pPr algn="l" indent="0" marL="0">
-              <a:lnSpc>
-                <a:spcPts val="1680"/>
-              </a:lnSpc>
-              <a:buNone/>
-            </a:pPr>
-            <a:r>
-              <a:rPr lang="en-US" sz="1200" b="1" spc="100" kern="0" dirty="0">
-                <a:solidFill>
-                  <a:srgbClr val="B5521A"/>
-                </a:solidFill>
-                <a:latin typeface="Noto Sans" pitchFamily="34" charset="0"/>
-                <a:ea typeface="Noto Sans" pitchFamily="34" charset="-122"/>
-                <a:cs typeface="Noto Sans" pitchFamily="34" charset="-120"/>
-              </a:rPr>
-              <a:t>OPTIK DATCHIKLAR</a:t>
-            </a:r>
-            <a:endParaRPr lang="en-US" sz="1200" dirty="0"/>
-          </a:p>
-        </p:txBody>
-      </p:sp>
-      <p:sp>
-        <p:nvSpPr>
-          <p:cNvPr id="3" name="Text 1"/>
-          <p:cNvSpPr/>
-          <p:nvPr>
-            <p:ph type="title"/>
-          </p:nvPr>
-        </p:nvSpPr>
-        <p:spPr>
-          <a:xfrm>
-            <a:off x="812800" y="1102361"/>
-            <a:ext cx="10883392" cy="472440"/>
-          </a:xfrm>
-          <a:prstGeom prst="rect">
-            <a:avLst/>
-          </a:prstGeom>
-          <a:noFill/>
-          <a:ln/>
-        </p:spPr>
-        <p:txBody>
-          <a:bodyPr wrap="square" lIns="0" tIns="0" rIns="0" bIns="0" rtlCol="0" anchor="t">
-            <a:normAutofit/>
-          </a:bodyPr>
-          <a:lstStyle/>
-          <a:p>
-            <a:pPr algn="l" indent="0" marL="0">
-              <a:lnSpc>
-                <a:spcPts val="3520"/>
-              </a:lnSpc>
-              <a:buNone/>
-            </a:pPr>
-            <a:r>
-              <a:rPr lang="en-US" sz="3200" b="1" i="0" dirty="0">
-                <a:solidFill>
-                  <a:srgbClr val="16233B"/>
-                </a:solidFill>
-                <a:latin typeface="Noto Sans" pitchFamily="34" charset="0"/>
-                <a:ea typeface="Noto Sans" pitchFamily="34" charset="-122"/>
-                <a:cs typeface="Noto Sans" pitchFamily="34" charset="-120"/>
-              </a:rPr>
-              <a:t>Fotodiod va transimpedans kuchaytirgich (TIA)</a:t>
-            </a:r>
-            <a:endParaRPr lang="en-US" sz="3200" dirty="0"/>
-          </a:p>
-        </p:txBody>
-      </p:sp>
-      <p:pic>
-        <p:nvPicPr>
-          <p:cNvPr id="4" name="Image 0" descr="TIA sxemasi: LED nuri fotodiodga tushadi, fototok operatsion kuchaytirgichning inverslovchi kirishiga beriladi, Rf qayta aloqa qarshiligi chiqishdan kirishga ulangan">    </p:cNvPr>
-          <p:cNvPicPr>
-            <a:picLocks noChangeAspect="1"/>
-          </p:cNvPicPr>
-          <p:nvPr/>
-        </p:nvPicPr>
-        <p:blipFill>
-          <a:blip r:embed="rId1"/>
-          <a:srcRect l="0" r="0" t="0" b="0"/>
-          <a:stretch/>
-        </p:blipFill>
-        <p:spPr>
-          <a:xfrm>
-            <a:off x="812800" y="1803400"/>
-            <a:ext cx="5715000" cy="3302000"/>
-          </a:xfrm>
-          <a:prstGeom prst="rect">
-            <a:avLst/>
-          </a:prstGeom>
-        </p:spPr>
-      </p:pic>
-      <p:sp>
-        <p:nvSpPr>
-          <p:cNvPr id="5" name="Text 2"/>
-          <p:cNvSpPr/>
-          <p:nvPr/>
-        </p:nvSpPr>
-        <p:spPr>
-          <a:xfrm>
-            <a:off x="6883400" y="2335529"/>
-            <a:ext cx="4630674" cy="238760"/>
-          </a:xfrm>
-          <a:prstGeom prst="rect">
-            <a:avLst/>
-          </a:prstGeom>
-          <a:noFill/>
-          <a:ln/>
-        </p:spPr>
-        <p:txBody>
-          <a:bodyPr wrap="square" lIns="0" tIns="0" rIns="0" bIns="0" rtlCol="0" anchor="t">
-            <a:normAutofit/>
-          </a:bodyPr>
-          <a:lstStyle/>
-          <a:p>
-            <a:pPr algn="l" indent="0" marL="0">
-              <a:lnSpc>
-                <a:spcPts val="1680"/>
-              </a:lnSpc>
-              <a:buNone/>
-            </a:pPr>
-            <a:r>
-              <a:rPr lang="en-US" sz="1200" b="1" dirty="0">
-                <a:solidFill>
-                  <a:srgbClr val="2D6CB0"/>
-                </a:solidFill>
-                <a:latin typeface="Noto Sans" pitchFamily="34" charset="0"/>
-                <a:ea typeface="Noto Sans" pitchFamily="34" charset="-122"/>
-                <a:cs typeface="Noto Sans" pitchFamily="34" charset="-120"/>
-              </a:rPr>
-              <a:t>Fototok</a:t>
-            </a:r>
-            <a:endParaRPr lang="en-US" sz="1200" dirty="0"/>
-          </a:p>
-        </p:txBody>
-      </p:sp>
-      <p:sp>
-        <p:nvSpPr>
-          <p:cNvPr id="6" name="Text 3"/>
-          <p:cNvSpPr/>
-          <p:nvPr/>
-        </p:nvSpPr>
-        <p:spPr>
-          <a:xfrm>
-            <a:off x="6883400" y="2599689"/>
-            <a:ext cx="4630674" cy="381000"/>
-          </a:xfrm>
-          <a:prstGeom prst="rect">
-            <a:avLst/>
-          </a:prstGeom>
-          <a:noFill/>
-          <a:ln/>
-        </p:spPr>
-        <p:txBody>
-          <a:bodyPr wrap="square" lIns="0" tIns="0" rIns="0" bIns="0" rtlCol="0" anchor="t">
-            <a:normAutofit/>
-          </a:bodyPr>
-          <a:lstStyle/>
-          <a:p>
-            <a:pPr algn="l" indent="0" marL="0">
-              <a:lnSpc>
-                <a:spcPts val="2800"/>
-              </a:lnSpc>
-              <a:buNone/>
-            </a:pPr>
-            <a:r>
-              <a:rPr lang="en-US" sz="2000" b="1" dirty="0">
-                <a:solidFill>
-                  <a:srgbClr val="1D2433"/>
-                </a:solidFill>
-                <a:latin typeface="Noto Sans" pitchFamily="34" charset="0"/>
-                <a:ea typeface="Noto Sans" pitchFamily="34" charset="-122"/>
-                <a:cs typeface="Noto Sans" pitchFamily="34" charset="-120"/>
-              </a:rPr>
-              <a:t>I(ph) = R(photo) · P(opt)</a:t>
-            </a:r>
-            <a:endParaRPr lang="en-US" sz="2000" dirty="0"/>
-          </a:p>
-        </p:txBody>
-      </p:sp>
-      <p:sp>
-        <p:nvSpPr>
-          <p:cNvPr id="7" name="Text 4"/>
-          <p:cNvSpPr/>
-          <p:nvPr/>
-        </p:nvSpPr>
-        <p:spPr>
-          <a:xfrm>
-            <a:off x="6883400" y="3107689"/>
-            <a:ext cx="4630674" cy="238760"/>
-          </a:xfrm>
-          <a:prstGeom prst="rect">
-            <a:avLst/>
-          </a:prstGeom>
-          <a:noFill/>
-          <a:ln/>
-        </p:spPr>
-        <p:txBody>
-          <a:bodyPr wrap="square" lIns="0" tIns="0" rIns="0" bIns="0" rtlCol="0" anchor="t">
-            <a:normAutofit/>
-          </a:bodyPr>
-          <a:lstStyle/>
-          <a:p>
-            <a:pPr algn="l" indent="0" marL="0">
-              <a:lnSpc>
-                <a:spcPts val="1680"/>
-              </a:lnSpc>
-              <a:buNone/>
-            </a:pPr>
-            <a:r>
-              <a:rPr lang="en-US" sz="1200" b="1" dirty="0">
-                <a:solidFill>
-                  <a:srgbClr val="2D6CB0"/>
-                </a:solidFill>
-                <a:latin typeface="Noto Sans" pitchFamily="34" charset="0"/>
-                <a:ea typeface="Noto Sans" pitchFamily="34" charset="-122"/>
-                <a:cs typeface="Noto Sans" pitchFamily="34" charset="-120"/>
-              </a:rPr>
-              <a:t>Chiqish kuchlanishi</a:t>
-            </a:r>
-            <a:endParaRPr lang="en-US" sz="1200" dirty="0"/>
-          </a:p>
-        </p:txBody>
-      </p:sp>
-      <p:sp>
-        <p:nvSpPr>
-          <p:cNvPr id="8" name="Text 5"/>
-          <p:cNvSpPr/>
-          <p:nvPr/>
-        </p:nvSpPr>
-        <p:spPr>
-          <a:xfrm>
-            <a:off x="6883400" y="3371850"/>
-            <a:ext cx="4630674" cy="381000"/>
-          </a:xfrm>
-          <a:prstGeom prst="rect">
-            <a:avLst/>
-          </a:prstGeom>
-          <a:noFill/>
-          <a:ln/>
-        </p:spPr>
-        <p:txBody>
-          <a:bodyPr wrap="square" lIns="0" tIns="0" rIns="0" bIns="0" rtlCol="0" anchor="t">
-            <a:normAutofit/>
-          </a:bodyPr>
-          <a:lstStyle/>
-          <a:p>
-            <a:pPr algn="l" indent="0" marL="0">
-              <a:lnSpc>
-                <a:spcPts val="2800"/>
-              </a:lnSpc>
-              <a:buNone/>
-            </a:pPr>
-            <a:r>
-              <a:rPr lang="en-US" sz="2000" b="1" dirty="0">
-                <a:solidFill>
-                  <a:srgbClr val="1D2433"/>
-                </a:solidFill>
-                <a:latin typeface="Noto Sans" pitchFamily="34" charset="0"/>
-                <a:ea typeface="Noto Sans" pitchFamily="34" charset="-122"/>
-                <a:cs typeface="Noto Sans" pitchFamily="34" charset="-120"/>
-              </a:rPr>
-              <a:t>V(out) = I(ph) · Rf</a:t>
-            </a:r>
-            <a:endParaRPr lang="en-US" sz="2000" dirty="0"/>
-          </a:p>
-        </p:txBody>
-      </p:sp>
-      <p:sp>
-        <p:nvSpPr>
-          <p:cNvPr id="9" name="Text 6"/>
-          <p:cNvSpPr/>
-          <p:nvPr/>
-        </p:nvSpPr>
-        <p:spPr>
-          <a:xfrm>
-            <a:off x="6883400" y="3879850"/>
-            <a:ext cx="4630674" cy="718820"/>
-          </a:xfrm>
-          <a:prstGeom prst="rect">
-            <a:avLst/>
-          </a:prstGeom>
-          <a:noFill/>
-          <a:ln/>
-        </p:spPr>
-        <p:txBody>
-          <a:bodyPr wrap="square" lIns="0" tIns="0" rIns="0" bIns="0" rtlCol="0" anchor="t">
-            <a:normAutofit/>
-          </a:bodyPr>
-          <a:lstStyle/>
-          <a:p>
-            <a:pPr algn="l" indent="0" marL="0">
-              <a:lnSpc>
-                <a:spcPts val="1820"/>
-              </a:lnSpc>
-              <a:buNone/>
-            </a:pPr>
-            <a:r>
-              <a:rPr lang="en-US" sz="1300" dirty="0">
-                <a:solidFill>
-                  <a:srgbClr val="1D2433"/>
-                </a:solidFill>
-                <a:latin typeface="Noto Sans" pitchFamily="34" charset="0"/>
-                <a:ea typeface="Noto Sans" pitchFamily="34" charset="-122"/>
-                <a:cs typeface="Noto Sans" pitchFamily="34" charset="-120"/>
-              </a:rPr>
-              <a:t>TIA fotodiodning kichik tokini (nA…µA) oʻlchanadigan kuchlanishga aylantiradi va fotodiod kuchlanishini deyarli nol ushlaydi — bu tezkorlik va chiziqlilikni oshiradi.</a:t>
-            </a:r>
-            <a:endParaRPr lang="en-US" sz="1300" dirty="0"/>
-          </a:p>
-        </p:txBody>
-      </p:sp>
-      <p:sp>
-        <p:nvSpPr>
-          <p:cNvPr id="10" name="Text 7"/>
-          <p:cNvSpPr/>
-          <p:nvPr/>
-        </p:nvSpPr>
-        <p:spPr>
-          <a:xfrm>
-            <a:off x="812800" y="6238239"/>
-            <a:ext cx="10883392" cy="238760"/>
-          </a:xfrm>
-          <a:prstGeom prst="rect">
-            <a:avLst/>
-          </a:prstGeom>
-          <a:noFill/>
-          <a:ln/>
-        </p:spPr>
-        <p:txBody>
-          <a:bodyPr wrap="square" lIns="0" tIns="0" rIns="0" bIns="0" rtlCol="0" anchor="t">
-            <a:normAutofit/>
-          </a:bodyPr>
-          <a:lstStyle/>
-          <a:p>
-            <a:pPr algn="l" indent="0" marL="0">
-              <a:lnSpc>
-                <a:spcPts val="1680"/>
-              </a:lnSpc>
-              <a:buNone/>
-            </a:pPr>
-            <a:r>
-              <a:rPr lang="en-US" sz="1200" dirty="0">
-                <a:solidFill>
-                  <a:srgbClr val="6B7280"/>
-                </a:solidFill>
-                <a:latin typeface="Noto Sans" pitchFamily="34" charset="0"/>
-                <a:ea typeface="Noto Sans" pitchFamily="34" charset="-122"/>
-                <a:cs typeface="Noto Sans" pitchFamily="34" charset="-120"/>
-              </a:rPr>
-              <a:t>Amaliyot №6 · Optik va temperatura datchiklari · 07</a:t>
-            </a:r>
-            <a:endParaRPr lang="en-US" sz="1200" dirty="0"/>
-          </a:p>
-        </p:txBody>
-      </p:sp>
-    </p:spTree>
-  </p:cSld>
-  <p:clrMapOvr>
-    <a:masterClrMapping/>
-  </p:clrMapOvr>
-</p:sld>
-</file>
-
-<file path=ppt/slides/slide8.xml><?xml version="1.0" encoding="utf-8"?>
-<p:sld xmlns:a="http://schemas.openxmlformats.org/drawingml/2006/main" xmlns:r="http://schemas.openxmlformats.org/officeDocument/2006/relationships" xmlns:p="http://schemas.openxmlformats.org/presentationml/2006/main">
-  <p:cSld name="Slide 8">
-    <p:bg>
-      <p:bgPr>
-        <a:solidFill>
-          <a:srgbClr val="F5F3EE"/>
-        </a:solidFill>
-      </p:bgPr>
-    </p:bg>
-    <p:spTree>
-      <p:nvGrpSpPr>
-        <p:cNvPr id="1" name=""/>
-        <p:cNvGrpSpPr/>
-        <p:nvPr/>
-      </p:nvGrpSpPr>
-      <p:grpSpPr>
-        <a:xfrm>
-          <a:off x="0" y="0"/>
-          <a:ext cx="0" cy="0"/>
-          <a:chOff x="0" y="0"/>
-          <a:chExt cx="0" cy="0"/>
-        </a:xfrm>
-      </p:grpSpPr>
-      <p:sp>
-        <p:nvSpPr>
-          <p:cNvPr id="2" name="Text 0"/>
-          <p:cNvSpPr/>
-          <p:nvPr/>
-        </p:nvSpPr>
-        <p:spPr>
-          <a:xfrm>
-            <a:off x="812800" y="812800"/>
-            <a:ext cx="10883392" cy="238760"/>
-          </a:xfrm>
-          <a:prstGeom prst="rect">
-            <a:avLst/>
-          </a:prstGeom>
-          <a:noFill/>
-          <a:ln/>
-        </p:spPr>
-        <p:txBody>
-          <a:bodyPr wrap="square" lIns="0" tIns="0" rIns="0" bIns="0" rtlCol="0" anchor="t">
-            <a:normAutofit/>
-          </a:bodyPr>
-          <a:lstStyle/>
-          <a:p>
-            <a:pPr algn="l" indent="0" marL="0">
-              <a:lnSpc>
-                <a:spcPts val="1680"/>
-              </a:lnSpc>
-              <a:buNone/>
-            </a:pPr>
-            <a:r>
-              <a:rPr lang="en-US" sz="1200" b="1" spc="100" kern="0" dirty="0">
-                <a:solidFill>
-                  <a:srgbClr val="B5521A"/>
-                </a:solidFill>
-                <a:latin typeface="Noto Sans" pitchFamily="34" charset="0"/>
-                <a:ea typeface="Noto Sans" pitchFamily="34" charset="-122"/>
-                <a:cs typeface="Noto Sans" pitchFamily="34" charset="-120"/>
-              </a:rPr>
-              <a:t>TEMPERATURA DATCHIKLARI</a:t>
-            </a:r>
-            <a:endParaRPr lang="en-US" sz="1200" dirty="0"/>
-          </a:p>
-        </p:txBody>
-      </p:sp>
-      <p:sp>
-        <p:nvSpPr>
-          <p:cNvPr id="3" name="Text 1"/>
-          <p:cNvSpPr/>
-          <p:nvPr>
-            <p:ph type="title"/>
-          </p:nvPr>
-        </p:nvSpPr>
-        <p:spPr>
-          <a:xfrm>
-            <a:off x="812800" y="1102361"/>
-            <a:ext cx="10883392" cy="472440"/>
-          </a:xfrm>
-          <a:prstGeom prst="rect">
-            <a:avLst/>
-          </a:prstGeom>
-          <a:noFill/>
-          <a:ln/>
-        </p:spPr>
-        <p:txBody>
-          <a:bodyPr wrap="square" lIns="0" tIns="0" rIns="0" bIns="0" rtlCol="0" anchor="t">
-            <a:normAutofit/>
-          </a:bodyPr>
-          <a:lstStyle/>
-          <a:p>
-            <a:pPr algn="l" indent="0" marL="0">
-              <a:lnSpc>
-                <a:spcPts val="3520"/>
-              </a:lnSpc>
-              <a:buNone/>
-            </a:pPr>
-            <a:r>
-              <a:rPr lang="en-US" sz="3200" b="1" i="0" dirty="0">
-                <a:solidFill>
-                  <a:srgbClr val="16233B"/>
-                </a:solidFill>
-                <a:latin typeface="Noto Sans" pitchFamily="34" charset="0"/>
-                <a:ea typeface="Noto Sans" pitchFamily="34" charset="-122"/>
-                <a:cs typeface="Noto Sans" pitchFamily="34" charset="-120"/>
-              </a:rPr>
-              <a:t>Harorat datchiklarini taqqoslash</a:t>
-            </a:r>
-            <a:endParaRPr lang="en-US" sz="3200" dirty="0"/>
-          </a:p>
-        </p:txBody>
-      </p:sp>
-      <p:graphicFrame>
-        <p:nvGraphicFramePr>
-          <p:cNvPr id="4" name="Table 0"/>
-          <p:cNvGraphicFramePr>
-            <a:graphicFrameLocks noGrp="1"/>
-          </p:cNvGraphicFramePr>
-          <p:nvPr>
-            <p:extLst>
-              <p:ext uri="{D42A27DB-BD31-4B8C-83A1-F6EECF244321}">
-                <p14:modId xmlns:p14="http://schemas.microsoft.com/office/powerpoint/2010/main" val="1579011935"/>
-              </p:ext>
-            </p:extLst>
-          </p:nvPr>
-        </p:nvGraphicFramePr>
-        <p:xfrm>
-          <a:off x="822960" y="1813560"/>
-          <a:ext cx="10556240" cy="2945765"/>
-        </p:xfrm>
-        <a:graphic>
-          <a:graphicData uri="http://schemas.openxmlformats.org/drawingml/2006/table">
-            <a:tbl>
-              <a:tblPr/>
-              <a:tblGrid>
-                <a:gridCol w="2639060"/>
-                <a:gridCol w="2639060"/>
-                <a:gridCol w="2639060"/>
-                <a:gridCol w="2639060"/>
-              </a:tblGrid>
-              <a:tr h="410845">
-                <a:tc>
-                  <a:txBody>
-                    <a:bodyPr/>
-                    <a:lstStyle/>
-                    <a:p>
-                      <a:pPr indent="0" marL="0">
-                        <a:lnSpc>
-                          <a:spcPts val="1820"/>
-                        </a:lnSpc>
-                        <a:buNone/>
-                      </a:pPr>
-                      <a:r>
-                        <a:rPr lang="en-US" sz="1300" b="1" dirty="0">
-                          <a:solidFill>
-                            <a:srgbClr val="F5F3EE"/>
-                          </a:solidFill>
-                          <a:latin typeface="Noto Sans" pitchFamily="34" charset="0"/>
-                          <a:ea typeface="Noto Sans" pitchFamily="34" charset="-122"/>
-                          <a:cs typeface="Noto Sans" pitchFamily="34" charset="-120"/>
-                        </a:rPr>
-                        <a:t>Datchik</a:t>
-                      </a:r>
-                      <a:endParaRPr lang="en-US" sz="1300" dirty="0">
-                        <a:latin typeface="Noto Sans" charset="0"/>
-                        <a:ea typeface="Noto Sans" charset="0"/>
-                        <a:cs typeface="Noto Sans" charset="0"/>
-                      </a:endParaRPr>
-                    </a:p>
-                  </a:txBody>
-                  <a:tcPr marL="127000" marR="127000" marT="88900" marB="88900" anchor="t">
-                    <a:lnL w="12700" cap="flat" cmpd="sng" algn="ctr">
-                      <a:solidFill>
-                        <a:srgbClr val="C4C2BE"/>
-                      </a:solidFill>
-                      <a:prstDash val="solid"/>
-                      <a:round/>
-                      <a:headEnd type="none" w="med" len="med"/>
-                      <a:tailEnd type="none" w="med" len="med"/>
-                    </a:lnL>
-                    <a:lnR w="12700" cap="flat" cmpd="sng" algn="ctr">
-                      <a:solidFill>
-                        <a:srgbClr val="162032"/>
-                      </a:solidFill>
-                      <a:prstDash val="solid"/>
-                      <a:round/>
-                      <a:headEnd type="none" w="med" len="med"/>
-                      <a:tailEnd type="none" w="med" len="med"/>
-                    </a:lnR>
-                    <a:lnT w="12700" cap="flat" cmpd="sng" algn="ctr">
-                      <a:solidFill>
-                        <a:srgbClr val="C4C2BE"/>
-                      </a:solidFill>
-                      <a:prstDash val="solid"/>
-                      <a:round/>
-                      <a:headEnd type="none" w="med" len="med"/>
-                      <a:tailEnd type="none" w="med" len="med"/>
-                    </a:lnT>
-                    <a:lnB w="12700" cap="flat" cmpd="sng" algn="ctr">
-                      <a:solidFill>
-                        <a:srgbClr val="162032"/>
-                      </a:solidFill>
-                      <a:prstDash val="solid"/>
-                      <a:round/>
-                      <a:headEnd type="none" w="med" len="med"/>
-                      <a:tailEnd type="none" w="med" len="med"/>
-                    </a:lnB>
-                    <a:solidFill>
-                      <a:srgbClr val="16233B"/>
-                    </a:solidFill>
-                  </a:tcPr>
-                </a:tc>
-                <a:tc>
-                  <a:txBody>
-                    <a:bodyPr/>
-                    <a:lstStyle/>
-                    <a:p>
-                      <a:pPr indent="0" marL="0">
+                      <a:pPr marL="0" indent="0">
                         <a:lnSpc>
                           <a:spcPts val="1820"/>
                         </a:lnSpc>
@@ -12931,7 +13153,7 @@
                       </a:endParaRPr>
                     </a:p>
                   </a:txBody>
-                  <a:tcPr marL="127000" marR="127000" marT="88900" marB="88900" anchor="t">
+                  <a:tcPr marL="127000" marR="127000" marT="88900" marB="88900">
                     <a:lnL w="12700" cap="flat" cmpd="sng" algn="ctr">
                       <a:solidFill>
                         <a:srgbClr val="162032"/>
@@ -12978,7 +13200,7 @@
                     <a:bodyPr/>
                     <a:lstStyle/>
                     <a:p>
-                      <a:pPr indent="0" marL="0">
+                      <a:pPr marL="0" indent="0">
                         <a:lnSpc>
                           <a:spcPts val="1820"/>
                         </a:lnSpc>
@@ -13002,7 +13224,7 @@
                       </a:endParaRPr>
                     </a:p>
                   </a:txBody>
-                  <a:tcPr marL="127000" marR="127000" marT="88900" marB="88900" anchor="t">
+                  <a:tcPr marL="127000" marR="127000" marT="88900" marB="88900">
                     <a:lnL w="12700" cap="flat" cmpd="sng" algn="ctr">
                       <a:solidFill>
                         <a:srgbClr val="162032"/>
@@ -13049,7 +13271,7 @@
                     <a:bodyPr/>
                     <a:lstStyle/>
                     <a:p>
-                      <a:pPr indent="0" marL="0">
+                      <a:pPr marL="0" indent="0">
                         <a:lnSpc>
                           <a:spcPts val="1820"/>
                         </a:lnSpc>
@@ -13073,7 +13295,7 @@
                       </a:endParaRPr>
                     </a:p>
                   </a:txBody>
-                  <a:tcPr marL="127000" marR="127000" marT="88900" marB="88900" anchor="t">
+                  <a:tcPr marL="127000" marR="127000" marT="88900" marB="88900">
                     <a:lnL w="12700" cap="flat" cmpd="sng" algn="ctr">
                       <a:solidFill>
                         <a:srgbClr val="162032"/>
@@ -13115,6 +13337,11 @@
                     </a:solidFill>
                   </a:tcPr>
                 </a:tc>
+                <a:extLst>
+                  <a:ext uri="{0D108BD9-81ED-4DB2-BD59-A6C34878D82A}">
+                    <a16:rowId xmlns:a16="http://schemas.microsoft.com/office/drawing/2014/main" val="10000"/>
+                  </a:ext>
+                </a:extLst>
               </a:tr>
               <a:tr h="633730">
                 <a:tc>
@@ -13122,7 +13349,7 @@
                     <a:bodyPr/>
                     <a:lstStyle/>
                     <a:p>
-                      <a:pPr indent="0" marL="0">
+                      <a:pPr marL="0" indent="0">
                         <a:lnSpc>
                           <a:spcPts val="1820"/>
                         </a:lnSpc>
@@ -13146,7 +13373,7 @@
                       </a:endParaRPr>
                     </a:p>
                   </a:txBody>
-                  <a:tcPr marL="127000" marR="127000" marT="88900" marB="88900" anchor="t">
+                  <a:tcPr marL="127000" marR="127000" marT="88900" marB="88900">
                     <a:lnL w="12700" cap="flat" cmpd="sng" algn="ctr">
                       <a:solidFill>
                         <a:srgbClr val="C4C2BE"/>
@@ -13190,7 +13417,7 @@
                     <a:bodyPr/>
                     <a:lstStyle/>
                     <a:p>
-                      <a:pPr indent="0" marL="0">
+                      <a:pPr marL="0" indent="0">
                         <a:lnSpc>
                           <a:spcPts val="1820"/>
                         </a:lnSpc>
@@ -13214,7 +13441,7 @@
                       </a:endParaRPr>
                     </a:p>
                   </a:txBody>
-                  <a:tcPr marL="127000" marR="127000" marT="88900" marB="88900" anchor="t">
+                  <a:tcPr marL="127000" marR="127000" marT="88900" marB="88900">
                     <a:lnL w="12700" cap="flat" cmpd="sng" algn="ctr">
                       <a:solidFill>
                         <a:srgbClr val="C4C2BE"/>
@@ -13258,7 +13485,7 @@
                     <a:bodyPr/>
                     <a:lstStyle/>
                     <a:p>
-                      <a:pPr indent="0" marL="0">
+                      <a:pPr marL="0" indent="0">
                         <a:lnSpc>
                           <a:spcPts val="1820"/>
                         </a:lnSpc>
@@ -13282,7 +13509,7 @@
                       </a:endParaRPr>
                     </a:p>
                   </a:txBody>
-                  <a:tcPr marL="127000" marR="127000" marT="88900" marB="88900" anchor="t">
+                  <a:tcPr marL="127000" marR="127000" marT="88900" marB="88900">
                     <a:lnL w="12700" cap="flat" cmpd="sng" algn="ctr">
                       <a:solidFill>
                         <a:srgbClr val="C4C2BE"/>
@@ -13326,7 +13553,7 @@
                     <a:bodyPr/>
                     <a:lstStyle/>
                     <a:p>
-                      <a:pPr indent="0" marL="0">
+                      <a:pPr marL="0" indent="0">
                         <a:lnSpc>
                           <a:spcPts val="1820"/>
                         </a:lnSpc>
@@ -13350,7 +13577,7 @@
                       </a:endParaRPr>
                     </a:p>
                   </a:txBody>
-                  <a:tcPr marL="127000" marR="127000" marT="88900" marB="88900" anchor="t">
+                  <a:tcPr marL="127000" marR="127000" marT="88900" marB="88900">
                     <a:lnL w="12700" cap="flat" cmpd="sng" algn="ctr">
                       <a:solidFill>
                         <a:srgbClr val="C4C2BE"/>
@@ -13389,6 +13616,11 @@
                     </a:lnB>
                   </a:tcPr>
                 </a:tc>
+                <a:extLst>
+                  <a:ext uri="{0D108BD9-81ED-4DB2-BD59-A6C34878D82A}">
+                    <a16:rowId xmlns:a16="http://schemas.microsoft.com/office/drawing/2014/main" val="10001"/>
+                  </a:ext>
+                </a:extLst>
               </a:tr>
               <a:tr h="633730">
                 <a:tc>
@@ -13396,7 +13628,7 @@
                     <a:bodyPr/>
                     <a:lstStyle/>
                     <a:p>
-                      <a:pPr indent="0" marL="0">
+                      <a:pPr marL="0" indent="0">
                         <a:lnSpc>
                           <a:spcPts val="1820"/>
                         </a:lnSpc>
@@ -13420,7 +13652,7 @@
                       </a:endParaRPr>
                     </a:p>
                   </a:txBody>
-                  <a:tcPr marL="127000" marR="127000" marT="88900" marB="88900" anchor="t">
+                  <a:tcPr marL="127000" marR="127000" marT="88900" marB="88900">
                     <a:lnL w="12700" cap="flat" cmpd="sng" algn="ctr">
                       <a:solidFill>
                         <a:srgbClr val="C4C2BE"/>
@@ -13464,7 +13696,7 @@
                     <a:bodyPr/>
                     <a:lstStyle/>
                     <a:p>
-                      <a:pPr indent="0" marL="0">
+                      <a:pPr marL="0" indent="0">
                         <a:lnSpc>
                           <a:spcPts val="1820"/>
                         </a:lnSpc>
@@ -13488,7 +13720,7 @@
                       </a:endParaRPr>
                     </a:p>
                   </a:txBody>
-                  <a:tcPr marL="127000" marR="127000" marT="88900" marB="88900" anchor="t">
+                  <a:tcPr marL="127000" marR="127000" marT="88900" marB="88900">
                     <a:lnL w="12700" cap="flat" cmpd="sng" algn="ctr">
                       <a:solidFill>
                         <a:srgbClr val="C4C2BE"/>
@@ -13532,7 +13764,7 @@
                     <a:bodyPr/>
                     <a:lstStyle/>
                     <a:p>
-                      <a:pPr indent="0" marL="0">
+                      <a:pPr marL="0" indent="0">
                         <a:lnSpc>
                           <a:spcPts val="1820"/>
                         </a:lnSpc>
@@ -13556,7 +13788,7 @@
                       </a:endParaRPr>
                     </a:p>
                   </a:txBody>
-                  <a:tcPr marL="127000" marR="127000" marT="88900" marB="88900" anchor="t">
+                  <a:tcPr marL="127000" marR="127000" marT="88900" marB="88900">
                     <a:lnL w="12700" cap="flat" cmpd="sng" algn="ctr">
                       <a:solidFill>
                         <a:srgbClr val="C4C2BE"/>
@@ -13600,7 +13832,7 @@
                     <a:bodyPr/>
                     <a:lstStyle/>
                     <a:p>
-                      <a:pPr indent="0" marL="0">
+                      <a:pPr marL="0" indent="0">
                         <a:lnSpc>
                           <a:spcPts val="1820"/>
                         </a:lnSpc>
@@ -13624,7 +13856,7 @@
                       </a:endParaRPr>
                     </a:p>
                   </a:txBody>
-                  <a:tcPr marL="127000" marR="127000" marT="88900" marB="88900" anchor="t">
+                  <a:tcPr marL="127000" marR="127000" marT="88900" marB="88900">
                     <a:lnL w="12700" cap="flat" cmpd="sng" algn="ctr">
                       <a:solidFill>
                         <a:srgbClr val="C4C2BE"/>
@@ -13663,6 +13895,11 @@
                     </a:lnB>
                   </a:tcPr>
                 </a:tc>
+                <a:extLst>
+                  <a:ext uri="{0D108BD9-81ED-4DB2-BD59-A6C34878D82A}">
+                    <a16:rowId xmlns:a16="http://schemas.microsoft.com/office/drawing/2014/main" val="10002"/>
+                  </a:ext>
+                </a:extLst>
               </a:tr>
               <a:tr h="633730">
                 <a:tc>
@@ -13670,7 +13907,7 @@
                     <a:bodyPr/>
                     <a:lstStyle/>
                     <a:p>
-                      <a:pPr indent="0" marL="0">
+                      <a:pPr marL="0" indent="0">
                         <a:lnSpc>
                           <a:spcPts val="1820"/>
                         </a:lnSpc>
@@ -13694,7 +13931,7 @@
                       </a:endParaRPr>
                     </a:p>
                   </a:txBody>
-                  <a:tcPr marL="127000" marR="127000" marT="88900" marB="88900" anchor="t">
+                  <a:tcPr marL="127000" marR="127000" marT="88900" marB="88900">
                     <a:lnL w="12700" cap="flat" cmpd="sng" algn="ctr">
                       <a:solidFill>
                         <a:srgbClr val="C4C2BE"/>
@@ -13738,7 +13975,7 @@
                     <a:bodyPr/>
                     <a:lstStyle/>
                     <a:p>
-                      <a:pPr indent="0" marL="0">
+                      <a:pPr marL="0" indent="0">
                         <a:lnSpc>
                           <a:spcPts val="1820"/>
                         </a:lnSpc>
@@ -13762,7 +13999,7 @@
                       </a:endParaRPr>
                     </a:p>
                   </a:txBody>
-                  <a:tcPr marL="127000" marR="127000" marT="88900" marB="88900" anchor="t">
+                  <a:tcPr marL="127000" marR="127000" marT="88900" marB="88900">
                     <a:lnL w="12700" cap="flat" cmpd="sng" algn="ctr">
                       <a:solidFill>
                         <a:srgbClr val="C4C2BE"/>
@@ -13806,7 +14043,7 @@
                     <a:bodyPr/>
                     <a:lstStyle/>
                     <a:p>
-                      <a:pPr indent="0" marL="0">
+                      <a:pPr marL="0" indent="0">
                         <a:lnSpc>
                           <a:spcPts val="1820"/>
                         </a:lnSpc>
@@ -13830,7 +14067,7 @@
                       </a:endParaRPr>
                     </a:p>
                   </a:txBody>
-                  <a:tcPr marL="127000" marR="127000" marT="88900" marB="88900" anchor="t">
+                  <a:tcPr marL="127000" marR="127000" marT="88900" marB="88900">
                     <a:lnL w="12700" cap="flat" cmpd="sng" algn="ctr">
                       <a:solidFill>
                         <a:srgbClr val="C4C2BE"/>
@@ -13874,7 +14111,7 @@
                     <a:bodyPr/>
                     <a:lstStyle/>
                     <a:p>
-                      <a:pPr indent="0" marL="0">
+                      <a:pPr marL="0" indent="0">
                         <a:lnSpc>
                           <a:spcPts val="1820"/>
                         </a:lnSpc>
@@ -13898,7 +14135,7 @@
                       </a:endParaRPr>
                     </a:p>
                   </a:txBody>
-                  <a:tcPr marL="127000" marR="127000" marT="88900" marB="88900" anchor="t">
+                  <a:tcPr marL="127000" marR="127000" marT="88900" marB="88900">
                     <a:lnL w="12700" cap="flat" cmpd="sng" algn="ctr">
                       <a:solidFill>
                         <a:srgbClr val="C4C2BE"/>
@@ -13937,6 +14174,11 @@
                     </a:lnB>
                   </a:tcPr>
                 </a:tc>
+                <a:extLst>
+                  <a:ext uri="{0D108BD9-81ED-4DB2-BD59-A6C34878D82A}">
+                    <a16:rowId xmlns:a16="http://schemas.microsoft.com/office/drawing/2014/main" val="10003"/>
+                  </a:ext>
+                </a:extLst>
               </a:tr>
               <a:tr h="633730">
                 <a:tc>
@@ -13944,7 +14186,7 @@
                     <a:bodyPr/>
                     <a:lstStyle/>
                     <a:p>
-                      <a:pPr indent="0" marL="0">
+                      <a:pPr marL="0" indent="0">
                         <a:lnSpc>
                           <a:spcPts val="1820"/>
                         </a:lnSpc>
@@ -13968,7 +14210,7 @@
                       </a:endParaRPr>
                     </a:p>
                   </a:txBody>
-                  <a:tcPr marL="127000" marR="127000" marT="88900" marB="88900" anchor="t">
+                  <a:tcPr marL="127000" marR="127000" marT="88900" marB="88900">
                     <a:lnL w="12700" cap="flat" cmpd="sng" algn="ctr">
                       <a:solidFill>
                         <a:srgbClr val="C4C2BE"/>
@@ -14012,7 +14254,7 @@
                     <a:bodyPr/>
                     <a:lstStyle/>
                     <a:p>
-                      <a:pPr indent="0" marL="0">
+                      <a:pPr marL="0" indent="0">
                         <a:lnSpc>
                           <a:spcPts val="1820"/>
                         </a:lnSpc>
@@ -14036,7 +14278,7 @@
                       </a:endParaRPr>
                     </a:p>
                   </a:txBody>
-                  <a:tcPr marL="127000" marR="127000" marT="88900" marB="88900" anchor="t">
+                  <a:tcPr marL="127000" marR="127000" marT="88900" marB="88900">
                     <a:lnL w="12700" cap="flat" cmpd="sng" algn="ctr">
                       <a:solidFill>
                         <a:srgbClr val="C4C2BE"/>
@@ -14080,7 +14322,7 @@
                     <a:bodyPr/>
                     <a:lstStyle/>
                     <a:p>
-                      <a:pPr indent="0" marL="0">
+                      <a:pPr marL="0" indent="0">
                         <a:lnSpc>
                           <a:spcPts val="1820"/>
                         </a:lnSpc>
@@ -14104,7 +14346,7 @@
                       </a:endParaRPr>
                     </a:p>
                   </a:txBody>
-                  <a:tcPr marL="127000" marR="127000" marT="88900" marB="88900" anchor="t">
+                  <a:tcPr marL="127000" marR="127000" marT="88900" marB="88900">
                     <a:lnL w="12700" cap="flat" cmpd="sng" algn="ctr">
                       <a:solidFill>
                         <a:srgbClr val="C4C2BE"/>
@@ -14148,7 +14390,7 @@
                     <a:bodyPr/>
                     <a:lstStyle/>
                     <a:p>
-                      <a:pPr indent="0" marL="0">
+                      <a:pPr marL="0" indent="0">
                         <a:lnSpc>
                           <a:spcPts val="1820"/>
                         </a:lnSpc>
@@ -14172,7 +14414,7 @@
                       </a:endParaRPr>
                     </a:p>
                   </a:txBody>
-                  <a:tcPr marL="127000" marR="127000" marT="88900" marB="88900" anchor="t">
+                  <a:tcPr marL="127000" marR="127000" marT="88900" marB="88900">
                     <a:lnL w="12700" cap="flat" cmpd="sng" algn="ctr">
                       <a:solidFill>
                         <a:srgbClr val="C4C2BE"/>
@@ -14211,6 +14453,11 @@
                     </a:lnB>
                   </a:tcPr>
                 </a:tc>
+                <a:extLst>
+                  <a:ext uri="{0D108BD9-81ED-4DB2-BD59-A6C34878D82A}">
+                    <a16:rowId xmlns:a16="http://schemas.microsoft.com/office/drawing/2014/main" val="10004"/>
+                  </a:ext>
+                </a:extLst>
               </a:tr>
             </a:tbl>
           </a:graphicData>
@@ -14239,7 +14486,7 @@
           </a:bodyPr>
           <a:lstStyle/>
           <a:p>
-            <a:pPr algn="l" indent="0" marL="0">
+            <a:pPr marL="0" indent="0" algn="l">
               <a:lnSpc>
                 <a:spcPts val="1960"/>
               </a:lnSpc>
@@ -14283,7 +14530,7 @@
           </a:bodyPr>
           <a:lstStyle/>
           <a:p>
-            <a:pPr algn="l" indent="0" marL="0">
+            <a:pPr marL="0" indent="0" algn="l">
               <a:lnSpc>
                 <a:spcPts val="1680"/>
               </a:lnSpc>
@@ -14320,6 +14567,7 @@
         <a:solidFill>
           <a:srgbClr val="F5F3EE"/>
         </a:solidFill>
+        <a:effectLst/>
       </p:bgPr>
     </p:bg>
     <p:spTree>
@@ -14359,14 +14607,14 @@
           </a:bodyPr>
           <a:lstStyle/>
           <a:p>
-            <a:pPr algn="l" indent="0" marL="0">
+            <a:pPr marL="0" indent="0" algn="l">
               <a:lnSpc>
                 <a:spcPts val="1680"/>
               </a:lnSpc>
               <a:buNone/>
             </a:pPr>
             <a:r>
-              <a:rPr lang="en-US" sz="1200" b="1" spc="100" kern="0" dirty="0">
+              <a:rPr lang="en-US" sz="1200" b="1" kern="0" spc="100" dirty="0">
                 <a:solidFill>
                   <a:srgbClr val="B5521A"/>
                 </a:solidFill>
@@ -14383,7 +14631,9 @@
       <p:sp>
         <p:nvSpPr>
           <p:cNvPr id="3" name="Text 1"/>
-          <p:cNvSpPr/>
+          <p:cNvSpPr>
+            <a:spLocks noGrp="1"/>
+          </p:cNvSpPr>
           <p:nvPr>
             <p:ph type="title"/>
           </p:nvPr>
@@ -14405,7 +14655,7 @@
           </a:bodyPr>
           <a:lstStyle/>
           <a:p>
-            <a:pPr algn="l" indent="0" marL="0">
+            <a:pPr marL="0" indent="0" algn="l">
               <a:lnSpc>
                 <a:spcPts val="3520"/>
               </a:lnSpc>
@@ -14428,15 +14678,15 @@
       </p:sp>
       <p:pic>
         <p:nvPicPr>
-          <p:cNvPr id="4" name="Image 0" descr="Vitston koʻprigi: R1, R2, R3 va Pt100 rezistorlari, 5 V manba, A va B nuqtalar instrumental kuchaytirgichga ulangan">    </p:cNvPr>
+          <p:cNvPr id="4" name="Image 0" descr="Vitston koʻprigi: R1, R2, R3 va Pt100 rezistorlari, 5 V manba, A va B nuqtalar instrumental kuchaytirgichga ulangan"/>
           <p:cNvPicPr>
             <a:picLocks noChangeAspect="1"/>
           </p:cNvPicPr>
           <p:nvPr/>
         </p:nvPicPr>
         <p:blipFill>
-          <a:blip r:embed="rId1"/>
-          <a:srcRect l="0" r="0" t="0" b="0"/>
+          <a:blip r:embed="rId3"/>
+          <a:srcRect/>
           <a:stretch/>
         </p:blipFill>
         <p:spPr>
@@ -14472,7 +14722,7 @@
           </a:bodyPr>
           <a:lstStyle/>
           <a:p>
-            <a:pPr algn="l" indent="0" marL="0">
+            <a:pPr marL="0" indent="0" algn="l">
               <a:lnSpc>
                 <a:spcPts val="1680"/>
               </a:lnSpc>
@@ -14516,7 +14766,7 @@
           </a:bodyPr>
           <a:lstStyle/>
           <a:p>
-            <a:pPr algn="l" indent="0" marL="0">
+            <a:pPr marL="0" indent="0" algn="l">
               <a:lnSpc>
                 <a:spcPts val="2520"/>
               </a:lnSpc>
@@ -14560,7 +14810,7 @@
           </a:bodyPr>
           <a:lstStyle/>
           <a:p>
-            <a:pPr algn="l" indent="0" marL="0">
+            <a:pPr marL="0" indent="0" algn="l">
               <a:lnSpc>
                 <a:spcPts val="1680"/>
               </a:lnSpc>
@@ -14604,7 +14854,7 @@
           </a:bodyPr>
           <a:lstStyle/>
           <a:p>
-            <a:pPr algn="l" indent="0" marL="0">
+            <a:pPr marL="0" indent="0" algn="l">
               <a:lnSpc>
                 <a:spcPts val="2240"/>
               </a:lnSpc>
@@ -14648,7 +14898,7 @@
           </a:bodyPr>
           <a:lstStyle/>
           <a:p>
-            <a:pPr algn="l" indent="0" marL="0">
+            <a:pPr marL="0" indent="0" algn="l">
               <a:lnSpc>
                 <a:spcPts val="1680"/>
               </a:lnSpc>
@@ -14692,7 +14942,7 @@
           </a:bodyPr>
           <a:lstStyle/>
           <a:p>
-            <a:pPr algn="l" indent="0" marL="0">
+            <a:pPr marL="0" indent="0" algn="l">
               <a:lnSpc>
                 <a:spcPts val="2520"/>
               </a:lnSpc>
@@ -14736,7 +14986,7 @@
           </a:bodyPr>
           <a:lstStyle/>
           <a:p>
-            <a:pPr algn="l" indent="0" marL="0">
+            <a:pPr marL="0" indent="0" algn="l">
               <a:lnSpc>
                 <a:spcPts val="1680"/>
               </a:lnSpc>
@@ -15053,4 +15303,319 @@
   <a:objectDefaults/>
   <a:extraClrSchemeLst/>
 </a:theme>
+</file>
+
+<file path=ppt/theme/theme2.xml><?xml version="1.0" encoding="utf-8"?>
+<a:theme xmlns:a="http://schemas.openxmlformats.org/drawingml/2006/main" name="Office Theme">
+  <a:themeElements>
+    <a:clrScheme name="Office">
+      <a:dk1>
+        <a:sysClr val="windowText" lastClr="000000"/>
+      </a:dk1>
+      <a:lt1>
+        <a:sysClr val="window" lastClr="FFFFFF"/>
+      </a:lt1>
+      <a:dk2>
+        <a:srgbClr val="0E2841"/>
+      </a:dk2>
+      <a:lt2>
+        <a:srgbClr val="E8E8E8"/>
+      </a:lt2>
+      <a:accent1>
+        <a:srgbClr val="156082"/>
+      </a:accent1>
+      <a:accent2>
+        <a:srgbClr val="E97132"/>
+      </a:accent2>
+      <a:accent3>
+        <a:srgbClr val="196B24"/>
+      </a:accent3>
+      <a:accent4>
+        <a:srgbClr val="0F9ED5"/>
+      </a:accent4>
+      <a:accent5>
+        <a:srgbClr val="A02B93"/>
+      </a:accent5>
+      <a:accent6>
+        <a:srgbClr val="4EA72E"/>
+      </a:accent6>
+      <a:hlink>
+        <a:srgbClr val="467886"/>
+      </a:hlink>
+      <a:folHlink>
+        <a:srgbClr val="96607D"/>
+      </a:folHlink>
+    </a:clrScheme>
+    <a:fontScheme name="Office">
+      <a:majorFont>
+        <a:latin typeface="Aptos Display" panose="02110004020202020204"/>
+        <a:ea typeface=""/>
+        <a:cs typeface=""/>
+        <a:font script="Jpan" typeface="游ゴシック Light"/>
+        <a:font script="Hang" typeface="맑은 고딕"/>
+        <a:font script="Hans" typeface="等线 Light"/>
+        <a:font script="Hant" typeface="新細明體"/>
+        <a:font script="Arab" typeface="Times New Roman"/>
+        <a:font script="Hebr" typeface="Times New Roman"/>
+        <a:font script="Thai" typeface="Angsana New"/>
+        <a:font script="Ethi" typeface="Nyala"/>
+        <a:font script="Beng" typeface="Vrinda"/>
+        <a:font script="Gujr" typeface="Shruti"/>
+        <a:font script="Khmr" typeface="MoolBoran"/>
+        <a:font script="Knda" typeface="Tunga"/>
+        <a:font script="Guru" typeface="Raavi"/>
+        <a:font script="Cans" typeface="Euphemia"/>
+        <a:font script="Cher" typeface="Plantagenet Cherokee"/>
+        <a:font script="Yiii" typeface="Microsoft Yi Baiti"/>
+        <a:font script="Tibt" typeface="Microsoft Himalaya"/>
+        <a:font script="Thaa" typeface="MV Boli"/>
+        <a:font script="Deva" typeface="Mangal"/>
+        <a:font script="Telu" typeface="Gautami"/>
+        <a:font script="Taml" typeface="Latha"/>
+        <a:font script="Syrc" typeface="Estrangelo Edessa"/>
+        <a:font script="Orya" typeface="Kalinga"/>
+        <a:font script="Mlym" typeface="Kartika"/>
+        <a:font script="Laoo" typeface="DokChampa"/>
+        <a:font script="Sinh" typeface="Iskoola Pota"/>
+        <a:font script="Mong" typeface="Mongolian Baiti"/>
+        <a:font script="Viet" typeface="Times New Roman"/>
+        <a:font script="Uigh" typeface="Microsoft Uighur"/>
+        <a:font script="Geor" typeface="Sylfaen"/>
+        <a:font script="Armn" typeface="Arial"/>
+        <a:font script="Bugi" typeface="Leelawadee UI"/>
+        <a:font script="Bopo" typeface="Microsoft JhengHei"/>
+        <a:font script="Java" typeface="Javanese Text"/>
+        <a:font script="Lisu" typeface="Segoe UI"/>
+        <a:font script="Mymr" typeface="Myanmar Text"/>
+        <a:font script="Nkoo" typeface="Ebrima"/>
+        <a:font script="Olck" typeface="Nirmala UI"/>
+        <a:font script="Osma" typeface="Ebrima"/>
+        <a:font script="Phag" typeface="Phagspa"/>
+        <a:font script="Syrn" typeface="Estrangelo Edessa"/>
+        <a:font script="Syrj" typeface="Estrangelo Edessa"/>
+        <a:font script="Syre" typeface="Estrangelo Edessa"/>
+        <a:font script="Sora" typeface="Nirmala UI"/>
+        <a:font script="Tale" typeface="Microsoft Tai Le"/>
+        <a:font script="Talu" typeface="Microsoft New Tai Lue"/>
+        <a:font script="Tfng" typeface="Ebrima"/>
+      </a:majorFont>
+      <a:minorFont>
+        <a:latin typeface="Aptos" panose="02110004020202020204"/>
+        <a:ea typeface=""/>
+        <a:cs typeface=""/>
+        <a:font script="Jpan" typeface="游ゴシック"/>
+        <a:font script="Hang" typeface="맑은 고딕"/>
+        <a:font script="Hans" typeface="等线"/>
+        <a:font script="Hant" typeface="新細明體"/>
+        <a:font script="Arab" typeface="Arial"/>
+        <a:font script="Hebr" typeface="Arial"/>
+        <a:font script="Thai" typeface="Cordia New"/>
+        <a:font script="Ethi" typeface="Nyala"/>
+        <a:font script="Beng" typeface="Vrinda"/>
+        <a:font script="Gujr" typeface="Shruti"/>
+        <a:font script="Khmr" typeface="DaunPenh"/>
+        <a:font script="Knda" typeface="Tunga"/>
+        <a:font script="Guru" typeface="Raavi"/>
+        <a:font script="Cans" typeface="Euphemia"/>
+        <a:font script="Cher" typeface="Plantagenet Cherokee"/>
+        <a:font script="Yiii" typeface="Microsoft Yi Baiti"/>
+        <a:font script="Tibt" typeface="Microsoft Himalaya"/>
+        <a:font script="Thaa" typeface="MV Boli"/>
+        <a:font script="Deva" typeface="Mangal"/>
+        <a:font script="Telu" typeface="Gautami"/>
+        <a:font script="Taml" typeface="Latha"/>
+        <a:font script="Syrc" typeface="Estrangelo Edessa"/>
+        <a:font script="Orya" typeface="Kalinga"/>
+        <a:font script="Mlym" typeface="Kartika"/>
+        <a:font script="Laoo" typeface="DokChampa"/>
+        <a:font script="Sinh" typeface="Iskoola Pota"/>
+        <a:font script="Mong" typeface="Mongolian Baiti"/>
+        <a:font script="Viet" typeface="Arial"/>
+        <a:font script="Uigh" typeface="Microsoft Uighur"/>
+        <a:font script="Geor" typeface="Sylfaen"/>
+        <a:font script="Armn" typeface="Arial"/>
+        <a:font script="Bugi" typeface="Leelawadee UI"/>
+        <a:font script="Bopo" typeface="Microsoft JhengHei"/>
+        <a:font script="Java" typeface="Javanese Text"/>
+        <a:font script="Lisu" typeface="Segoe UI"/>
+        <a:font script="Mymr" typeface="Myanmar Text"/>
+        <a:font script="Nkoo" typeface="Ebrima"/>
+        <a:font script="Olck" typeface="Nirmala UI"/>
+        <a:font script="Osma" typeface="Ebrima"/>
+        <a:font script="Phag" typeface="Phagspa"/>
+        <a:font script="Syrn" typeface="Estrangelo Edessa"/>
+        <a:font script="Syrj" typeface="Estrangelo Edessa"/>
+        <a:font script="Syre" typeface="Estrangelo Edessa"/>
+        <a:font script="Sora" typeface="Nirmala UI"/>
+        <a:font script="Tale" typeface="Microsoft Tai Le"/>
+        <a:font script="Talu" typeface="Microsoft New Tai Lue"/>
+        <a:font script="Tfng" typeface="Ebrima"/>
+      </a:minorFont>
+    </a:fontScheme>
+    <a:fmtScheme name="Office">
+      <a:fillStyleLst>
+        <a:solidFill>
+          <a:schemeClr val="phClr"/>
+        </a:solidFill>
+        <a:gradFill rotWithShape="1">
+          <a:gsLst>
+            <a:gs pos="0">
+              <a:schemeClr val="phClr">
+                <a:lumMod val="110000"/>
+                <a:satMod val="105000"/>
+                <a:tint val="67000"/>
+              </a:schemeClr>
+            </a:gs>
+            <a:gs pos="50000">
+              <a:schemeClr val="phClr">
+                <a:lumMod val="105000"/>
+                <a:satMod val="103000"/>
+                <a:tint val="73000"/>
+              </a:schemeClr>
+            </a:gs>
+            <a:gs pos="100000">
+              <a:schemeClr val="phClr">
+                <a:lumMod val="105000"/>
+                <a:satMod val="109000"/>
+                <a:tint val="81000"/>
+              </a:schemeClr>
+            </a:gs>
+          </a:gsLst>
+          <a:lin ang="5400000" scaled="0"/>
+        </a:gradFill>
+        <a:gradFill rotWithShape="1">
+          <a:gsLst>
+            <a:gs pos="0">
+              <a:schemeClr val="phClr">
+                <a:satMod val="103000"/>
+                <a:lumMod val="102000"/>
+                <a:tint val="94000"/>
+              </a:schemeClr>
+            </a:gs>
+            <a:gs pos="50000">
+              <a:schemeClr val="phClr">
+                <a:satMod val="110000"/>
+                <a:lumMod val="100000"/>
+                <a:shade val="100000"/>
+              </a:schemeClr>
+            </a:gs>
+            <a:gs pos="100000">
+              <a:schemeClr val="phClr">
+                <a:lumMod val="99000"/>
+                <a:satMod val="120000"/>
+                <a:shade val="78000"/>
+              </a:schemeClr>
+            </a:gs>
+          </a:gsLst>
+          <a:lin ang="5400000" scaled="0"/>
+        </a:gradFill>
+      </a:fillStyleLst>
+      <a:lnStyleLst>
+        <a:ln w="12700" cap="flat" cmpd="sng" algn="ctr">
+          <a:solidFill>
+            <a:schemeClr val="phClr"/>
+          </a:solidFill>
+          <a:prstDash val="solid"/>
+          <a:miter lim="800000"/>
+        </a:ln>
+        <a:ln w="19050" cap="flat" cmpd="sng" algn="ctr">
+          <a:solidFill>
+            <a:schemeClr val="phClr"/>
+          </a:solidFill>
+          <a:prstDash val="solid"/>
+          <a:miter lim="800000"/>
+        </a:ln>
+        <a:ln w="25400" cap="flat" cmpd="sng" algn="ctr">
+          <a:solidFill>
+            <a:schemeClr val="phClr"/>
+          </a:solidFill>
+          <a:prstDash val="solid"/>
+          <a:miter lim="800000"/>
+        </a:ln>
+      </a:lnStyleLst>
+      <a:effectStyleLst>
+        <a:effectStyle>
+          <a:effectLst/>
+        </a:effectStyle>
+        <a:effectStyle>
+          <a:effectLst/>
+        </a:effectStyle>
+        <a:effectStyle>
+          <a:effectLst>
+            <a:outerShdw blurRad="57150" dist="19050" dir="5400000" algn="ctr" rotWithShape="0">
+              <a:srgbClr val="000000">
+                <a:alpha val="63000"/>
+              </a:srgbClr>
+            </a:outerShdw>
+          </a:effectLst>
+        </a:effectStyle>
+      </a:effectStyleLst>
+      <a:bgFillStyleLst>
+        <a:solidFill>
+          <a:schemeClr val="phClr"/>
+        </a:solidFill>
+        <a:solidFill>
+          <a:schemeClr val="phClr">
+            <a:tint val="95000"/>
+            <a:satMod val="170000"/>
+          </a:schemeClr>
+        </a:solidFill>
+        <a:gradFill rotWithShape="1">
+          <a:gsLst>
+            <a:gs pos="0">
+              <a:schemeClr val="phClr">
+                <a:tint val="93000"/>
+                <a:satMod val="150000"/>
+                <a:shade val="98000"/>
+                <a:lumMod val="102000"/>
+              </a:schemeClr>
+            </a:gs>
+            <a:gs pos="50000">
+              <a:schemeClr val="phClr">
+                <a:tint val="98000"/>
+                <a:satMod val="130000"/>
+                <a:shade val="90000"/>
+                <a:lumMod val="103000"/>
+              </a:schemeClr>
+            </a:gs>
+            <a:gs pos="100000">
+              <a:schemeClr val="phClr">
+                <a:shade val="63000"/>
+                <a:satMod val="120000"/>
+              </a:schemeClr>
+            </a:gs>
+          </a:gsLst>
+          <a:lin ang="5400000" scaled="0"/>
+        </a:gradFill>
+      </a:bgFillStyleLst>
+    </a:fmtScheme>
+  </a:themeElements>
+  <a:objectDefaults>
+    <a:lnDef>
+      <a:spPr/>
+      <a:bodyPr/>
+      <a:lstStyle/>
+      <a:style>
+        <a:lnRef idx="2">
+          <a:schemeClr val="accent1"/>
+        </a:lnRef>
+        <a:fillRef idx="0">
+          <a:schemeClr val="accent1"/>
+        </a:fillRef>
+        <a:effectRef idx="1">
+          <a:schemeClr val="accent1"/>
+        </a:effectRef>
+        <a:fontRef idx="minor">
+          <a:schemeClr val="tx1"/>
+        </a:fontRef>
+      </a:style>
+    </a:lnDef>
+  </a:objectDefaults>
+  <a:extraClrSchemeLst/>
+  <a:extLst>
+    <a:ext uri="{05A4C25C-085E-4340-85A3-A5531E510DB2}">
+      <thm15:themeFamily xmlns:thm15="http://schemas.microsoft.com/office/thememl/2012/main" name="Office Theme" id="{2E142A2C-CD16-42D6-873A-C26D2A0506FA}" vid="{1BDDFF52-6CD6-40A5-AB3C-68EB2F1E4D0A}"/>
+    </a:ext>
+  </a:extLst>
+</a:theme>
 </file>